--- a/出力/役員報告_パイプライン挽回計画_20261006.pptx
+++ b/出力/役員報告_パイプライン挽回計画_20261006.pptx
@@ -7,9 +7,10 @@
   <p:sldIdLst>
     <p:sldId id="256" r:id="rId2"/>
     <p:sldId id="257" r:id="rId3"/>
+    <p:sldId id="258" r:id="rId4"/>
   </p:sldIdLst>
   <p:notesMasterIdLst>
-    <p:notesMasterId r:id="rId4"/>
+    <p:notesMasterId r:id="rId5"/>
   </p:notesMasterIdLst>
   <p:sldSz cx="12192000" cy="6858000"/>
   <p:notesSz cx="6858000" cy="12192000"/>
@@ -108,10 +109,11 @@
   <p:extLst>
     <p:ext uri="{521415D9-36F7-43E2-AB2F-B90AF26B5E84}">
       <p14:sectionLst xmlns:p14="http://schemas.microsoft.com/office/powerpoint/2010/main">
-        <p14:section name="役員報告" id="{5d71d8ce-3407-4daf-7528-af9978e0051e}">
+        <p14:section name="役員報告" id="{1a10a5ec-75c0-4190-a5ff-24477497e1a4}">
           <p14:sldIdLst>
             <p14:sldId id="256"/>
             <p14:sldId id="257"/>
+            <p14:sldId id="258"/>
           </p14:sldIdLst>
         </p14:section>
       </p14:sectionLst>
@@ -678,6 +680,784 @@
 </file>
 
 <file path=ppt/charts/chart3.xml><?xml version="1.0" encoding="utf-8"?>
+<c:chartSpace xmlns:c="http://schemas.openxmlformats.org/drawingml/2006/chart" xmlns:a="http://schemas.openxmlformats.org/drawingml/2006/main" xmlns:r="http://schemas.openxmlformats.org/officeDocument/2006/relationships">
+  <c:date1904 val="0"/>
+  <c:roundedCorners val="1"/>
+  <c:chart>
+    <c:autoTitleDeleted val="1"/>
+    <c:plotArea>
+      <c:layout/>
+      <c:barChart>
+        <c:barDir val="col"/>
+        <c:grouping val="clustered"/>
+        <c:varyColors val="0"/>
+        <c:ser>
+          <c:idx val="0"/>
+          <c:order val="0"/>
+          <c:tx>
+            <c:strRef>
+              <c:f>Sheet1!$B$1</c:f>
+              <c:strCache>
+                <c:ptCount val="1"/>
+                <c:pt idx="0">
+                  <c:v>9F時点</c:v>
+                </c:pt>
+              </c:strCache>
+            </c:strRef>
+          </c:tx>
+          <c:spPr>
+            <a:solidFill>
+              <a:srgbClr val="D6E4F0"/>
+            </a:solidFill>
+            <a:effectLst/>
+          </c:spPr>
+          <c:invertIfNegative val="0"/>
+          <c:dLbls>
+            <c:numFmt formatCode="#,##0" sourceLinked="0"/>
+            <c:txPr>
+              <a:bodyPr/>
+              <a:lstStyle/>
+              <a:p>
+                <a:pPr>
+                  <a:defRPr b="0" i="0" strike="noStrike" sz="1100" u="none">
+                    <a:solidFill>
+                      <a:srgbClr val="1F2937"/>
+                    </a:solidFill>
+                    <a:latin typeface="+mn-lt"/>
+                  </a:defRPr>
+                </a:pPr>
+              </a:p>
+            </c:txPr>
+            <c:showLegendKey val="0"/>
+            <c:showVal val="1"/>
+            <c:showCatName val="0"/>
+            <c:showSerName val="0"/>
+            <c:showPercent val="0"/>
+            <c:showBubbleSize val="0"/>
+            <c:showLeaderLines val="0"/>
+          </c:dLbls>
+          <c:cat>
+            <c:multiLvlStrRef>
+              <c:f>Sheet1!$A$2:$A$3</c:f>
+              <c:multiLvlStrCache>
+                <c:ptCount val="2"/>
+                <c:lvl>
+                  <c:pt idx="0">
+                    <c:v>FCT</c:v>
+                  </c:pt>
+                  <c:pt idx="1">
+                    <c:v>Backup</c:v>
+                  </c:pt>
+                </c:lvl>
+              </c:multiLvlStrCache>
+            </c:multiLvlStrRef>
+          </c:cat>
+          <c:val>
+            <c:numRef>
+              <c:f>Sheet1!$B$2:$B$3</c:f>
+              <c:numCache>
+                <c:formatCode>General</c:formatCode>
+                <c:ptCount val="2"/>
+                <c:pt idx="0">
+                  <c:v>18</c:v>
+                </c:pt>
+                <c:pt idx="1">
+                  <c:v>13</c:v>
+                </c:pt>
+              </c:numCache>
+            </c:numRef>
+          </c:val>
+        </c:ser>
+        <c:ser>
+          <c:idx val="1"/>
+          <c:order val="1"/>
+          <c:tx>
+            <c:strRef>
+              <c:f>Sheet1!$C$1</c:f>
+              <c:strCache>
+                <c:ptCount val="1"/>
+                <c:pt idx="0">
+                  <c:v>10/5時点</c:v>
+                </c:pt>
+              </c:strCache>
+            </c:strRef>
+          </c:tx>
+          <c:spPr>
+            <a:solidFill>
+              <a:srgbClr val="1B2A4A"/>
+            </a:solidFill>
+            <a:effectLst/>
+          </c:spPr>
+          <c:invertIfNegative val="0"/>
+          <c:dLbls>
+            <c:numFmt formatCode="#,##0" sourceLinked="0"/>
+            <c:txPr>
+              <a:bodyPr/>
+              <a:lstStyle/>
+              <a:p>
+                <a:pPr>
+                  <a:defRPr b="0" i="0" strike="noStrike" sz="1100" u="none">
+                    <a:solidFill>
+                      <a:srgbClr val="1F2937"/>
+                    </a:solidFill>
+                    <a:latin typeface="+mn-lt"/>
+                  </a:defRPr>
+                </a:pPr>
+              </a:p>
+            </c:txPr>
+            <c:showLegendKey val="0"/>
+            <c:showVal val="1"/>
+            <c:showCatName val="0"/>
+            <c:showSerName val="0"/>
+            <c:showPercent val="0"/>
+            <c:showBubbleSize val="0"/>
+            <c:showLeaderLines val="0"/>
+          </c:dLbls>
+          <c:cat>
+            <c:multiLvlStrRef>
+              <c:f>Sheet1!$A$2:$A$3</c:f>
+              <c:multiLvlStrCache>
+                <c:ptCount val="2"/>
+                <c:lvl>
+                  <c:pt idx="0">
+                    <c:v>FCT</c:v>
+                  </c:pt>
+                  <c:pt idx="1">
+                    <c:v>Backup</c:v>
+                  </c:pt>
+                </c:lvl>
+              </c:multiLvlStrCache>
+            </c:multiLvlStrRef>
+          </c:cat>
+          <c:val>
+            <c:numRef>
+              <c:f>Sheet1!$C$2:$C$3</c:f>
+              <c:numCache>
+                <c:formatCode>General</c:formatCode>
+                <c:ptCount val="2"/>
+                <c:pt idx="0">
+                  <c:v>16</c:v>
+                </c:pt>
+                <c:pt idx="1">
+                  <c:v>3</c:v>
+                </c:pt>
+              </c:numCache>
+            </c:numRef>
+          </c:val>
+        </c:ser>
+        <c:dLbls>
+          <c:numFmt formatCode="#,##0" sourceLinked="0"/>
+          <c:txPr>
+            <a:bodyPr/>
+            <a:lstStyle/>
+            <a:p>
+              <a:pPr>
+                <a:defRPr b="0" i="0" strike="noStrike" sz="1100" u="none">
+                  <a:solidFill>
+                    <a:srgbClr val="1F2937"/>
+                  </a:solidFill>
+                  <a:latin typeface="+mn-lt"/>
+                </a:defRPr>
+              </a:pPr>
+            </a:p>
+          </c:txPr>
+          <c:showLegendKey val="0"/>
+          <c:showVal val="1"/>
+          <c:showCatName val="0"/>
+          <c:showSerName val="0"/>
+          <c:showPercent val="0"/>
+          <c:showBubbleSize val="0"/>
+          <c:showLeaderLines val="0"/>
+        </c:dLbls>
+        <c:gapWidth val="60"/>
+        <c:overlap val="0"/>
+        <c:axId val="2094734554"/>
+        <c:axId val="2094734552"/>
+        <c:axId val="2094734556"/>
+      </c:barChart>
+      <c:catAx>
+        <c:axId val="2094734554"/>
+        <c:scaling>
+          <c:orientation val="minMax"/>
+        </c:scaling>
+        <c:delete val="0"/>
+        <c:axPos val="b"/>
+        <c:numFmt formatCode="General" sourceLinked="1"/>
+        <c:majorTickMark val="out"/>
+        <c:minorTickMark val="none"/>
+        <c:tickLblPos val="low"/>
+        <c:spPr>
+          <a:ln w="12700" cap="flat">
+            <a:solidFill>
+              <a:srgbClr val="888888"/>
+            </a:solidFill>
+            <a:prstDash val="solid"/>
+            <a:round/>
+          </a:ln>
+        </c:spPr>
+        <c:txPr>
+          <a:bodyPr/>
+          <a:lstStyle/>
+          <a:p>
+            <a:pPr>
+              <a:defRPr sz="1100" b="0" i="0" u="none" strike="noStrike">
+                <a:solidFill>
+                  <a:srgbClr val="1F2937"/>
+                </a:solidFill>
+                <a:latin typeface="+mn-lt"/>
+              </a:defRPr>
+            </a:pPr>
+            <a:endParaRPr lang="en-US"/>
+          </a:p>
+        </c:txPr>
+        <c:crossAx val="2094734552"/>
+        <c:crosses val="autoZero"/>
+        <c:auto val="1"/>
+        <c:lblAlgn val="ctr"/>
+        <c:noMultiLvlLbl val="1"/>
+      </c:catAx>
+      <c:valAx>
+        <c:axId val="2094734552"/>
+        <c:scaling>
+          <c:orientation val="minMax"/>
+        </c:scaling>
+        <c:delete val="1"/>
+        <c:axPos val="l"/>
+        <c:numFmt formatCode="General" sourceLinked="0"/>
+        <c:majorTickMark val="out"/>
+        <c:minorTickMark val="none"/>
+        <c:tickLblPos val="nextTo"/>
+        <c:spPr>
+          <a:ln w="12700" cap="flat">
+            <a:solidFill>
+              <a:srgbClr val="888888"/>
+            </a:solidFill>
+            <a:prstDash val="solid"/>
+            <a:round/>
+          </a:ln>
+        </c:spPr>
+        <c:txPr>
+          <a:bodyPr/>
+          <a:lstStyle/>
+          <a:p>
+            <a:pPr>
+              <a:defRPr sz="1200" b="0" i="0" u="none" strike="noStrike">
+                <a:solidFill>
+                  <a:srgbClr val="000000"/>
+                </a:solidFill>
+                <a:latin typeface="+mn-lt"/>
+              </a:defRPr>
+            </a:pPr>
+            <a:endParaRPr lang="en-US"/>
+          </a:p>
+        </c:txPr>
+        <c:crossAx val="2094734554"/>
+        <c:crosses val="autoZero"/>
+        <c:crossBetween val="between"/>
+      </c:valAx>
+      <c:spPr>
+        <a:noFill/>
+        <a:ln>
+          <a:noFill/>
+        </a:ln>
+        <a:effectLst/>
+      </c:spPr>
+    </c:plotArea>
+    <c:legend>
+      <c:legendPos val="t"/>
+      <c:overlay val="0"/>
+      <c:txPr>
+        <a:bodyPr/>
+        <a:lstStyle/>
+        <a:p>
+          <a:pPr>
+            <a:defRPr sz="1000">
+              <a:latin typeface="+mn-lt"/>
+              <a:cs typeface="+mn-lt"/>
+            </a:defRPr>
+          </a:pPr>
+          <a:endParaRPr lang="en-US"/>
+        </a:p>
+      </c:txPr>
+    </c:legend>
+    <c:plotVisOnly val="1"/>
+    <c:dispBlanksAs val="span"/>
+  </c:chart>
+  <c:spPr>
+    <a:noFill/>
+    <a:ln>
+      <a:noFill/>
+    </a:ln>
+    <a:effectLst/>
+  </c:spPr>
+  <c:externalData r:id="rId1">
+    <c:autoUpdate val="0"/>
+  </c:externalData>
+</c:chartSpace>
+</file>
+
+<file path=ppt/charts/chart4.xml><?xml version="1.0" encoding="utf-8"?>
+<c:chartSpace xmlns:c="http://schemas.openxmlformats.org/drawingml/2006/chart" xmlns:a="http://schemas.openxmlformats.org/drawingml/2006/main" xmlns:r="http://schemas.openxmlformats.org/officeDocument/2006/relationships">
+  <c:date1904 val="0"/>
+  <c:roundedCorners val="1"/>
+  <c:chart>
+    <c:autoTitleDeleted val="1"/>
+    <c:plotArea>
+      <c:layout/>
+      <c:barChart>
+        <c:barDir val="col"/>
+        <c:grouping val="stacked"/>
+        <c:varyColors val="0"/>
+        <c:ser>
+          <c:idx val="0"/>
+          <c:order val="0"/>
+          <c:tx>
+            <c:strRef>
+              <c:f>Sheet1!$B$1</c:f>
+              <c:strCache>
+                <c:ptCount val="1"/>
+                <c:pt idx="0">
+                  <c:v>見込み</c:v>
+                </c:pt>
+              </c:strCache>
+            </c:strRef>
+          </c:tx>
+          <c:spPr>
+            <a:solidFill>
+              <a:srgbClr val="8A94A6"/>
+            </a:solidFill>
+            <a:effectLst/>
+          </c:spPr>
+          <c:invertIfNegative val="0"/>
+          <c:dLbls>
+            <c:numFmt formatCode="0.0;;;" sourceLinked="0"/>
+            <c:txPr>
+              <a:bodyPr/>
+              <a:lstStyle/>
+              <a:p>
+                <a:pPr>
+                  <a:defRPr b="0" i="0" strike="noStrike" sz="1100" u="none">
+                    <a:solidFill>
+                      <a:srgbClr val="FFFFFF"/>
+                    </a:solidFill>
+                    <a:latin typeface="+mn-lt"/>
+                  </a:defRPr>
+                </a:pPr>
+              </a:p>
+            </c:txPr>
+            <c:dLblPos val="ctr"/>
+            <c:showLegendKey val="0"/>
+            <c:showVal val="1"/>
+            <c:showCatName val="0"/>
+            <c:showSerName val="0"/>
+            <c:showPercent val="0"/>
+            <c:showBubbleSize val="0"/>
+            <c:showLeaderLines val="0"/>
+          </c:dLbls>
+          <c:cat>
+            <c:multiLvlStrRef>
+              <c:f>Sheet1!$A$2:$A$3</c:f>
+              <c:multiLvlStrCache>
+                <c:ptCount val="2"/>
+                <c:lvl>
+                  <c:pt idx="0">
+                    <c:v>現状見込み</c:v>
+                  </c:pt>
+                  <c:pt idx="1">
+                    <c:v>必要水準</c:v>
+                  </c:pt>
+                </c:lvl>
+              </c:multiLvlStrCache>
+            </c:multiLvlStrRef>
+          </c:cat>
+          <c:val>
+            <c:numRef>
+              <c:f>Sheet1!$B$2:$B$3</c:f>
+              <c:numCache>
+                <c:formatCode>General</c:formatCode>
+                <c:ptCount val="2"/>
+                <c:pt idx="0">
+                  <c:v>10</c:v>
+                </c:pt>
+                <c:pt idx="1">
+                  <c:v>0</c:v>
+                </c:pt>
+              </c:numCache>
+            </c:numRef>
+          </c:val>
+        </c:ser>
+        <c:ser>
+          <c:idx val="1"/>
+          <c:order val="1"/>
+          <c:tx>
+            <c:strRef>
+              <c:f>Sheet1!$C$1</c:f>
+              <c:strCache>
+                <c:ptCount val="1"/>
+                <c:pt idx="0">
+                  <c:v>Q3 FCT決め切り</c:v>
+                </c:pt>
+              </c:strCache>
+            </c:strRef>
+          </c:tx>
+          <c:spPr>
+            <a:solidFill>
+              <a:srgbClr val="1B2A4A"/>
+            </a:solidFill>
+            <a:effectLst/>
+          </c:spPr>
+          <c:invertIfNegative val="0"/>
+          <c:dLbls>
+            <c:numFmt formatCode="0.0;;;" sourceLinked="0"/>
+            <c:txPr>
+              <a:bodyPr/>
+              <a:lstStyle/>
+              <a:p>
+                <a:pPr>
+                  <a:defRPr b="0" i="0" strike="noStrike" sz="1100" u="none">
+                    <a:solidFill>
+                      <a:srgbClr val="FFFFFF"/>
+                    </a:solidFill>
+                    <a:latin typeface="+mn-lt"/>
+                  </a:defRPr>
+                </a:pPr>
+              </a:p>
+            </c:txPr>
+            <c:dLblPos val="ctr"/>
+            <c:showLegendKey val="0"/>
+            <c:showVal val="1"/>
+            <c:showCatName val="0"/>
+            <c:showSerName val="0"/>
+            <c:showPercent val="0"/>
+            <c:showBubbleSize val="0"/>
+            <c:showLeaderLines val="0"/>
+          </c:dLbls>
+          <c:cat>
+            <c:multiLvlStrRef>
+              <c:f>Sheet1!$A$2:$A$3</c:f>
+              <c:multiLvlStrCache>
+                <c:ptCount val="2"/>
+                <c:lvl>
+                  <c:pt idx="0">
+                    <c:v>現状見込み</c:v>
+                  </c:pt>
+                  <c:pt idx="1">
+                    <c:v>必要水準</c:v>
+                  </c:pt>
+                </c:lvl>
+              </c:multiLvlStrCache>
+            </c:multiLvlStrRef>
+          </c:cat>
+          <c:val>
+            <c:numRef>
+              <c:f>Sheet1!$C$2:$C$3</c:f>
+              <c:numCache>
+                <c:formatCode>General</c:formatCode>
+                <c:ptCount val="2"/>
+                <c:pt idx="0">
+                  <c:v>0</c:v>
+                </c:pt>
+                <c:pt idx="1">
+                  <c:v>13</c:v>
+                </c:pt>
+              </c:numCache>
+            </c:numRef>
+          </c:val>
+        </c:ser>
+        <c:ser>
+          <c:idx val="2"/>
+          <c:order val="2"/>
+          <c:tx>
+            <c:strRef>
+              <c:f>Sheet1!$D$1</c:f>
+              <c:strCache>
+                <c:ptCount val="1"/>
+                <c:pt idx="0">
+                  <c:v>Backup昇格</c:v>
+                </c:pt>
+              </c:strCache>
+            </c:strRef>
+          </c:tx>
+          <c:spPr>
+            <a:solidFill>
+              <a:srgbClr val="D9822B"/>
+            </a:solidFill>
+            <a:effectLst/>
+          </c:spPr>
+          <c:invertIfNegative val="0"/>
+          <c:dLbls>
+            <c:numFmt formatCode="0.0;;;" sourceLinked="0"/>
+            <c:txPr>
+              <a:bodyPr/>
+              <a:lstStyle/>
+              <a:p>
+                <a:pPr>
+                  <a:defRPr b="0" i="0" strike="noStrike" sz="1100" u="none">
+                    <a:solidFill>
+                      <a:srgbClr val="FFFFFF"/>
+                    </a:solidFill>
+                    <a:latin typeface="+mn-lt"/>
+                  </a:defRPr>
+                </a:pPr>
+              </a:p>
+            </c:txPr>
+            <c:dLblPos val="ctr"/>
+            <c:showLegendKey val="0"/>
+            <c:showVal val="1"/>
+            <c:showCatName val="0"/>
+            <c:showSerName val="0"/>
+            <c:showPercent val="0"/>
+            <c:showBubbleSize val="0"/>
+            <c:showLeaderLines val="0"/>
+          </c:dLbls>
+          <c:cat>
+            <c:multiLvlStrRef>
+              <c:f>Sheet1!$A$2:$A$3</c:f>
+              <c:multiLvlStrCache>
+                <c:ptCount val="2"/>
+                <c:lvl>
+                  <c:pt idx="0">
+                    <c:v>現状見込み</c:v>
+                  </c:pt>
+                  <c:pt idx="1">
+                    <c:v>必要水準</c:v>
+                  </c:pt>
+                </c:lvl>
+              </c:multiLvlStrCache>
+            </c:multiLvlStrRef>
+          </c:cat>
+          <c:val>
+            <c:numRef>
+              <c:f>Sheet1!$D$2:$D$3</c:f>
+              <c:numCache>
+                <c:formatCode>General</c:formatCode>
+                <c:ptCount val="2"/>
+                <c:pt idx="0">
+                  <c:v>0</c:v>
+                </c:pt>
+                <c:pt idx="1">
+                  <c:v>1</c:v>
+                </c:pt>
+              </c:numCache>
+            </c:numRef>
+          </c:val>
+        </c:ser>
+        <c:ser>
+          <c:idx val="3"/>
+          <c:order val="3"/>
+          <c:tx>
+            <c:strRef>
+              <c:f>Sheet1!$E$1</c:f>
+              <c:strCache>
+                <c:ptCount val="1"/>
+                <c:pt idx="0">
+                  <c:v>Q4から前倒し</c:v>
+                </c:pt>
+              </c:strCache>
+            </c:strRef>
+          </c:tx>
+          <c:spPr>
+            <a:solidFill>
+              <a:srgbClr val="0F8B7E"/>
+            </a:solidFill>
+            <a:effectLst/>
+          </c:spPr>
+          <c:invertIfNegative val="0"/>
+          <c:dLbls>
+            <c:numFmt formatCode="0.0;;;" sourceLinked="0"/>
+            <c:txPr>
+              <a:bodyPr/>
+              <a:lstStyle/>
+              <a:p>
+                <a:pPr>
+                  <a:defRPr b="0" i="0" strike="noStrike" sz="1100" u="none">
+                    <a:solidFill>
+                      <a:srgbClr val="FFFFFF"/>
+                    </a:solidFill>
+                    <a:latin typeface="+mn-lt"/>
+                  </a:defRPr>
+                </a:pPr>
+              </a:p>
+            </c:txPr>
+            <c:dLblPos val="ctr"/>
+            <c:showLegendKey val="0"/>
+            <c:showVal val="1"/>
+            <c:showCatName val="0"/>
+            <c:showSerName val="0"/>
+            <c:showPercent val="0"/>
+            <c:showBubbleSize val="0"/>
+            <c:showLeaderLines val="0"/>
+          </c:dLbls>
+          <c:cat>
+            <c:multiLvlStrRef>
+              <c:f>Sheet1!$A$2:$A$3</c:f>
+              <c:multiLvlStrCache>
+                <c:ptCount val="2"/>
+                <c:lvl>
+                  <c:pt idx="0">
+                    <c:v>現状見込み</c:v>
+                  </c:pt>
+                  <c:pt idx="1">
+                    <c:v>必要水準</c:v>
+                  </c:pt>
+                </c:lvl>
+              </c:multiLvlStrCache>
+            </c:multiLvlStrRef>
+          </c:cat>
+          <c:val>
+            <c:numRef>
+              <c:f>Sheet1!$E$2:$E$3</c:f>
+              <c:numCache>
+                <c:formatCode>General</c:formatCode>
+                <c:ptCount val="2"/>
+                <c:pt idx="0">
+                  <c:v>0</c:v>
+                </c:pt>
+                <c:pt idx="1">
+                  <c:v>4</c:v>
+                </c:pt>
+              </c:numCache>
+            </c:numRef>
+          </c:val>
+        </c:ser>
+        <c:dLbls>
+          <c:numFmt formatCode="0.0;;;" sourceLinked="0"/>
+          <c:txPr>
+            <a:bodyPr/>
+            <a:lstStyle/>
+            <a:p>
+              <a:pPr>
+                <a:defRPr b="0" i="0" strike="noStrike" sz="1100" u="none">
+                  <a:solidFill>
+                    <a:srgbClr val="FFFFFF"/>
+                  </a:solidFill>
+                  <a:latin typeface="+mn-lt"/>
+                </a:defRPr>
+              </a:pPr>
+            </a:p>
+          </c:txPr>
+          <c:dLblPos val="ctr"/>
+          <c:showLegendKey val="0"/>
+          <c:showVal val="1"/>
+          <c:showCatName val="0"/>
+          <c:showSerName val="0"/>
+          <c:showPercent val="0"/>
+          <c:showBubbleSize val="0"/>
+          <c:showLeaderLines val="0"/>
+        </c:dLbls>
+        <c:gapWidth val="35"/>
+        <c:overlap val="100"/>
+        <c:axId val="2094734554"/>
+        <c:axId val="2094734552"/>
+        <c:axId val="2094734556"/>
+      </c:barChart>
+      <c:catAx>
+        <c:axId val="2094734554"/>
+        <c:scaling>
+          <c:orientation val="minMax"/>
+        </c:scaling>
+        <c:delete val="0"/>
+        <c:axPos val="b"/>
+        <c:numFmt formatCode="General" sourceLinked="1"/>
+        <c:majorTickMark val="out"/>
+        <c:minorTickMark val="none"/>
+        <c:tickLblPos val="low"/>
+        <c:spPr>
+          <a:ln w="12700" cap="flat">
+            <a:solidFill>
+              <a:srgbClr val="888888"/>
+            </a:solidFill>
+            <a:prstDash val="solid"/>
+            <a:round/>
+          </a:ln>
+        </c:spPr>
+        <c:txPr>
+          <a:bodyPr/>
+          <a:lstStyle/>
+          <a:p>
+            <a:pPr>
+              <a:defRPr sz="1000" b="0" i="0" u="none" strike="noStrike">
+                <a:solidFill>
+                  <a:srgbClr val="1F2937"/>
+                </a:solidFill>
+                <a:latin typeface="+mn-lt"/>
+              </a:defRPr>
+            </a:pPr>
+            <a:endParaRPr lang="en-US"/>
+          </a:p>
+        </c:txPr>
+        <c:crossAx val="2094734552"/>
+        <c:crosses val="autoZero"/>
+        <c:auto val="1"/>
+        <c:lblAlgn val="ctr"/>
+        <c:noMultiLvlLbl val="1"/>
+      </c:catAx>
+      <c:valAx>
+        <c:axId val="2094734552"/>
+        <c:scaling>
+          <c:orientation val="minMax"/>
+          <c:max val="19"/>
+          <c:min val="0"/>
+        </c:scaling>
+        <c:delete val="1"/>
+        <c:axPos val="l"/>
+        <c:numFmt formatCode="General" sourceLinked="0"/>
+        <c:majorTickMark val="out"/>
+        <c:minorTickMark val="none"/>
+        <c:tickLblPos val="nextTo"/>
+        <c:spPr>
+          <a:ln w="12700" cap="flat">
+            <a:solidFill>
+              <a:srgbClr val="888888"/>
+            </a:solidFill>
+            <a:prstDash val="solid"/>
+            <a:round/>
+          </a:ln>
+        </c:spPr>
+        <c:txPr>
+          <a:bodyPr/>
+          <a:lstStyle/>
+          <a:p>
+            <a:pPr>
+              <a:defRPr sz="1200" b="0" i="0" u="none" strike="noStrike">
+                <a:solidFill>
+                  <a:srgbClr val="000000"/>
+                </a:solidFill>
+                <a:latin typeface="+mn-lt"/>
+              </a:defRPr>
+            </a:pPr>
+            <a:endParaRPr lang="en-US"/>
+          </a:p>
+        </c:txPr>
+        <c:crossAx val="2094734554"/>
+        <c:crosses val="autoZero"/>
+        <c:crossBetween val="between"/>
+      </c:valAx>
+      <c:spPr>
+        <a:noFill/>
+        <a:ln>
+          <a:noFill/>
+        </a:ln>
+        <a:effectLst/>
+      </c:spPr>
+    </c:plotArea>
+    <c:plotVisOnly val="1"/>
+    <c:dispBlanksAs val="span"/>
+  </c:chart>
+  <c:spPr>
+    <a:noFill/>
+    <a:ln>
+      <a:noFill/>
+    </a:ln>
+    <a:effectLst/>
+  </c:spPr>
+  <c:externalData r:id="rId1">
+    <c:autoUpdate val="0"/>
+  </c:externalData>
+</c:chartSpace>
+</file>
+
+<file path=ppt/charts/chart5.xml><?xml version="1.0" encoding="utf-8"?>
 <c:chartSpace xmlns:c="http://schemas.openxmlformats.org/drawingml/2006/chart" xmlns:a="http://schemas.openxmlformats.org/drawingml/2006/main" xmlns:r="http://schemas.openxmlformats.org/officeDocument/2006/relationships">
   <c:date1904 val="0"/>
   <c:roundedCorners val="1"/>
@@ -1621,7 +2401,7 @@
           <a:p>
             <a:r>
               <a:rPr lang="en-US" dirty="0"/>
-              <a:t>①=下期Backup40件×15%×(モデル勝率−10%)、②=来期へ移った54件×10%×モデル勝率、③=422名×2%≒8.4商談×FCT化32%(Sep報告slide4: 30/94)×平均勝率0.54、④⑤=リード保証148件と展示会2回×110リードを同じ率で換算。ストレッチは①②の率を2.1倍にした場合。</a:t>
+              <a:t>Q3=2026年10〜12月。見込みは案件Excel(10/5版)のQ3案件に、年間と同じ式(FCT×モデル勝率+Backup×10%)を当てた値。必要水準の内訳(決め切り13・Backup1・前倒し4)は18台に届く組み合わせの一例で、予測ではない。MTO&gt;Week+5週は案件Excelの記載。</a:t>
             </a:r>
             <a:endParaRPr lang="en-US" dirty="0"/>
           </a:p>
@@ -1645,6 +2425,94 @@
             <a:fld id="{F7021451-1387-4CA6-816F-3879F97B5CBC}" type="slidenum">
               <a:rPr lang="en-US"/>
               <a:t>2</a:t>
+            </a:fld>
+            <a:endParaRPr lang="en-US"/>
+          </a:p>
+        </p:txBody>
+      </p:sp>
+    </p:spTree>
+    <p:extLst>
+      <p:ext uri="{BB962C8B-B14F-4D97-AF65-F5344CB8AC3E}">
+        <p14:creationId xmlns:p14="http://schemas.microsoft.com/office/powerpoint/2010/main" val="1024086991"/>
+      </p:ext>
+    </p:extLst>
+  </p:cSld>
+  <p:clrMapOvr>
+    <a:masterClrMapping/>
+  </p:clrMapOvr>
+</p:notes>
+</file>
+
+<file path=ppt/notesSlides/notesSlide3.xml><?xml version="1.0" encoding="utf-8"?>
+<p:notes xmlns:a="http://schemas.openxmlformats.org/drawingml/2006/main" xmlns:r="http://schemas.openxmlformats.org/officeDocument/2006/relationships" xmlns:p="http://schemas.openxmlformats.org/presentationml/2006/main">
+  <p:cSld>
+    <p:spTree>
+      <p:nvGrpSpPr>
+        <p:cNvPr id="1" name=""/>
+        <p:cNvGrpSpPr/>
+        <p:nvPr/>
+      </p:nvGrpSpPr>
+      <p:grpSpPr>
+        <a:xfrm>
+          <a:off x="0" y="0"/>
+          <a:ext cx="0" cy="0"/>
+          <a:chOff x="0" y="0"/>
+          <a:chExt cx="0" cy="0"/>
+        </a:xfrm>
+      </p:grpSpPr>
+      <p:sp>
+        <p:nvSpPr>
+          <p:cNvPr id="2" name="Slide Image Placeholder 1"/>
+          <p:cNvSpPr>
+            <a:spLocks noGrp="1" noRot="1" noChangeAspect="1"/>
+          </p:cNvSpPr>
+          <p:nvPr>
+            <p:ph type="sldImg"/>
+          </p:nvPr>
+        </p:nvSpPr>
+        <p:spPr/>
+      </p:sp>
+      <p:sp>
+        <p:nvSpPr>
+          <p:cNvPr id="3" name="Notes Placeholder 2"/>
+          <p:cNvSpPr>
+            <a:spLocks noGrp="1"/>
+          </p:cNvSpPr>
+          <p:nvPr>
+            <p:ph type="body" idx="1"/>
+          </p:nvPr>
+        </p:nvSpPr>
+        <p:spPr/>
+        <p:txBody>
+          <a:bodyPr/>
+          <a:lstStyle/>
+          <a:p>
+            <a:r>
+              <a:rPr lang="en-US" dirty="0"/>
+              <a:t>①=下期Backup40件×15%×(モデル勝率−10%)、②=来期へ移った54件×10%×モデル勝率、③=422名×2%≒8.4商談×FCT化32%(Sep報告slide4: 30/94)×平均勝率0.54、④⑤=リード保証148件と展示会2回×110リードを同じ率で換算。ストレッチは①②の率を2.1倍にした場合。</a:t>
+            </a:r>
+            <a:endParaRPr lang="en-US" dirty="0"/>
+          </a:p>
+        </p:txBody>
+      </p:sp>
+      <p:sp>
+        <p:nvSpPr>
+          <p:cNvPr id="4" name="Slide Number Placeholder 3"/>
+          <p:cNvSpPr>
+            <a:spLocks noGrp="1"/>
+          </p:cNvSpPr>
+          <p:nvPr>
+            <p:ph type="sldNum" sz="quarter" idx="10"/>
+          </p:nvPr>
+        </p:nvSpPr>
+        <p:spPr/>
+        <p:txBody>
+          <a:bodyPr/>
+          <a:lstStyle/>
+          <a:p>
+            <a:fld id="{F7021451-1387-4CA6-816F-3879F97B5CBC}" type="slidenum">
+              <a:rPr lang="en-US"/>
+              <a:t>3</a:t>
             </a:fld>
             <a:endParaRPr lang="en-US"/>
           </a:p>
@@ -5086,7 +5954,7 @@
                   <a:schemeClr val="tx2"/>
                 </a:solidFill>
               </a:rPr>
-              <a:t>11月上旬までに8.7台を挽回、9F達成には棚卸の成果倍増が必要</a:t>
+              <a:t>Q3 BGT18台に対し見込み10.0台、FCT決め切りとQ4前倒しで8台を埋める</a:t>
             </a:r>
             <a:endParaRPr lang="en-US" sz="2400" dirty="0"/>
           </a:p>
@@ -5124,7 +5992,3754 @@
                   <a:schemeClr val="accent5"/>
                 </a:solidFill>
               </a:rPr>
-              <a:t>厳しめの率(Backup昇格15%・引き戻し10%・リード商談化2%)で試算。11/7に9F達成可否と追加打ち手を判定</a:t>
+              <a:t>Q3 FCT16件のうち13件が納期未定(C)。MTO品は受注から5週超のため、12月納品には11月上旬の受注確定がリミット</a:t>
+            </a:r>
+            <a:endParaRPr lang="en-US" sz="1300" dirty="0"/>
+          </a:p>
+        </p:txBody>
+      </p:sp>
+      <p:sp>
+        <p:nvSpPr>
+          <p:cNvPr id="4" name="q3kpi-0"/>
+          <p:cNvSpPr/>
+          <p:nvPr/>
+        </p:nvSpPr>
+        <p:spPr>
+          <a:xfrm>
+            <a:off x="457200" y="1417320"/>
+            <a:ext cx="2679192" cy="1188720"/>
+          </a:xfrm>
+          <a:prstGeom prst="roundRect">
+            <a:avLst>
+              <a:gd name="adj" fmla="val 6154"/>
+            </a:avLst>
+          </a:prstGeom>
+          <a:solidFill>
+            <a:schemeClr val="bg2"/>
+          </a:solidFill>
+          <a:ln w="12700">
+            <a:solidFill>
+              <a:schemeClr val="bg2"/>
+            </a:solidFill>
+            <a:prstDash val="solid"/>
+          </a:ln>
+        </p:spPr>
+      </p:sp>
+      <p:sp>
+        <p:nvSpPr>
+          <p:cNvPr id="5" name="q3kpi-t-0"/>
+          <p:cNvSpPr txBox="1"/>
+          <p:nvPr/>
+        </p:nvSpPr>
+        <p:spPr>
+          <a:xfrm>
+            <a:off x="640080" y="1508760"/>
+            <a:ext cx="2313432" cy="292608"/>
+          </a:xfrm>
+          <a:prstGeom prst="rect">
+            <a:avLst/>
+          </a:prstGeom>
+          <a:noFill/>
+          <a:ln/>
+        </p:spPr>
+        <p:txBody>
+          <a:bodyPr wrap="square" lIns="0" tIns="0" rIns="0" bIns="0" rtlCol="0" anchor="ctr"/>
+          <a:lstStyle/>
+          <a:p>
+            <a:pPr algn="l" indent="0" marL="0">
+              <a:buNone/>
+            </a:pPr>
+            <a:r>
+              <a:rPr lang="en-US" sz="1200" b="1" dirty="0">
+                <a:solidFill>
+                  <a:schemeClr val="accent5"/>
+                </a:solidFill>
+              </a:rPr>
+              <a:t>Q3 BGT(10〜12月)</a:t>
+            </a:r>
+            <a:endParaRPr lang="en-US" sz="1200" dirty="0"/>
+          </a:p>
+        </p:txBody>
+      </p:sp>
+      <p:sp>
+        <p:nvSpPr>
+          <p:cNvPr id="6" name="q3kpi-v-0"/>
+          <p:cNvSpPr txBox="1"/>
+          <p:nvPr/>
+        </p:nvSpPr>
+        <p:spPr>
+          <a:xfrm>
+            <a:off x="640080" y="1764792"/>
+            <a:ext cx="2313432" cy="502920"/>
+          </a:xfrm>
+          <a:prstGeom prst="rect">
+            <a:avLst/>
+          </a:prstGeom>
+          <a:noFill/>
+          <a:ln/>
+        </p:spPr>
+        <p:txBody>
+          <a:bodyPr wrap="square" lIns="0" tIns="0" rIns="0" bIns="0" rtlCol="0" anchor="ctr"/>
+          <a:lstStyle/>
+          <a:p>
+            <a:pPr indent="0" marL="0">
+              <a:buNone/>
+            </a:pPr>
+            <a:r>
+              <a:rPr lang="en-US" sz="3000" b="1" dirty="0">
+                <a:solidFill>
+                  <a:schemeClr val="tx2"/>
+                </a:solidFill>
+              </a:rPr>
+              <a:t>18台</a:t>
+            </a:r>
+            <a:endParaRPr lang="en-US" sz="3000" dirty="0"/>
+          </a:p>
+        </p:txBody>
+      </p:sp>
+      <p:sp>
+        <p:nvSpPr>
+          <p:cNvPr id="7" name="q3kpi-s-0"/>
+          <p:cNvSpPr txBox="1"/>
+          <p:nvPr/>
+        </p:nvSpPr>
+        <p:spPr>
+          <a:xfrm>
+            <a:off x="640080" y="2258568"/>
+            <a:ext cx="2313432" cy="274320"/>
+          </a:xfrm>
+          <a:prstGeom prst="rect">
+            <a:avLst/>
+          </a:prstGeom>
+          <a:noFill/>
+          <a:ln/>
+        </p:spPr>
+        <p:txBody>
+          <a:bodyPr wrap="square" lIns="0" tIns="0" rIns="0" bIns="0" rtlCol="0" anchor="ctr"/>
+          <a:lstStyle/>
+          <a:p>
+            <a:pPr algn="l" indent="0" marL="0">
+              <a:buNone/>
+            </a:pPr>
+            <a:r>
+              <a:rPr lang="en-US" sz="1000" dirty="0">
+                <a:solidFill>
+                  <a:schemeClr val="tx1"/>
+                </a:solidFill>
+              </a:rPr>
+              <a:t>年間9F 60台のうち下期49台の一部</a:t>
+            </a:r>
+            <a:endParaRPr lang="en-US" sz="1000" dirty="0"/>
+          </a:p>
+        </p:txBody>
+      </p:sp>
+      <p:sp>
+        <p:nvSpPr>
+          <p:cNvPr id="8" name="q3kpi-1"/>
+          <p:cNvSpPr/>
+          <p:nvPr/>
+        </p:nvSpPr>
+        <p:spPr>
+          <a:xfrm>
+            <a:off x="3319272" y="1417320"/>
+            <a:ext cx="2679192" cy="1188720"/>
+          </a:xfrm>
+          <a:prstGeom prst="roundRect">
+            <a:avLst>
+              <a:gd name="adj" fmla="val 6154"/>
+            </a:avLst>
+          </a:prstGeom>
+          <a:solidFill>
+            <a:schemeClr val="bg2"/>
+          </a:solidFill>
+          <a:ln w="12700">
+            <a:solidFill>
+              <a:schemeClr val="bg2"/>
+            </a:solidFill>
+            <a:prstDash val="solid"/>
+          </a:ln>
+        </p:spPr>
+      </p:sp>
+      <p:sp>
+        <p:nvSpPr>
+          <p:cNvPr id="9" name="q3kpi-t-1"/>
+          <p:cNvSpPr txBox="1"/>
+          <p:nvPr/>
+        </p:nvSpPr>
+        <p:spPr>
+          <a:xfrm>
+            <a:off x="3502152" y="1508760"/>
+            <a:ext cx="2313432" cy="292608"/>
+          </a:xfrm>
+          <a:prstGeom prst="rect">
+            <a:avLst/>
+          </a:prstGeom>
+          <a:noFill/>
+          <a:ln/>
+        </p:spPr>
+        <p:txBody>
+          <a:bodyPr wrap="square" lIns="0" tIns="0" rIns="0" bIns="0" rtlCol="0" anchor="ctr"/>
+          <a:lstStyle/>
+          <a:p>
+            <a:pPr algn="l" indent="0" marL="0">
+              <a:buNone/>
+            </a:pPr>
+            <a:r>
+              <a:rPr lang="en-US" sz="1200" b="1" dirty="0">
+                <a:solidFill>
+                  <a:schemeClr val="accent5"/>
+                </a:solidFill>
+              </a:rPr>
+              <a:t>Q3 着地理論値(10/5)</a:t>
+            </a:r>
+            <a:endParaRPr lang="en-US" sz="1200" dirty="0"/>
+          </a:p>
+        </p:txBody>
+      </p:sp>
+      <p:sp>
+        <p:nvSpPr>
+          <p:cNvPr id="10" name="q3kpi-v-1"/>
+          <p:cNvSpPr txBox="1"/>
+          <p:nvPr/>
+        </p:nvSpPr>
+        <p:spPr>
+          <a:xfrm>
+            <a:off x="3502152" y="1764792"/>
+            <a:ext cx="2313432" cy="502920"/>
+          </a:xfrm>
+          <a:prstGeom prst="rect">
+            <a:avLst/>
+          </a:prstGeom>
+          <a:noFill/>
+          <a:ln/>
+        </p:spPr>
+        <p:txBody>
+          <a:bodyPr wrap="square" lIns="0" tIns="0" rIns="0" bIns="0" rtlCol="0" anchor="ctr"/>
+          <a:lstStyle/>
+          <a:p>
+            <a:pPr indent="0" marL="0">
+              <a:buNone/>
+            </a:pPr>
+            <a:r>
+              <a:rPr lang="en-US" sz="3000" b="1" dirty="0">
+                <a:solidFill>
+                  <a:schemeClr val="tx2"/>
+                </a:solidFill>
+              </a:rPr>
+              <a:t>10.0台</a:t>
+            </a:r>
+            <a:endParaRPr lang="en-US" sz="3000" dirty="0"/>
+          </a:p>
+        </p:txBody>
+      </p:sp>
+      <p:sp>
+        <p:nvSpPr>
+          <p:cNvPr id="11" name="q3kpi-s-1"/>
+          <p:cNvSpPr txBox="1"/>
+          <p:nvPr/>
+        </p:nvSpPr>
+        <p:spPr>
+          <a:xfrm>
+            <a:off x="3502152" y="2258568"/>
+            <a:ext cx="2313432" cy="274320"/>
+          </a:xfrm>
+          <a:prstGeom prst="rect">
+            <a:avLst/>
+          </a:prstGeom>
+          <a:noFill/>
+          <a:ln/>
+        </p:spPr>
+        <p:txBody>
+          <a:bodyPr wrap="square" lIns="0" tIns="0" rIns="0" bIns="0" rtlCol="0" anchor="ctr"/>
+          <a:lstStyle/>
+          <a:p>
+            <a:pPr algn="l" indent="0" marL="0">
+              <a:buNone/>
+            </a:pPr>
+            <a:r>
+              <a:rPr lang="en-US" sz="1000" dirty="0">
+                <a:solidFill>
+                  <a:schemeClr val="tx1"/>
+                </a:solidFill>
+              </a:rPr>
+              <a:t>9F時点 12.2台から ▲2.2台</a:t>
+            </a:r>
+            <a:endParaRPr lang="en-US" sz="1000" dirty="0"/>
+          </a:p>
+        </p:txBody>
+      </p:sp>
+      <p:sp>
+        <p:nvSpPr>
+          <p:cNvPr id="12" name="q3kpi-2"/>
+          <p:cNvSpPr/>
+          <p:nvPr/>
+        </p:nvSpPr>
+        <p:spPr>
+          <a:xfrm>
+            <a:off x="6181344" y="1417320"/>
+            <a:ext cx="2679192" cy="1188720"/>
+          </a:xfrm>
+          <a:prstGeom prst="roundRect">
+            <a:avLst>
+              <a:gd name="adj" fmla="val 6154"/>
+            </a:avLst>
+          </a:prstGeom>
+          <a:solidFill>
+            <a:schemeClr val="bg2"/>
+          </a:solidFill>
+          <a:ln w="12700">
+            <a:solidFill>
+              <a:schemeClr val="bg2"/>
+            </a:solidFill>
+            <a:prstDash val="solid"/>
+          </a:ln>
+        </p:spPr>
+      </p:sp>
+      <p:sp>
+        <p:nvSpPr>
+          <p:cNvPr id="13" name="q3kpi-t-2"/>
+          <p:cNvSpPr txBox="1"/>
+          <p:nvPr/>
+        </p:nvSpPr>
+        <p:spPr>
+          <a:xfrm>
+            <a:off x="6364224" y="1508760"/>
+            <a:ext cx="2313432" cy="292608"/>
+          </a:xfrm>
+          <a:prstGeom prst="rect">
+            <a:avLst/>
+          </a:prstGeom>
+          <a:noFill/>
+          <a:ln/>
+        </p:spPr>
+        <p:txBody>
+          <a:bodyPr wrap="square" lIns="0" tIns="0" rIns="0" bIns="0" rtlCol="0" anchor="ctr"/>
+          <a:lstStyle/>
+          <a:p>
+            <a:pPr algn="l" indent="0" marL="0">
+              <a:buNone/>
+            </a:pPr>
+            <a:r>
+              <a:rPr lang="en-US" sz="1200" b="1" dirty="0">
+                <a:solidFill>
+                  <a:schemeClr val="accent5"/>
+                </a:solidFill>
+              </a:rPr>
+              <a:t>Q3 ギャップ</a:t>
+            </a:r>
+            <a:endParaRPr lang="en-US" sz="1200" dirty="0"/>
+          </a:p>
+        </p:txBody>
+      </p:sp>
+      <p:sp>
+        <p:nvSpPr>
+          <p:cNvPr id="14" name="q3kpi-v-2"/>
+          <p:cNvSpPr txBox="1"/>
+          <p:nvPr/>
+        </p:nvSpPr>
+        <p:spPr>
+          <a:xfrm>
+            <a:off x="6364224" y="1764792"/>
+            <a:ext cx="2313432" cy="502920"/>
+          </a:xfrm>
+          <a:prstGeom prst="rect">
+            <a:avLst/>
+          </a:prstGeom>
+          <a:noFill/>
+          <a:ln/>
+        </p:spPr>
+        <p:txBody>
+          <a:bodyPr wrap="square" lIns="0" tIns="0" rIns="0" bIns="0" rtlCol="0" anchor="ctr"/>
+          <a:lstStyle/>
+          <a:p>
+            <a:pPr indent="0" marL="0">
+              <a:buNone/>
+            </a:pPr>
+            <a:r>
+              <a:rPr lang="en-US" sz="3000" b="1" dirty="0">
+                <a:solidFill>
+                  <a:schemeClr val="accent4"/>
+                </a:solidFill>
+              </a:rPr>
+              <a:t>8.0台</a:t>
+            </a:r>
+            <a:endParaRPr lang="en-US" sz="3000" dirty="0"/>
+          </a:p>
+        </p:txBody>
+      </p:sp>
+      <p:sp>
+        <p:nvSpPr>
+          <p:cNvPr id="15" name="q3kpi-s-2"/>
+          <p:cNvSpPr txBox="1"/>
+          <p:nvPr/>
+        </p:nvSpPr>
+        <p:spPr>
+          <a:xfrm>
+            <a:off x="6364224" y="2258568"/>
+            <a:ext cx="2313432" cy="274320"/>
+          </a:xfrm>
+          <a:prstGeom prst="rect">
+            <a:avLst/>
+          </a:prstGeom>
+          <a:noFill/>
+          <a:ln/>
+        </p:spPr>
+        <p:txBody>
+          <a:bodyPr wrap="square" lIns="0" tIns="0" rIns="0" bIns="0" rtlCol="0" anchor="ctr"/>
+          <a:lstStyle/>
+          <a:p>
+            <a:pPr algn="l" indent="0" marL="0">
+              <a:buNone/>
+            </a:pPr>
+            <a:r>
+              <a:rPr lang="en-US" sz="1000" dirty="0">
+                <a:solidFill>
+                  <a:schemeClr val="tx1"/>
+                </a:solidFill>
+              </a:rPr>
+              <a:t>FCTを全件取っても16台</a:t>
+            </a:r>
+            <a:endParaRPr lang="en-US" sz="1000" dirty="0"/>
+          </a:p>
+        </p:txBody>
+      </p:sp>
+      <p:sp>
+        <p:nvSpPr>
+          <p:cNvPr id="16" name="q3kpi-3"/>
+          <p:cNvSpPr/>
+          <p:nvPr/>
+        </p:nvSpPr>
+        <p:spPr>
+          <a:xfrm>
+            <a:off x="9043416" y="1417320"/>
+            <a:ext cx="2679192" cy="1188720"/>
+          </a:xfrm>
+          <a:prstGeom prst="roundRect">
+            <a:avLst>
+              <a:gd name="adj" fmla="val 6154"/>
+            </a:avLst>
+          </a:prstGeom>
+          <a:solidFill>
+            <a:schemeClr val="bg2"/>
+          </a:solidFill>
+          <a:ln w="12700">
+            <a:solidFill>
+              <a:schemeClr val="bg2"/>
+            </a:solidFill>
+            <a:prstDash val="solid"/>
+          </a:ln>
+        </p:spPr>
+      </p:sp>
+      <p:sp>
+        <p:nvSpPr>
+          <p:cNvPr id="17" name="q3kpi-t-3"/>
+          <p:cNvSpPr txBox="1"/>
+          <p:nvPr/>
+        </p:nvSpPr>
+        <p:spPr>
+          <a:xfrm>
+            <a:off x="9226296" y="1508760"/>
+            <a:ext cx="2313432" cy="292608"/>
+          </a:xfrm>
+          <a:prstGeom prst="rect">
+            <a:avLst/>
+          </a:prstGeom>
+          <a:noFill/>
+          <a:ln/>
+        </p:spPr>
+        <p:txBody>
+          <a:bodyPr wrap="square" lIns="0" tIns="0" rIns="0" bIns="0" rtlCol="0" anchor="ctr"/>
+          <a:lstStyle/>
+          <a:p>
+            <a:pPr algn="l" indent="0" marL="0">
+              <a:buNone/>
+            </a:pPr>
+            <a:r>
+              <a:rPr lang="en-US" sz="1200" b="1" dirty="0">
+                <a:solidFill>
+                  <a:schemeClr val="accent5"/>
+                </a:solidFill>
+              </a:rPr>
+              <a:t>Q3 FCT</a:t>
+            </a:r>
+            <a:endParaRPr lang="en-US" sz="1200" dirty="0"/>
+          </a:p>
+        </p:txBody>
+      </p:sp>
+      <p:sp>
+        <p:nvSpPr>
+          <p:cNvPr id="18" name="q3kpi-v-3"/>
+          <p:cNvSpPr txBox="1"/>
+          <p:nvPr/>
+        </p:nvSpPr>
+        <p:spPr>
+          <a:xfrm>
+            <a:off x="9226296" y="1764792"/>
+            <a:ext cx="2313432" cy="502920"/>
+          </a:xfrm>
+          <a:prstGeom prst="rect">
+            <a:avLst/>
+          </a:prstGeom>
+          <a:noFill/>
+          <a:ln/>
+        </p:spPr>
+        <p:txBody>
+          <a:bodyPr wrap="square" lIns="0" tIns="0" rIns="0" bIns="0" rtlCol="0" anchor="ctr"/>
+          <a:lstStyle/>
+          <a:p>
+            <a:pPr indent="0" marL="0">
+              <a:buNone/>
+            </a:pPr>
+            <a:r>
+              <a:rPr lang="en-US" sz="3000" b="1" dirty="0">
+                <a:solidFill>
+                  <a:schemeClr val="accent4"/>
+                </a:solidFill>
+              </a:rPr>
+              <a:t>16件</a:t>
+            </a:r>
+            <a:endParaRPr lang="en-US" sz="3000" dirty="0"/>
+          </a:p>
+        </p:txBody>
+      </p:sp>
+      <p:sp>
+        <p:nvSpPr>
+          <p:cNvPr id="19" name="q3kpi-s-3"/>
+          <p:cNvSpPr txBox="1"/>
+          <p:nvPr/>
+        </p:nvSpPr>
+        <p:spPr>
+          <a:xfrm>
+            <a:off x="9226296" y="2258568"/>
+            <a:ext cx="2313432" cy="274320"/>
+          </a:xfrm>
+          <a:prstGeom prst="rect">
+            <a:avLst/>
+          </a:prstGeom>
+          <a:noFill/>
+          <a:ln/>
+        </p:spPr>
+        <p:txBody>
+          <a:bodyPr wrap="square" lIns="0" tIns="0" rIns="0" bIns="0" rtlCol="0" anchor="ctr"/>
+          <a:lstStyle/>
+          <a:p>
+            <a:pPr algn="l" indent="0" marL="0">
+              <a:buNone/>
+            </a:pPr>
+            <a:r>
+              <a:rPr lang="en-US" sz="1000" dirty="0">
+                <a:solidFill>
+                  <a:schemeClr val="tx1"/>
+                </a:solidFill>
+              </a:rPr>
+              <a:t>うち納期未定(C) 13件・MTO 3件</a:t>
+            </a:r>
+            <a:endParaRPr lang="en-US" sz="1000" dirty="0"/>
+          </a:p>
+        </p:txBody>
+      </p:sp>
+      <p:sp>
+        <p:nvSpPr>
+          <p:cNvPr id="20" name="q3-pipe"/>
+          <p:cNvSpPr/>
+          <p:nvPr/>
+        </p:nvSpPr>
+        <p:spPr>
+          <a:xfrm>
+            <a:off x="457200" y="2834640"/>
+            <a:ext cx="3383280" cy="3520440"/>
+          </a:xfrm>
+          <a:prstGeom prst="roundRect">
+            <a:avLst>
+              <a:gd name="adj" fmla="val 2162"/>
+            </a:avLst>
+          </a:prstGeom>
+          <a:solidFill>
+            <a:schemeClr val="bg1"/>
+          </a:solidFill>
+          <a:ln w="12700">
+            <a:solidFill>
+              <a:schemeClr val="bg1"/>
+            </a:solidFill>
+            <a:prstDash val="solid"/>
+          </a:ln>
+        </p:spPr>
+      </p:sp>
+      <p:sp>
+        <p:nvSpPr>
+          <p:cNvPr id="21" name="q3-pipe-h"/>
+          <p:cNvSpPr txBox="1"/>
+          <p:nvPr/>
+        </p:nvSpPr>
+        <p:spPr>
+          <a:xfrm>
+            <a:off x="457200" y="2834640"/>
+            <a:ext cx="3383280" cy="292608"/>
+          </a:xfrm>
+          <a:prstGeom prst="rect">
+            <a:avLst/>
+          </a:prstGeom>
+          <a:noFill/>
+          <a:ln/>
+        </p:spPr>
+        <p:txBody>
+          <a:bodyPr wrap="square" lIns="0" tIns="0" rIns="0" bIns="0" rtlCol="0" anchor="ctr"/>
+          <a:lstStyle/>
+          <a:p>
+            <a:pPr algn="l" indent="0" marL="0">
+              <a:buNone/>
+            </a:pPr>
+            <a:r>
+              <a:rPr lang="en-US" sz="1400" b="1" dirty="0">
+                <a:solidFill>
+                  <a:schemeClr val="tx2"/>
+                </a:solidFill>
+              </a:rPr>
+              <a:t>Q3パイプライン(確度&gt;0)</a:t>
+            </a:r>
+            <a:endParaRPr lang="en-US" sz="1400" dirty="0"/>
+          </a:p>
+        </p:txBody>
+      </p:sp>
+      <p:graphicFrame>
+        <p:nvGraphicFramePr>
+          <p:cNvPr id="22" name="q3-pipe-chart" descr=""/>
+          <p:cNvGraphicFramePr/>
+          <p:nvPr/>
+        </p:nvGraphicFramePr>
+        <p:xfrm>
+          <a:off x="457200" y="3154680"/>
+          <a:ext cx="3383280" cy="2103120"/>
+        </p:xfrm>
+        <a:graphic xmlns:a="http://schemas.openxmlformats.org/drawingml/2006/main">
+          <a:graphicData uri="http://schemas.openxmlformats.org/drawingml/2006/chart">
+            <c:chart xmlns:c="http://schemas.openxmlformats.org/drawingml/2006/chart" r:id="rId1"/>
+          </a:graphicData>
+        </a:graphic>
+      </p:graphicFrame>
+      <p:sp>
+        <p:nvSpPr>
+          <p:cNvPr id="23" name="q3-pipe-note"/>
+          <p:cNvSpPr txBox="1"/>
+          <p:nvPr/>
+        </p:nvSpPr>
+        <p:spPr>
+          <a:xfrm>
+            <a:off x="594360" y="5303520"/>
+            <a:ext cx="3108960" cy="1005840"/>
+          </a:xfrm>
+          <a:prstGeom prst="rect">
+            <a:avLst/>
+          </a:prstGeom>
+          <a:noFill/>
+          <a:ln/>
+        </p:spPr>
+        <p:txBody>
+          <a:bodyPr wrap="square" lIns="0" tIns="0" rIns="0" bIns="0" rtlCol="0" anchor="t"/>
+          <a:lstStyle/>
+          <a:p>
+            <a:pPr indent="0" marL="0">
+              <a:spcAft>
+                <a:spcPts val="300"/>
+              </a:spcAft>
+              <a:buNone/>
+            </a:pPr>
+            <a:r>
+              <a:rPr lang="en-US" sz="1100" b="1" dirty="0">
+                <a:solidFill>
+                  <a:schemeClr val="tx1"/>
+                </a:solidFill>
+              </a:rPr>
+              <a:t>Backupが13件→3件に減り、予備がほぼない</a:t>
+            </a:r>
+            <a:endParaRPr lang="en-US" sz="1100" dirty="0"/>
+          </a:p>
+          <a:p>
+            <a:pPr indent="0" marL="0">
+              <a:spcAft>
+                <a:spcPts val="300"/>
+              </a:spcAft>
+              <a:buNone/>
+            </a:pPr>
+            <a:r>
+              <a:rPr lang="en-US" sz="1100" dirty="0">
+                <a:solidFill>
+                  <a:schemeClr val="tx1"/>
+                </a:solidFill>
+              </a:rPr>
+              <a:t>FCT16件: SH7・MA7・ID1・FP1</a:t>
+            </a:r>
+            <a:endParaRPr lang="en-US" sz="1100" dirty="0"/>
+          </a:p>
+          <a:p>
+            <a:pPr indent="0" marL="0">
+              <a:spcAft>
+                <a:spcPts val="300"/>
+              </a:spcAft>
+              <a:buNone/>
+            </a:pPr>
+            <a:r>
+              <a:rPr lang="en-US" sz="1100" dirty="0">
+                <a:solidFill>
+                  <a:schemeClr val="tx1"/>
+                </a:solidFill>
+              </a:rPr>
+              <a:t>顧客: アカデミア10・バイオ企業5・製薬1</a:t>
+            </a:r>
+            <a:endParaRPr lang="en-US" sz="1100" dirty="0"/>
+          </a:p>
+        </p:txBody>
+      </p:sp>
+      <p:sp>
+        <p:nvSpPr>
+          <p:cNvPr id="24" name="q3-agent"/>
+          <p:cNvSpPr/>
+          <p:nvPr/>
+        </p:nvSpPr>
+        <p:spPr>
+          <a:xfrm>
+            <a:off x="4069080" y="2834640"/>
+            <a:ext cx="3749040" cy="3520440"/>
+          </a:xfrm>
+          <a:prstGeom prst="roundRect">
+            <a:avLst>
+              <a:gd name="adj" fmla="val 2078"/>
+            </a:avLst>
+          </a:prstGeom>
+          <a:solidFill>
+            <a:schemeClr val="bg1"/>
+          </a:solidFill>
+          <a:ln w="12700">
+            <a:solidFill>
+              <a:schemeClr val="bg1"/>
+            </a:solidFill>
+            <a:prstDash val="solid"/>
+          </a:ln>
+        </p:spPr>
+      </p:sp>
+      <p:sp>
+        <p:nvSpPr>
+          <p:cNvPr id="25" name="q3-agent-h"/>
+          <p:cNvSpPr txBox="1"/>
+          <p:nvPr/>
+        </p:nvSpPr>
+        <p:spPr>
+          <a:xfrm>
+            <a:off x="4069080" y="2834640"/>
+            <a:ext cx="3749040" cy="292608"/>
+          </a:xfrm>
+          <a:prstGeom prst="rect">
+            <a:avLst/>
+          </a:prstGeom>
+          <a:noFill/>
+          <a:ln/>
+        </p:spPr>
+        <p:txBody>
+          <a:bodyPr wrap="square" lIns="0" tIns="0" rIns="0" bIns="0" rtlCol="0" anchor="ctr"/>
+          <a:lstStyle/>
+          <a:p>
+            <a:pPr algn="l" indent="0" marL="0">
+              <a:buNone/>
+            </a:pPr>
+            <a:r>
+              <a:rPr lang="en-US" sz="1400" b="1" dirty="0">
+                <a:solidFill>
+                  <a:schemeClr val="tx2"/>
+                </a:solidFill>
+              </a:rPr>
+              <a:t>代理店別(一次店、Q3)</a:t>
+            </a:r>
+            <a:endParaRPr lang="en-US" sz="1400" dirty="0"/>
+          </a:p>
+        </p:txBody>
+      </p:sp>
+      <p:graphicFrame>
+        <p:nvGraphicFramePr>
+          <p:cNvPr id="3" name="q3-agent-table"/>
+          <p:cNvGraphicFramePr>
+            <a:graphicFrameLocks noGrp="1"/>
+          </p:cNvGraphicFramePr>
+          <p:nvPr>
+            <p:extLst>
+              <p:ext uri="{D42A27DB-BD31-4B8C-83A1-F6EECF244321}">
+                <p14:modId xmlns:p14="http://schemas.microsoft.com/office/powerpoint/2010/main" val="1579011935"/>
+              </p:ext>
+            </p:extLst>
+          </p:nvPr>
+        </p:nvGraphicFramePr>
+        <p:xfrm>
+          <a:off x="4069080" y="3200400"/>
+          <a:ext cx="3749040" cy="914400"/>
+        </p:xfrm>
+        <a:graphic>
+          <a:graphicData uri="http://schemas.openxmlformats.org/drawingml/2006/table">
+            <a:tbl>
+              <a:tblPr/>
+              <a:tblGrid>
+                <a:gridCol w="1325880"/>
+                <a:gridCol w="457200"/>
+                <a:gridCol w="548640"/>
+                <a:gridCol w="777240"/>
+                <a:gridCol w="640080"/>
+              </a:tblGrid>
+              <a:tr h="274320">
+                <a:tc>
+                  <a:txBody>
+                    <a:bodyPr/>
+                    <a:lstStyle/>
+                    <a:p>
+                      <a:pPr algn="l" indent="0" marL="0">
+                        <a:buNone/>
+                      </a:pPr>
+                      <a:r>
+                        <a:rPr lang="en-US" sz="900" b="1" dirty="0">
+                          <a:solidFill>
+                            <a:schemeClr val="bg1"/>
+                          </a:solidFill>
+                          <a:latin typeface="Meiryo UI" pitchFamily="34" charset="0"/>
+                          <a:ea typeface="Meiryo UI" pitchFamily="34" charset="-122"/>
+                          <a:cs typeface="Meiryo UI" pitchFamily="34" charset="-120"/>
+                        </a:rPr>
+                        <a:t>一次店</a:t>
+                      </a:r>
+                      <a:endParaRPr lang="en-US" sz="900" dirty="0">
+                        <a:latin typeface="Meiryo UI" charset="0"/>
+                        <a:ea typeface="Meiryo UI" charset="0"/>
+                        <a:cs typeface="Meiryo UI" charset="0"/>
+                      </a:endParaRPr>
+                    </a:p>
+                  </a:txBody>
+                  <a:tcPr marL="36576" marR="36576" marT="0" marB="0" anchor="ctr">
+                    <a:lnL w="6350" cap="flat" cmpd="sng" algn="ctr">
+                      <a:solidFill>
+                        <a:srgbClr val="EEF2F7"/>
+                      </a:solidFill>
+                      <a:prstDash val="solid"/>
+                      <a:round/>
+                      <a:headEnd type="none" w="med" len="med"/>
+                      <a:tailEnd type="none" w="med" len="med"/>
+                    </a:lnL>
+                    <a:lnR w="6350" cap="flat" cmpd="sng" algn="ctr">
+                      <a:solidFill>
+                        <a:srgbClr val="EEF2F7"/>
+                      </a:solidFill>
+                      <a:prstDash val="solid"/>
+                      <a:round/>
+                      <a:headEnd type="none" w="med" len="med"/>
+                      <a:tailEnd type="none" w="med" len="med"/>
+                    </a:lnR>
+                    <a:lnT w="6350" cap="flat" cmpd="sng" algn="ctr">
+                      <a:solidFill>
+                        <a:srgbClr val="EEF2F7"/>
+                      </a:solidFill>
+                      <a:prstDash val="solid"/>
+                      <a:round/>
+                      <a:headEnd type="none" w="med" len="med"/>
+                      <a:tailEnd type="none" w="med" len="med"/>
+                    </a:lnT>
+                    <a:lnB w="6350" cap="flat" cmpd="sng" algn="ctr">
+                      <a:solidFill>
+                        <a:srgbClr val="EEF2F7"/>
+                      </a:solidFill>
+                      <a:prstDash val="solid"/>
+                      <a:round/>
+                      <a:headEnd type="none" w="med" len="med"/>
+                      <a:tailEnd type="none" w="med" len="med"/>
+                    </a:lnB>
+                    <a:solidFill>
+                      <a:schemeClr val="tx2"/>
+                    </a:solidFill>
+                  </a:tcPr>
+                </a:tc>
+                <a:tc>
+                  <a:txBody>
+                    <a:bodyPr/>
+                    <a:lstStyle/>
+                    <a:p>
+                      <a:pPr algn="ctr" indent="0" marL="0">
+                        <a:buNone/>
+                      </a:pPr>
+                      <a:r>
+                        <a:rPr lang="en-US" sz="900" b="1" dirty="0">
+                          <a:solidFill>
+                            <a:schemeClr val="bg1"/>
+                          </a:solidFill>
+                          <a:latin typeface="Meiryo UI" pitchFamily="34" charset="0"/>
+                          <a:ea typeface="Meiryo UI" pitchFamily="34" charset="-122"/>
+                          <a:cs typeface="Meiryo UI" pitchFamily="34" charset="-120"/>
+                        </a:rPr>
+                        <a:t>FCT</a:t>
+                      </a:r>
+                      <a:endParaRPr lang="en-US" sz="900" dirty="0">
+                        <a:latin typeface="Meiryo UI" charset="0"/>
+                        <a:ea typeface="Meiryo UI" charset="0"/>
+                        <a:cs typeface="Meiryo UI" charset="0"/>
+                      </a:endParaRPr>
+                    </a:p>
+                  </a:txBody>
+                  <a:tcPr marL="36576" marR="36576" marT="0" marB="0" anchor="ctr">
+                    <a:lnL w="6350" cap="flat" cmpd="sng" algn="ctr">
+                      <a:solidFill>
+                        <a:srgbClr val="EEF2F7"/>
+                      </a:solidFill>
+                      <a:prstDash val="solid"/>
+                      <a:round/>
+                      <a:headEnd type="none" w="med" len="med"/>
+                      <a:tailEnd type="none" w="med" len="med"/>
+                    </a:lnL>
+                    <a:lnR w="6350" cap="flat" cmpd="sng" algn="ctr">
+                      <a:solidFill>
+                        <a:srgbClr val="EEF2F7"/>
+                      </a:solidFill>
+                      <a:prstDash val="solid"/>
+                      <a:round/>
+                      <a:headEnd type="none" w="med" len="med"/>
+                      <a:tailEnd type="none" w="med" len="med"/>
+                    </a:lnR>
+                    <a:lnT w="6350" cap="flat" cmpd="sng" algn="ctr">
+                      <a:solidFill>
+                        <a:srgbClr val="EEF2F7"/>
+                      </a:solidFill>
+                      <a:prstDash val="solid"/>
+                      <a:round/>
+                      <a:headEnd type="none" w="med" len="med"/>
+                      <a:tailEnd type="none" w="med" len="med"/>
+                    </a:lnT>
+                    <a:lnB w="6350" cap="flat" cmpd="sng" algn="ctr">
+                      <a:solidFill>
+                        <a:srgbClr val="EEF2F7"/>
+                      </a:solidFill>
+                      <a:prstDash val="solid"/>
+                      <a:round/>
+                      <a:headEnd type="none" w="med" len="med"/>
+                      <a:tailEnd type="none" w="med" len="med"/>
+                    </a:lnB>
+                    <a:solidFill>
+                      <a:schemeClr val="tx2"/>
+                    </a:solidFill>
+                  </a:tcPr>
+                </a:tc>
+                <a:tc>
+                  <a:txBody>
+                    <a:bodyPr/>
+                    <a:lstStyle/>
+                    <a:p>
+                      <a:pPr algn="ctr" indent="0" marL="0">
+                        <a:buNone/>
+                      </a:pPr>
+                      <a:r>
+                        <a:rPr lang="en-US" sz="900" b="1" dirty="0">
+                          <a:solidFill>
+                            <a:schemeClr val="bg1"/>
+                          </a:solidFill>
+                          <a:latin typeface="Meiryo UI" pitchFamily="34" charset="0"/>
+                          <a:ea typeface="Meiryo UI" pitchFamily="34" charset="-122"/>
+                          <a:cs typeface="Meiryo UI" pitchFamily="34" charset="-120"/>
+                        </a:rPr>
+                        <a:t>Backup</a:t>
+                      </a:r>
+                      <a:endParaRPr lang="en-US" sz="900" dirty="0">
+                        <a:latin typeface="Meiryo UI" charset="0"/>
+                        <a:ea typeface="Meiryo UI" charset="0"/>
+                        <a:cs typeface="Meiryo UI" charset="0"/>
+                      </a:endParaRPr>
+                    </a:p>
+                  </a:txBody>
+                  <a:tcPr marL="36576" marR="36576" marT="0" marB="0" anchor="ctr">
+                    <a:lnL w="6350" cap="flat" cmpd="sng" algn="ctr">
+                      <a:solidFill>
+                        <a:srgbClr val="EEF2F7"/>
+                      </a:solidFill>
+                      <a:prstDash val="solid"/>
+                      <a:round/>
+                      <a:headEnd type="none" w="med" len="med"/>
+                      <a:tailEnd type="none" w="med" len="med"/>
+                    </a:lnL>
+                    <a:lnR w="6350" cap="flat" cmpd="sng" algn="ctr">
+                      <a:solidFill>
+                        <a:srgbClr val="EEF2F7"/>
+                      </a:solidFill>
+                      <a:prstDash val="solid"/>
+                      <a:round/>
+                      <a:headEnd type="none" w="med" len="med"/>
+                      <a:tailEnd type="none" w="med" len="med"/>
+                    </a:lnR>
+                    <a:lnT w="6350" cap="flat" cmpd="sng" algn="ctr">
+                      <a:solidFill>
+                        <a:srgbClr val="EEF2F7"/>
+                      </a:solidFill>
+                      <a:prstDash val="solid"/>
+                      <a:round/>
+                      <a:headEnd type="none" w="med" len="med"/>
+                      <a:tailEnd type="none" w="med" len="med"/>
+                    </a:lnT>
+                    <a:lnB w="6350" cap="flat" cmpd="sng" algn="ctr">
+                      <a:solidFill>
+                        <a:srgbClr val="EEF2F7"/>
+                      </a:solidFill>
+                      <a:prstDash val="solid"/>
+                      <a:round/>
+                      <a:headEnd type="none" w="med" len="med"/>
+                      <a:tailEnd type="none" w="med" len="med"/>
+                    </a:lnB>
+                    <a:solidFill>
+                      <a:schemeClr val="tx2"/>
+                    </a:solidFill>
+                  </a:tcPr>
+                </a:tc>
+                <a:tc>
+                  <a:txBody>
+                    <a:bodyPr/>
+                    <a:lstStyle/>
+                    <a:p>
+                      <a:pPr algn="ctr" indent="0" marL="0">
+                        <a:buNone/>
+                      </a:pPr>
+                      <a:r>
+                        <a:rPr lang="en-US" sz="900" b="1" dirty="0">
+                          <a:solidFill>
+                            <a:schemeClr val="bg1"/>
+                          </a:solidFill>
+                          <a:latin typeface="Meiryo UI" pitchFamily="34" charset="0"/>
+                          <a:ea typeface="Meiryo UI" pitchFamily="34" charset="-122"/>
+                          <a:cs typeface="Meiryo UI" pitchFamily="34" charset="-120"/>
+                        </a:rPr>
+                        <a:t>うち納期未定</a:t>
+                      </a:r>
+                      <a:endParaRPr lang="en-US" sz="900" dirty="0">
+                        <a:latin typeface="Meiryo UI" charset="0"/>
+                        <a:ea typeface="Meiryo UI" charset="0"/>
+                        <a:cs typeface="Meiryo UI" charset="0"/>
+                      </a:endParaRPr>
+                    </a:p>
+                  </a:txBody>
+                  <a:tcPr marL="36576" marR="36576" marT="0" marB="0" anchor="ctr">
+                    <a:lnL w="6350" cap="flat" cmpd="sng" algn="ctr">
+                      <a:solidFill>
+                        <a:srgbClr val="EEF2F7"/>
+                      </a:solidFill>
+                      <a:prstDash val="solid"/>
+                      <a:round/>
+                      <a:headEnd type="none" w="med" len="med"/>
+                      <a:tailEnd type="none" w="med" len="med"/>
+                    </a:lnL>
+                    <a:lnR w="6350" cap="flat" cmpd="sng" algn="ctr">
+                      <a:solidFill>
+                        <a:srgbClr val="EEF2F7"/>
+                      </a:solidFill>
+                      <a:prstDash val="solid"/>
+                      <a:round/>
+                      <a:headEnd type="none" w="med" len="med"/>
+                      <a:tailEnd type="none" w="med" len="med"/>
+                    </a:lnR>
+                    <a:lnT w="6350" cap="flat" cmpd="sng" algn="ctr">
+                      <a:solidFill>
+                        <a:srgbClr val="EEF2F7"/>
+                      </a:solidFill>
+                      <a:prstDash val="solid"/>
+                      <a:round/>
+                      <a:headEnd type="none" w="med" len="med"/>
+                      <a:tailEnd type="none" w="med" len="med"/>
+                    </a:lnT>
+                    <a:lnB w="6350" cap="flat" cmpd="sng" algn="ctr">
+                      <a:solidFill>
+                        <a:srgbClr val="EEF2F7"/>
+                      </a:solidFill>
+                      <a:prstDash val="solid"/>
+                      <a:round/>
+                      <a:headEnd type="none" w="med" len="med"/>
+                      <a:tailEnd type="none" w="med" len="med"/>
+                    </a:lnB>
+                    <a:solidFill>
+                      <a:schemeClr val="tx2"/>
+                    </a:solidFill>
+                  </a:tcPr>
+                </a:tc>
+                <a:tc>
+                  <a:txBody>
+                    <a:bodyPr/>
+                    <a:lstStyle/>
+                    <a:p>
+                      <a:pPr algn="ctr" indent="0" marL="0">
+                        <a:buNone/>
+                      </a:pPr>
+                      <a:r>
+                        <a:rPr lang="en-US" sz="900" b="1" dirty="0">
+                          <a:solidFill>
+                            <a:schemeClr val="bg1"/>
+                          </a:solidFill>
+                          <a:latin typeface="Meiryo UI" pitchFamily="34" charset="0"/>
+                          <a:ea typeface="Meiryo UI" pitchFamily="34" charset="-122"/>
+                          <a:cs typeface="Meiryo UI" pitchFamily="34" charset="-120"/>
+                        </a:rPr>
+                        <a:t>見込み</a:t>
+                      </a:r>
+                      <a:endParaRPr lang="en-US" sz="900" dirty="0">
+                        <a:latin typeface="Meiryo UI" charset="0"/>
+                        <a:ea typeface="Meiryo UI" charset="0"/>
+                        <a:cs typeface="Meiryo UI" charset="0"/>
+                      </a:endParaRPr>
+                    </a:p>
+                  </a:txBody>
+                  <a:tcPr marL="36576" marR="36576" marT="0" marB="0" anchor="ctr">
+                    <a:lnL w="6350" cap="flat" cmpd="sng" algn="ctr">
+                      <a:solidFill>
+                        <a:srgbClr val="EEF2F7"/>
+                      </a:solidFill>
+                      <a:prstDash val="solid"/>
+                      <a:round/>
+                      <a:headEnd type="none" w="med" len="med"/>
+                      <a:tailEnd type="none" w="med" len="med"/>
+                    </a:lnL>
+                    <a:lnR w="6350" cap="flat" cmpd="sng" algn="ctr">
+                      <a:solidFill>
+                        <a:srgbClr val="EEF2F7"/>
+                      </a:solidFill>
+                      <a:prstDash val="solid"/>
+                      <a:round/>
+                      <a:headEnd type="none" w="med" len="med"/>
+                      <a:tailEnd type="none" w="med" len="med"/>
+                    </a:lnR>
+                    <a:lnT w="6350" cap="flat" cmpd="sng" algn="ctr">
+                      <a:solidFill>
+                        <a:srgbClr val="EEF2F7"/>
+                      </a:solidFill>
+                      <a:prstDash val="solid"/>
+                      <a:round/>
+                      <a:headEnd type="none" w="med" len="med"/>
+                      <a:tailEnd type="none" w="med" len="med"/>
+                    </a:lnT>
+                    <a:lnB w="6350" cap="flat" cmpd="sng" algn="ctr">
+                      <a:solidFill>
+                        <a:srgbClr val="EEF2F7"/>
+                      </a:solidFill>
+                      <a:prstDash val="solid"/>
+                      <a:round/>
+                      <a:headEnd type="none" w="med" len="med"/>
+                      <a:tailEnd type="none" w="med" len="med"/>
+                    </a:lnB>
+                    <a:solidFill>
+                      <a:schemeClr val="tx2"/>
+                    </a:solidFill>
+                  </a:tcPr>
+                </a:tc>
+              </a:tr>
+              <a:tr h="274320">
+                <a:tc>
+                  <a:txBody>
+                    <a:bodyPr/>
+                    <a:lstStyle/>
+                    <a:p>
+                      <a:pPr algn="l" indent="0" marL="0">
+                        <a:buNone/>
+                      </a:pPr>
+                      <a:r>
+                        <a:rPr lang="en-US" sz="1000" b="1" dirty="0">
+                          <a:solidFill>
+                            <a:schemeClr val="tx1"/>
+                          </a:solidFill>
+                          <a:latin typeface="Meiryo UI" pitchFamily="34" charset="0"/>
+                          <a:ea typeface="Meiryo UI" pitchFamily="34" charset="-122"/>
+                          <a:cs typeface="Meiryo UI" pitchFamily="34" charset="-120"/>
+                        </a:rPr>
+                        <a:t>富士フイルム和光</a:t>
+                      </a:r>
+                      <a:endParaRPr lang="en-US" sz="1000" dirty="0">
+                        <a:latin typeface="Meiryo UI" charset="0"/>
+                        <a:ea typeface="Meiryo UI" charset="0"/>
+                        <a:cs typeface="Meiryo UI" charset="0"/>
+                      </a:endParaRPr>
+                    </a:p>
+                  </a:txBody>
+                  <a:tcPr marL="36576" marR="36576" marT="0" marB="0" anchor="ctr">
+                    <a:lnL w="6350" cap="flat" cmpd="sng" algn="ctr">
+                      <a:solidFill>
+                        <a:srgbClr val="EEF2F7"/>
+                      </a:solidFill>
+                      <a:prstDash val="solid"/>
+                      <a:round/>
+                      <a:headEnd type="none" w="med" len="med"/>
+                      <a:tailEnd type="none" w="med" len="med"/>
+                    </a:lnL>
+                    <a:lnR w="6350" cap="flat" cmpd="sng" algn="ctr">
+                      <a:solidFill>
+                        <a:srgbClr val="EEF2F7"/>
+                      </a:solidFill>
+                      <a:prstDash val="solid"/>
+                      <a:round/>
+                      <a:headEnd type="none" w="med" len="med"/>
+                      <a:tailEnd type="none" w="med" len="med"/>
+                    </a:lnR>
+                    <a:lnT w="6350" cap="flat" cmpd="sng" algn="ctr">
+                      <a:solidFill>
+                        <a:srgbClr val="EEF2F7"/>
+                      </a:solidFill>
+                      <a:prstDash val="solid"/>
+                      <a:round/>
+                      <a:headEnd type="none" w="med" len="med"/>
+                      <a:tailEnd type="none" w="med" len="med"/>
+                    </a:lnT>
+                    <a:lnB w="6350" cap="flat" cmpd="sng" algn="ctr">
+                      <a:solidFill>
+                        <a:srgbClr val="EEF2F7"/>
+                      </a:solidFill>
+                      <a:prstDash val="solid"/>
+                      <a:round/>
+                      <a:headEnd type="none" w="med" len="med"/>
+                      <a:tailEnd type="none" w="med" len="med"/>
+                    </a:lnB>
+                    <a:solidFill>
+                      <a:schemeClr val="bg1"/>
+                    </a:solidFill>
+                  </a:tcPr>
+                </a:tc>
+                <a:tc>
+                  <a:txBody>
+                    <a:bodyPr/>
+                    <a:lstStyle/>
+                    <a:p>
+                      <a:pPr algn="ctr" indent="0" marL="0">
+                        <a:buNone/>
+                      </a:pPr>
+                      <a:r>
+                        <a:rPr lang="en-US" sz="1000" dirty="0">
+                          <a:solidFill>
+                            <a:schemeClr val="tx1"/>
+                          </a:solidFill>
+                          <a:latin typeface="Meiryo UI" pitchFamily="34" charset="0"/>
+                          <a:ea typeface="Meiryo UI" pitchFamily="34" charset="-122"/>
+                          <a:cs typeface="Meiryo UI" pitchFamily="34" charset="-120"/>
+                        </a:rPr>
+                        <a:t>6</a:t>
+                      </a:r>
+                      <a:endParaRPr lang="en-US" sz="1000" dirty="0">
+                        <a:latin typeface="Meiryo UI" charset="0"/>
+                        <a:ea typeface="Meiryo UI" charset="0"/>
+                        <a:cs typeface="Meiryo UI" charset="0"/>
+                      </a:endParaRPr>
+                    </a:p>
+                  </a:txBody>
+                  <a:tcPr marL="36576" marR="36576" marT="0" marB="0" anchor="ctr">
+                    <a:lnL w="6350" cap="flat" cmpd="sng" algn="ctr">
+                      <a:solidFill>
+                        <a:srgbClr val="EEF2F7"/>
+                      </a:solidFill>
+                      <a:prstDash val="solid"/>
+                      <a:round/>
+                      <a:headEnd type="none" w="med" len="med"/>
+                      <a:tailEnd type="none" w="med" len="med"/>
+                    </a:lnL>
+                    <a:lnR w="6350" cap="flat" cmpd="sng" algn="ctr">
+                      <a:solidFill>
+                        <a:srgbClr val="EEF2F7"/>
+                      </a:solidFill>
+                      <a:prstDash val="solid"/>
+                      <a:round/>
+                      <a:headEnd type="none" w="med" len="med"/>
+                      <a:tailEnd type="none" w="med" len="med"/>
+                    </a:lnR>
+                    <a:lnT w="6350" cap="flat" cmpd="sng" algn="ctr">
+                      <a:solidFill>
+                        <a:srgbClr val="EEF2F7"/>
+                      </a:solidFill>
+                      <a:prstDash val="solid"/>
+                      <a:round/>
+                      <a:headEnd type="none" w="med" len="med"/>
+                      <a:tailEnd type="none" w="med" len="med"/>
+                    </a:lnT>
+                    <a:lnB w="6350" cap="flat" cmpd="sng" algn="ctr">
+                      <a:solidFill>
+                        <a:srgbClr val="EEF2F7"/>
+                      </a:solidFill>
+                      <a:prstDash val="solid"/>
+                      <a:round/>
+                      <a:headEnd type="none" w="med" len="med"/>
+                      <a:tailEnd type="none" w="med" len="med"/>
+                    </a:lnB>
+                    <a:solidFill>
+                      <a:schemeClr val="bg1"/>
+                    </a:solidFill>
+                  </a:tcPr>
+                </a:tc>
+                <a:tc>
+                  <a:txBody>
+                    <a:bodyPr/>
+                    <a:lstStyle/>
+                    <a:p>
+                      <a:pPr algn="ctr" indent="0" marL="0">
+                        <a:buNone/>
+                      </a:pPr>
+                      <a:r>
+                        <a:rPr lang="en-US" sz="1000" dirty="0">
+                          <a:solidFill>
+                            <a:schemeClr val="tx1"/>
+                          </a:solidFill>
+                          <a:latin typeface="Meiryo UI" pitchFamily="34" charset="0"/>
+                          <a:ea typeface="Meiryo UI" pitchFamily="34" charset="-122"/>
+                          <a:cs typeface="Meiryo UI" pitchFamily="34" charset="-120"/>
+                        </a:rPr>
+                        <a:t>1</a:t>
+                      </a:r>
+                      <a:endParaRPr lang="en-US" sz="1000" dirty="0">
+                        <a:latin typeface="Meiryo UI" charset="0"/>
+                        <a:ea typeface="Meiryo UI" charset="0"/>
+                        <a:cs typeface="Meiryo UI" charset="0"/>
+                      </a:endParaRPr>
+                    </a:p>
+                  </a:txBody>
+                  <a:tcPr marL="36576" marR="36576" marT="0" marB="0" anchor="ctr">
+                    <a:lnL w="6350" cap="flat" cmpd="sng" algn="ctr">
+                      <a:solidFill>
+                        <a:srgbClr val="EEF2F7"/>
+                      </a:solidFill>
+                      <a:prstDash val="solid"/>
+                      <a:round/>
+                      <a:headEnd type="none" w="med" len="med"/>
+                      <a:tailEnd type="none" w="med" len="med"/>
+                    </a:lnL>
+                    <a:lnR w="6350" cap="flat" cmpd="sng" algn="ctr">
+                      <a:solidFill>
+                        <a:srgbClr val="EEF2F7"/>
+                      </a:solidFill>
+                      <a:prstDash val="solid"/>
+                      <a:round/>
+                      <a:headEnd type="none" w="med" len="med"/>
+                      <a:tailEnd type="none" w="med" len="med"/>
+                    </a:lnR>
+                    <a:lnT w="6350" cap="flat" cmpd="sng" algn="ctr">
+                      <a:solidFill>
+                        <a:srgbClr val="EEF2F7"/>
+                      </a:solidFill>
+                      <a:prstDash val="solid"/>
+                      <a:round/>
+                      <a:headEnd type="none" w="med" len="med"/>
+                      <a:tailEnd type="none" w="med" len="med"/>
+                    </a:lnT>
+                    <a:lnB w="6350" cap="flat" cmpd="sng" algn="ctr">
+                      <a:solidFill>
+                        <a:srgbClr val="EEF2F7"/>
+                      </a:solidFill>
+                      <a:prstDash val="solid"/>
+                      <a:round/>
+                      <a:headEnd type="none" w="med" len="med"/>
+                      <a:tailEnd type="none" w="med" len="med"/>
+                    </a:lnB>
+                    <a:solidFill>
+                      <a:schemeClr val="bg1"/>
+                    </a:solidFill>
+                  </a:tcPr>
+                </a:tc>
+                <a:tc>
+                  <a:txBody>
+                    <a:bodyPr/>
+                    <a:lstStyle/>
+                    <a:p>
+                      <a:pPr algn="ctr" indent="0" marL="0">
+                        <a:buNone/>
+                      </a:pPr>
+                      <a:r>
+                        <a:rPr lang="en-US" sz="1000" dirty="0">
+                          <a:solidFill>
+                            <a:schemeClr val="accent4"/>
+                          </a:solidFill>
+                          <a:latin typeface="Meiryo UI" pitchFamily="34" charset="0"/>
+                          <a:ea typeface="Meiryo UI" pitchFamily="34" charset="-122"/>
+                          <a:cs typeface="Meiryo UI" pitchFamily="34" charset="-120"/>
+                        </a:rPr>
+                        <a:t>5</a:t>
+                      </a:r>
+                      <a:endParaRPr lang="en-US" sz="1000" dirty="0">
+                        <a:latin typeface="Meiryo UI" charset="0"/>
+                        <a:ea typeface="Meiryo UI" charset="0"/>
+                        <a:cs typeface="Meiryo UI" charset="0"/>
+                      </a:endParaRPr>
+                    </a:p>
+                  </a:txBody>
+                  <a:tcPr marL="36576" marR="36576" marT="0" marB="0" anchor="ctr">
+                    <a:lnL w="6350" cap="flat" cmpd="sng" algn="ctr">
+                      <a:solidFill>
+                        <a:srgbClr val="EEF2F7"/>
+                      </a:solidFill>
+                      <a:prstDash val="solid"/>
+                      <a:round/>
+                      <a:headEnd type="none" w="med" len="med"/>
+                      <a:tailEnd type="none" w="med" len="med"/>
+                    </a:lnL>
+                    <a:lnR w="6350" cap="flat" cmpd="sng" algn="ctr">
+                      <a:solidFill>
+                        <a:srgbClr val="EEF2F7"/>
+                      </a:solidFill>
+                      <a:prstDash val="solid"/>
+                      <a:round/>
+                      <a:headEnd type="none" w="med" len="med"/>
+                      <a:tailEnd type="none" w="med" len="med"/>
+                    </a:lnR>
+                    <a:lnT w="6350" cap="flat" cmpd="sng" algn="ctr">
+                      <a:solidFill>
+                        <a:srgbClr val="EEF2F7"/>
+                      </a:solidFill>
+                      <a:prstDash val="solid"/>
+                      <a:round/>
+                      <a:headEnd type="none" w="med" len="med"/>
+                      <a:tailEnd type="none" w="med" len="med"/>
+                    </a:lnT>
+                    <a:lnB w="6350" cap="flat" cmpd="sng" algn="ctr">
+                      <a:solidFill>
+                        <a:srgbClr val="EEF2F7"/>
+                      </a:solidFill>
+                      <a:prstDash val="solid"/>
+                      <a:round/>
+                      <a:headEnd type="none" w="med" len="med"/>
+                      <a:tailEnd type="none" w="med" len="med"/>
+                    </a:lnB>
+                    <a:solidFill>
+                      <a:schemeClr val="bg1"/>
+                    </a:solidFill>
+                  </a:tcPr>
+                </a:tc>
+                <a:tc>
+                  <a:txBody>
+                    <a:bodyPr/>
+                    <a:lstStyle/>
+                    <a:p>
+                      <a:pPr algn="ctr" indent="0" marL="0">
+                        <a:buNone/>
+                      </a:pPr>
+                      <a:r>
+                        <a:rPr lang="en-US" sz="1000" dirty="0">
+                          <a:solidFill>
+                            <a:schemeClr val="tx1"/>
+                          </a:solidFill>
+                          <a:latin typeface="Meiryo UI" pitchFamily="34" charset="0"/>
+                          <a:ea typeface="Meiryo UI" pitchFamily="34" charset="-122"/>
+                          <a:cs typeface="Meiryo UI" pitchFamily="34" charset="-120"/>
+                        </a:rPr>
+                        <a:t>3.5</a:t>
+                      </a:r>
+                      <a:endParaRPr lang="en-US" sz="1000" dirty="0">
+                        <a:latin typeface="Meiryo UI" charset="0"/>
+                        <a:ea typeface="Meiryo UI" charset="0"/>
+                        <a:cs typeface="Meiryo UI" charset="0"/>
+                      </a:endParaRPr>
+                    </a:p>
+                  </a:txBody>
+                  <a:tcPr marL="36576" marR="36576" marT="0" marB="0" anchor="ctr">
+                    <a:lnL w="6350" cap="flat" cmpd="sng" algn="ctr">
+                      <a:solidFill>
+                        <a:srgbClr val="EEF2F7"/>
+                      </a:solidFill>
+                      <a:prstDash val="solid"/>
+                      <a:round/>
+                      <a:headEnd type="none" w="med" len="med"/>
+                      <a:tailEnd type="none" w="med" len="med"/>
+                    </a:lnL>
+                    <a:lnR w="6350" cap="flat" cmpd="sng" algn="ctr">
+                      <a:solidFill>
+                        <a:srgbClr val="EEF2F7"/>
+                      </a:solidFill>
+                      <a:prstDash val="solid"/>
+                      <a:round/>
+                      <a:headEnd type="none" w="med" len="med"/>
+                      <a:tailEnd type="none" w="med" len="med"/>
+                    </a:lnR>
+                    <a:lnT w="6350" cap="flat" cmpd="sng" algn="ctr">
+                      <a:solidFill>
+                        <a:srgbClr val="EEF2F7"/>
+                      </a:solidFill>
+                      <a:prstDash val="solid"/>
+                      <a:round/>
+                      <a:headEnd type="none" w="med" len="med"/>
+                      <a:tailEnd type="none" w="med" len="med"/>
+                    </a:lnT>
+                    <a:lnB w="6350" cap="flat" cmpd="sng" algn="ctr">
+                      <a:solidFill>
+                        <a:srgbClr val="EEF2F7"/>
+                      </a:solidFill>
+                      <a:prstDash val="solid"/>
+                      <a:round/>
+                      <a:headEnd type="none" w="med" len="med"/>
+                      <a:tailEnd type="none" w="med" len="med"/>
+                    </a:lnB>
+                    <a:solidFill>
+                      <a:schemeClr val="bg1"/>
+                    </a:solidFill>
+                  </a:tcPr>
+                </a:tc>
+              </a:tr>
+              <a:tr h="274320">
+                <a:tc>
+                  <a:txBody>
+                    <a:bodyPr/>
+                    <a:lstStyle/>
+                    <a:p>
+                      <a:pPr algn="l" indent="0" marL="0">
+                        <a:buNone/>
+                      </a:pPr>
+                      <a:r>
+                        <a:rPr lang="en-US" sz="1000" dirty="0">
+                          <a:solidFill>
+                            <a:schemeClr val="tx1"/>
+                          </a:solidFill>
+                          <a:latin typeface="Meiryo UI" pitchFamily="34" charset="0"/>
+                          <a:ea typeface="Meiryo UI" pitchFamily="34" charset="-122"/>
+                          <a:cs typeface="Meiryo UI" pitchFamily="34" charset="-120"/>
+                        </a:rPr>
+                        <a:t>池田理化</a:t>
+                      </a:r>
+                      <a:endParaRPr lang="en-US" sz="1000" dirty="0">
+                        <a:latin typeface="Meiryo UI" charset="0"/>
+                        <a:ea typeface="Meiryo UI" charset="0"/>
+                        <a:cs typeface="Meiryo UI" charset="0"/>
+                      </a:endParaRPr>
+                    </a:p>
+                  </a:txBody>
+                  <a:tcPr marL="36576" marR="36576" marT="0" marB="0" anchor="ctr">
+                    <a:lnL w="6350" cap="flat" cmpd="sng" algn="ctr">
+                      <a:solidFill>
+                        <a:srgbClr val="EEF2F7"/>
+                      </a:solidFill>
+                      <a:prstDash val="solid"/>
+                      <a:round/>
+                      <a:headEnd type="none" w="med" len="med"/>
+                      <a:tailEnd type="none" w="med" len="med"/>
+                    </a:lnL>
+                    <a:lnR w="6350" cap="flat" cmpd="sng" algn="ctr">
+                      <a:solidFill>
+                        <a:srgbClr val="EEF2F7"/>
+                      </a:solidFill>
+                      <a:prstDash val="solid"/>
+                      <a:round/>
+                      <a:headEnd type="none" w="med" len="med"/>
+                      <a:tailEnd type="none" w="med" len="med"/>
+                    </a:lnR>
+                    <a:lnT w="6350" cap="flat" cmpd="sng" algn="ctr">
+                      <a:solidFill>
+                        <a:srgbClr val="EEF2F7"/>
+                      </a:solidFill>
+                      <a:prstDash val="solid"/>
+                      <a:round/>
+                      <a:headEnd type="none" w="med" len="med"/>
+                      <a:tailEnd type="none" w="med" len="med"/>
+                    </a:lnT>
+                    <a:lnB w="6350" cap="flat" cmpd="sng" algn="ctr">
+                      <a:solidFill>
+                        <a:srgbClr val="EEF2F7"/>
+                      </a:solidFill>
+                      <a:prstDash val="solid"/>
+                      <a:round/>
+                      <a:headEnd type="none" w="med" len="med"/>
+                      <a:tailEnd type="none" w="med" len="med"/>
+                    </a:lnB>
+                    <a:solidFill>
+                      <a:schemeClr val="bg1"/>
+                    </a:solidFill>
+                  </a:tcPr>
+                </a:tc>
+                <a:tc>
+                  <a:txBody>
+                    <a:bodyPr/>
+                    <a:lstStyle/>
+                    <a:p>
+                      <a:pPr algn="ctr" indent="0" marL="0">
+                        <a:buNone/>
+                      </a:pPr>
+                      <a:r>
+                        <a:rPr lang="en-US" sz="1000" dirty="0">
+                          <a:solidFill>
+                            <a:schemeClr val="tx1"/>
+                          </a:solidFill>
+                          <a:latin typeface="Meiryo UI" pitchFamily="34" charset="0"/>
+                          <a:ea typeface="Meiryo UI" pitchFamily="34" charset="-122"/>
+                          <a:cs typeface="Meiryo UI" pitchFamily="34" charset="-120"/>
+                        </a:rPr>
+                        <a:t>4</a:t>
+                      </a:r>
+                      <a:endParaRPr lang="en-US" sz="1000" dirty="0">
+                        <a:latin typeface="Meiryo UI" charset="0"/>
+                        <a:ea typeface="Meiryo UI" charset="0"/>
+                        <a:cs typeface="Meiryo UI" charset="0"/>
+                      </a:endParaRPr>
+                    </a:p>
+                  </a:txBody>
+                  <a:tcPr marL="36576" marR="36576" marT="0" marB="0" anchor="ctr">
+                    <a:lnL w="6350" cap="flat" cmpd="sng" algn="ctr">
+                      <a:solidFill>
+                        <a:srgbClr val="EEF2F7"/>
+                      </a:solidFill>
+                      <a:prstDash val="solid"/>
+                      <a:round/>
+                      <a:headEnd type="none" w="med" len="med"/>
+                      <a:tailEnd type="none" w="med" len="med"/>
+                    </a:lnL>
+                    <a:lnR w="6350" cap="flat" cmpd="sng" algn="ctr">
+                      <a:solidFill>
+                        <a:srgbClr val="EEF2F7"/>
+                      </a:solidFill>
+                      <a:prstDash val="solid"/>
+                      <a:round/>
+                      <a:headEnd type="none" w="med" len="med"/>
+                      <a:tailEnd type="none" w="med" len="med"/>
+                    </a:lnR>
+                    <a:lnT w="6350" cap="flat" cmpd="sng" algn="ctr">
+                      <a:solidFill>
+                        <a:srgbClr val="EEF2F7"/>
+                      </a:solidFill>
+                      <a:prstDash val="solid"/>
+                      <a:round/>
+                      <a:headEnd type="none" w="med" len="med"/>
+                      <a:tailEnd type="none" w="med" len="med"/>
+                    </a:lnT>
+                    <a:lnB w="6350" cap="flat" cmpd="sng" algn="ctr">
+                      <a:solidFill>
+                        <a:srgbClr val="EEF2F7"/>
+                      </a:solidFill>
+                      <a:prstDash val="solid"/>
+                      <a:round/>
+                      <a:headEnd type="none" w="med" len="med"/>
+                      <a:tailEnd type="none" w="med" len="med"/>
+                    </a:lnB>
+                    <a:solidFill>
+                      <a:schemeClr val="bg1"/>
+                    </a:solidFill>
+                  </a:tcPr>
+                </a:tc>
+                <a:tc>
+                  <a:txBody>
+                    <a:bodyPr/>
+                    <a:lstStyle/>
+                    <a:p>
+                      <a:pPr algn="ctr" indent="0" marL="0">
+                        <a:buNone/>
+                      </a:pPr>
+                      <a:r>
+                        <a:rPr lang="en-US" sz="1000" dirty="0">
+                          <a:solidFill>
+                            <a:schemeClr val="tx1"/>
+                          </a:solidFill>
+                          <a:latin typeface="Meiryo UI" pitchFamily="34" charset="0"/>
+                          <a:ea typeface="Meiryo UI" pitchFamily="34" charset="-122"/>
+                          <a:cs typeface="Meiryo UI" pitchFamily="34" charset="-120"/>
+                        </a:rPr>
+                        <a:t>1</a:t>
+                      </a:r>
+                      <a:endParaRPr lang="en-US" sz="1000" dirty="0">
+                        <a:latin typeface="Meiryo UI" charset="0"/>
+                        <a:ea typeface="Meiryo UI" charset="0"/>
+                        <a:cs typeface="Meiryo UI" charset="0"/>
+                      </a:endParaRPr>
+                    </a:p>
+                  </a:txBody>
+                  <a:tcPr marL="36576" marR="36576" marT="0" marB="0" anchor="ctr">
+                    <a:lnL w="6350" cap="flat" cmpd="sng" algn="ctr">
+                      <a:solidFill>
+                        <a:srgbClr val="EEF2F7"/>
+                      </a:solidFill>
+                      <a:prstDash val="solid"/>
+                      <a:round/>
+                      <a:headEnd type="none" w="med" len="med"/>
+                      <a:tailEnd type="none" w="med" len="med"/>
+                    </a:lnL>
+                    <a:lnR w="6350" cap="flat" cmpd="sng" algn="ctr">
+                      <a:solidFill>
+                        <a:srgbClr val="EEF2F7"/>
+                      </a:solidFill>
+                      <a:prstDash val="solid"/>
+                      <a:round/>
+                      <a:headEnd type="none" w="med" len="med"/>
+                      <a:tailEnd type="none" w="med" len="med"/>
+                    </a:lnR>
+                    <a:lnT w="6350" cap="flat" cmpd="sng" algn="ctr">
+                      <a:solidFill>
+                        <a:srgbClr val="EEF2F7"/>
+                      </a:solidFill>
+                      <a:prstDash val="solid"/>
+                      <a:round/>
+                      <a:headEnd type="none" w="med" len="med"/>
+                      <a:tailEnd type="none" w="med" len="med"/>
+                    </a:lnT>
+                    <a:lnB w="6350" cap="flat" cmpd="sng" algn="ctr">
+                      <a:solidFill>
+                        <a:srgbClr val="EEF2F7"/>
+                      </a:solidFill>
+                      <a:prstDash val="solid"/>
+                      <a:round/>
+                      <a:headEnd type="none" w="med" len="med"/>
+                      <a:tailEnd type="none" w="med" len="med"/>
+                    </a:lnB>
+                    <a:solidFill>
+                      <a:schemeClr val="bg1"/>
+                    </a:solidFill>
+                  </a:tcPr>
+                </a:tc>
+                <a:tc>
+                  <a:txBody>
+                    <a:bodyPr/>
+                    <a:lstStyle/>
+                    <a:p>
+                      <a:pPr algn="ctr" indent="0" marL="0">
+                        <a:buNone/>
+                      </a:pPr>
+                      <a:r>
+                        <a:rPr lang="en-US" sz="1000" dirty="0">
+                          <a:solidFill>
+                            <a:schemeClr val="accent4"/>
+                          </a:solidFill>
+                          <a:latin typeface="Meiryo UI" pitchFamily="34" charset="0"/>
+                          <a:ea typeface="Meiryo UI" pitchFamily="34" charset="-122"/>
+                          <a:cs typeface="Meiryo UI" pitchFamily="34" charset="-120"/>
+                        </a:rPr>
+                        <a:t>3</a:t>
+                      </a:r>
+                      <a:endParaRPr lang="en-US" sz="1000" dirty="0">
+                        <a:latin typeface="Meiryo UI" charset="0"/>
+                        <a:ea typeface="Meiryo UI" charset="0"/>
+                        <a:cs typeface="Meiryo UI" charset="0"/>
+                      </a:endParaRPr>
+                    </a:p>
+                  </a:txBody>
+                  <a:tcPr marL="36576" marR="36576" marT="0" marB="0" anchor="ctr">
+                    <a:lnL w="6350" cap="flat" cmpd="sng" algn="ctr">
+                      <a:solidFill>
+                        <a:srgbClr val="EEF2F7"/>
+                      </a:solidFill>
+                      <a:prstDash val="solid"/>
+                      <a:round/>
+                      <a:headEnd type="none" w="med" len="med"/>
+                      <a:tailEnd type="none" w="med" len="med"/>
+                    </a:lnL>
+                    <a:lnR w="6350" cap="flat" cmpd="sng" algn="ctr">
+                      <a:solidFill>
+                        <a:srgbClr val="EEF2F7"/>
+                      </a:solidFill>
+                      <a:prstDash val="solid"/>
+                      <a:round/>
+                      <a:headEnd type="none" w="med" len="med"/>
+                      <a:tailEnd type="none" w="med" len="med"/>
+                    </a:lnR>
+                    <a:lnT w="6350" cap="flat" cmpd="sng" algn="ctr">
+                      <a:solidFill>
+                        <a:srgbClr val="EEF2F7"/>
+                      </a:solidFill>
+                      <a:prstDash val="solid"/>
+                      <a:round/>
+                      <a:headEnd type="none" w="med" len="med"/>
+                      <a:tailEnd type="none" w="med" len="med"/>
+                    </a:lnT>
+                    <a:lnB w="6350" cap="flat" cmpd="sng" algn="ctr">
+                      <a:solidFill>
+                        <a:srgbClr val="EEF2F7"/>
+                      </a:solidFill>
+                      <a:prstDash val="solid"/>
+                      <a:round/>
+                      <a:headEnd type="none" w="med" len="med"/>
+                      <a:tailEnd type="none" w="med" len="med"/>
+                    </a:lnB>
+                    <a:solidFill>
+                      <a:schemeClr val="bg1"/>
+                    </a:solidFill>
+                  </a:tcPr>
+                </a:tc>
+                <a:tc>
+                  <a:txBody>
+                    <a:bodyPr/>
+                    <a:lstStyle/>
+                    <a:p>
+                      <a:pPr algn="ctr" indent="0" marL="0">
+                        <a:buNone/>
+                      </a:pPr>
+                      <a:r>
+                        <a:rPr lang="en-US" sz="1000" dirty="0">
+                          <a:solidFill>
+                            <a:schemeClr val="tx1"/>
+                          </a:solidFill>
+                          <a:latin typeface="Meiryo UI" pitchFamily="34" charset="0"/>
+                          <a:ea typeface="Meiryo UI" pitchFamily="34" charset="-122"/>
+                          <a:cs typeface="Meiryo UI" pitchFamily="34" charset="-120"/>
+                        </a:rPr>
+                        <a:t>2.7</a:t>
+                      </a:r>
+                      <a:endParaRPr lang="en-US" sz="1000" dirty="0">
+                        <a:latin typeface="Meiryo UI" charset="0"/>
+                        <a:ea typeface="Meiryo UI" charset="0"/>
+                        <a:cs typeface="Meiryo UI" charset="0"/>
+                      </a:endParaRPr>
+                    </a:p>
+                  </a:txBody>
+                  <a:tcPr marL="36576" marR="36576" marT="0" marB="0" anchor="ctr">
+                    <a:lnL w="6350" cap="flat" cmpd="sng" algn="ctr">
+                      <a:solidFill>
+                        <a:srgbClr val="EEF2F7"/>
+                      </a:solidFill>
+                      <a:prstDash val="solid"/>
+                      <a:round/>
+                      <a:headEnd type="none" w="med" len="med"/>
+                      <a:tailEnd type="none" w="med" len="med"/>
+                    </a:lnL>
+                    <a:lnR w="6350" cap="flat" cmpd="sng" algn="ctr">
+                      <a:solidFill>
+                        <a:srgbClr val="EEF2F7"/>
+                      </a:solidFill>
+                      <a:prstDash val="solid"/>
+                      <a:round/>
+                      <a:headEnd type="none" w="med" len="med"/>
+                      <a:tailEnd type="none" w="med" len="med"/>
+                    </a:lnR>
+                    <a:lnT w="6350" cap="flat" cmpd="sng" algn="ctr">
+                      <a:solidFill>
+                        <a:srgbClr val="EEF2F7"/>
+                      </a:solidFill>
+                      <a:prstDash val="solid"/>
+                      <a:round/>
+                      <a:headEnd type="none" w="med" len="med"/>
+                      <a:tailEnd type="none" w="med" len="med"/>
+                    </a:lnT>
+                    <a:lnB w="6350" cap="flat" cmpd="sng" algn="ctr">
+                      <a:solidFill>
+                        <a:srgbClr val="EEF2F7"/>
+                      </a:solidFill>
+                      <a:prstDash val="solid"/>
+                      <a:round/>
+                      <a:headEnd type="none" w="med" len="med"/>
+                      <a:tailEnd type="none" w="med" len="med"/>
+                    </a:lnB>
+                    <a:solidFill>
+                      <a:schemeClr val="bg1"/>
+                    </a:solidFill>
+                  </a:tcPr>
+                </a:tc>
+              </a:tr>
+              <a:tr h="274320">
+                <a:tc>
+                  <a:txBody>
+                    <a:bodyPr/>
+                    <a:lstStyle/>
+                    <a:p>
+                      <a:pPr algn="l" indent="0" marL="0">
+                        <a:buNone/>
+                      </a:pPr>
+                      <a:r>
+                        <a:rPr lang="en-US" sz="1000" dirty="0">
+                          <a:solidFill>
+                            <a:schemeClr val="tx1"/>
+                          </a:solidFill>
+                          <a:latin typeface="Meiryo UI" pitchFamily="34" charset="0"/>
+                          <a:ea typeface="Meiryo UI" pitchFamily="34" charset="-122"/>
+                          <a:cs typeface="Meiryo UI" pitchFamily="34" charset="-120"/>
+                        </a:rPr>
+                        <a:t>ナカライテスク</a:t>
+                      </a:r>
+                      <a:endParaRPr lang="en-US" sz="1000" dirty="0">
+                        <a:latin typeface="Meiryo UI" charset="0"/>
+                        <a:ea typeface="Meiryo UI" charset="0"/>
+                        <a:cs typeface="Meiryo UI" charset="0"/>
+                      </a:endParaRPr>
+                    </a:p>
+                  </a:txBody>
+                  <a:tcPr marL="36576" marR="36576" marT="0" marB="0" anchor="ctr">
+                    <a:lnL w="6350" cap="flat" cmpd="sng" algn="ctr">
+                      <a:solidFill>
+                        <a:srgbClr val="EEF2F7"/>
+                      </a:solidFill>
+                      <a:prstDash val="solid"/>
+                      <a:round/>
+                      <a:headEnd type="none" w="med" len="med"/>
+                      <a:tailEnd type="none" w="med" len="med"/>
+                    </a:lnL>
+                    <a:lnR w="6350" cap="flat" cmpd="sng" algn="ctr">
+                      <a:solidFill>
+                        <a:srgbClr val="EEF2F7"/>
+                      </a:solidFill>
+                      <a:prstDash val="solid"/>
+                      <a:round/>
+                      <a:headEnd type="none" w="med" len="med"/>
+                      <a:tailEnd type="none" w="med" len="med"/>
+                    </a:lnR>
+                    <a:lnT w="6350" cap="flat" cmpd="sng" algn="ctr">
+                      <a:solidFill>
+                        <a:srgbClr val="EEF2F7"/>
+                      </a:solidFill>
+                      <a:prstDash val="solid"/>
+                      <a:round/>
+                      <a:headEnd type="none" w="med" len="med"/>
+                      <a:tailEnd type="none" w="med" len="med"/>
+                    </a:lnT>
+                    <a:lnB w="6350" cap="flat" cmpd="sng" algn="ctr">
+                      <a:solidFill>
+                        <a:srgbClr val="EEF2F7"/>
+                      </a:solidFill>
+                      <a:prstDash val="solid"/>
+                      <a:round/>
+                      <a:headEnd type="none" w="med" len="med"/>
+                      <a:tailEnd type="none" w="med" len="med"/>
+                    </a:lnB>
+                    <a:solidFill>
+                      <a:schemeClr val="bg1"/>
+                    </a:solidFill>
+                  </a:tcPr>
+                </a:tc>
+                <a:tc>
+                  <a:txBody>
+                    <a:bodyPr/>
+                    <a:lstStyle/>
+                    <a:p>
+                      <a:pPr algn="ctr" indent="0" marL="0">
+                        <a:buNone/>
+                      </a:pPr>
+                      <a:r>
+                        <a:rPr lang="en-US" sz="1000" dirty="0">
+                          <a:solidFill>
+                            <a:schemeClr val="tx1"/>
+                          </a:solidFill>
+                          <a:latin typeface="Meiryo UI" pitchFamily="34" charset="0"/>
+                          <a:ea typeface="Meiryo UI" pitchFamily="34" charset="-122"/>
+                          <a:cs typeface="Meiryo UI" pitchFamily="34" charset="-120"/>
+                        </a:rPr>
+                        <a:t>2</a:t>
+                      </a:r>
+                      <a:endParaRPr lang="en-US" sz="1000" dirty="0">
+                        <a:latin typeface="Meiryo UI" charset="0"/>
+                        <a:ea typeface="Meiryo UI" charset="0"/>
+                        <a:cs typeface="Meiryo UI" charset="0"/>
+                      </a:endParaRPr>
+                    </a:p>
+                  </a:txBody>
+                  <a:tcPr marL="36576" marR="36576" marT="0" marB="0" anchor="ctr">
+                    <a:lnL w="6350" cap="flat" cmpd="sng" algn="ctr">
+                      <a:solidFill>
+                        <a:srgbClr val="EEF2F7"/>
+                      </a:solidFill>
+                      <a:prstDash val="solid"/>
+                      <a:round/>
+                      <a:headEnd type="none" w="med" len="med"/>
+                      <a:tailEnd type="none" w="med" len="med"/>
+                    </a:lnL>
+                    <a:lnR w="6350" cap="flat" cmpd="sng" algn="ctr">
+                      <a:solidFill>
+                        <a:srgbClr val="EEF2F7"/>
+                      </a:solidFill>
+                      <a:prstDash val="solid"/>
+                      <a:round/>
+                      <a:headEnd type="none" w="med" len="med"/>
+                      <a:tailEnd type="none" w="med" len="med"/>
+                    </a:lnR>
+                    <a:lnT w="6350" cap="flat" cmpd="sng" algn="ctr">
+                      <a:solidFill>
+                        <a:srgbClr val="EEF2F7"/>
+                      </a:solidFill>
+                      <a:prstDash val="solid"/>
+                      <a:round/>
+                      <a:headEnd type="none" w="med" len="med"/>
+                      <a:tailEnd type="none" w="med" len="med"/>
+                    </a:lnT>
+                    <a:lnB w="6350" cap="flat" cmpd="sng" algn="ctr">
+                      <a:solidFill>
+                        <a:srgbClr val="EEF2F7"/>
+                      </a:solidFill>
+                      <a:prstDash val="solid"/>
+                      <a:round/>
+                      <a:headEnd type="none" w="med" len="med"/>
+                      <a:tailEnd type="none" w="med" len="med"/>
+                    </a:lnB>
+                    <a:solidFill>
+                      <a:schemeClr val="bg1"/>
+                    </a:solidFill>
+                  </a:tcPr>
+                </a:tc>
+                <a:tc>
+                  <a:txBody>
+                    <a:bodyPr/>
+                    <a:lstStyle/>
+                    <a:p>
+                      <a:pPr algn="ctr" indent="0" marL="0">
+                        <a:buNone/>
+                      </a:pPr>
+                      <a:r>
+                        <a:rPr lang="en-US" sz="1000" dirty="0">
+                          <a:solidFill>
+                            <a:schemeClr val="tx1"/>
+                          </a:solidFill>
+                          <a:latin typeface="Meiryo UI" pitchFamily="34" charset="0"/>
+                          <a:ea typeface="Meiryo UI" pitchFamily="34" charset="-122"/>
+                          <a:cs typeface="Meiryo UI" pitchFamily="34" charset="-120"/>
+                        </a:rPr>
+                        <a:t>1</a:t>
+                      </a:r>
+                      <a:endParaRPr lang="en-US" sz="1000" dirty="0">
+                        <a:latin typeface="Meiryo UI" charset="0"/>
+                        <a:ea typeface="Meiryo UI" charset="0"/>
+                        <a:cs typeface="Meiryo UI" charset="0"/>
+                      </a:endParaRPr>
+                    </a:p>
+                  </a:txBody>
+                  <a:tcPr marL="36576" marR="36576" marT="0" marB="0" anchor="ctr">
+                    <a:lnL w="6350" cap="flat" cmpd="sng" algn="ctr">
+                      <a:solidFill>
+                        <a:srgbClr val="EEF2F7"/>
+                      </a:solidFill>
+                      <a:prstDash val="solid"/>
+                      <a:round/>
+                      <a:headEnd type="none" w="med" len="med"/>
+                      <a:tailEnd type="none" w="med" len="med"/>
+                    </a:lnL>
+                    <a:lnR w="6350" cap="flat" cmpd="sng" algn="ctr">
+                      <a:solidFill>
+                        <a:srgbClr val="EEF2F7"/>
+                      </a:solidFill>
+                      <a:prstDash val="solid"/>
+                      <a:round/>
+                      <a:headEnd type="none" w="med" len="med"/>
+                      <a:tailEnd type="none" w="med" len="med"/>
+                    </a:lnR>
+                    <a:lnT w="6350" cap="flat" cmpd="sng" algn="ctr">
+                      <a:solidFill>
+                        <a:srgbClr val="EEF2F7"/>
+                      </a:solidFill>
+                      <a:prstDash val="solid"/>
+                      <a:round/>
+                      <a:headEnd type="none" w="med" len="med"/>
+                      <a:tailEnd type="none" w="med" len="med"/>
+                    </a:lnT>
+                    <a:lnB w="6350" cap="flat" cmpd="sng" algn="ctr">
+                      <a:solidFill>
+                        <a:srgbClr val="EEF2F7"/>
+                      </a:solidFill>
+                      <a:prstDash val="solid"/>
+                      <a:round/>
+                      <a:headEnd type="none" w="med" len="med"/>
+                      <a:tailEnd type="none" w="med" len="med"/>
+                    </a:lnB>
+                    <a:solidFill>
+                      <a:schemeClr val="bg1"/>
+                    </a:solidFill>
+                  </a:tcPr>
+                </a:tc>
+                <a:tc>
+                  <a:txBody>
+                    <a:bodyPr/>
+                    <a:lstStyle/>
+                    <a:p>
+                      <a:pPr algn="ctr" indent="0" marL="0">
+                        <a:buNone/>
+                      </a:pPr>
+                      <a:r>
+                        <a:rPr lang="en-US" sz="1000" dirty="0">
+                          <a:solidFill>
+                            <a:schemeClr val="tx1"/>
+                          </a:solidFill>
+                          <a:latin typeface="Meiryo UI" pitchFamily="34" charset="0"/>
+                          <a:ea typeface="Meiryo UI" pitchFamily="34" charset="-122"/>
+                          <a:cs typeface="Meiryo UI" pitchFamily="34" charset="-120"/>
+                        </a:rPr>
+                        <a:t>1</a:t>
+                      </a:r>
+                      <a:endParaRPr lang="en-US" sz="1000" dirty="0">
+                        <a:latin typeface="Meiryo UI" charset="0"/>
+                        <a:ea typeface="Meiryo UI" charset="0"/>
+                        <a:cs typeface="Meiryo UI" charset="0"/>
+                      </a:endParaRPr>
+                    </a:p>
+                  </a:txBody>
+                  <a:tcPr marL="36576" marR="36576" marT="0" marB="0" anchor="ctr">
+                    <a:lnL w="6350" cap="flat" cmpd="sng" algn="ctr">
+                      <a:solidFill>
+                        <a:srgbClr val="EEF2F7"/>
+                      </a:solidFill>
+                      <a:prstDash val="solid"/>
+                      <a:round/>
+                      <a:headEnd type="none" w="med" len="med"/>
+                      <a:tailEnd type="none" w="med" len="med"/>
+                    </a:lnL>
+                    <a:lnR w="6350" cap="flat" cmpd="sng" algn="ctr">
+                      <a:solidFill>
+                        <a:srgbClr val="EEF2F7"/>
+                      </a:solidFill>
+                      <a:prstDash val="solid"/>
+                      <a:round/>
+                      <a:headEnd type="none" w="med" len="med"/>
+                      <a:tailEnd type="none" w="med" len="med"/>
+                    </a:lnR>
+                    <a:lnT w="6350" cap="flat" cmpd="sng" algn="ctr">
+                      <a:solidFill>
+                        <a:srgbClr val="EEF2F7"/>
+                      </a:solidFill>
+                      <a:prstDash val="solid"/>
+                      <a:round/>
+                      <a:headEnd type="none" w="med" len="med"/>
+                      <a:tailEnd type="none" w="med" len="med"/>
+                    </a:lnT>
+                    <a:lnB w="6350" cap="flat" cmpd="sng" algn="ctr">
+                      <a:solidFill>
+                        <a:srgbClr val="EEF2F7"/>
+                      </a:solidFill>
+                      <a:prstDash val="solid"/>
+                      <a:round/>
+                      <a:headEnd type="none" w="med" len="med"/>
+                      <a:tailEnd type="none" w="med" len="med"/>
+                    </a:lnB>
+                    <a:solidFill>
+                      <a:schemeClr val="bg1"/>
+                    </a:solidFill>
+                  </a:tcPr>
+                </a:tc>
+                <a:tc>
+                  <a:txBody>
+                    <a:bodyPr/>
+                    <a:lstStyle/>
+                    <a:p>
+                      <a:pPr algn="ctr" indent="0" marL="0">
+                        <a:buNone/>
+                      </a:pPr>
+                      <a:r>
+                        <a:rPr lang="en-US" sz="1000" dirty="0">
+                          <a:solidFill>
+                            <a:schemeClr val="tx1"/>
+                          </a:solidFill>
+                          <a:latin typeface="Meiryo UI" pitchFamily="34" charset="0"/>
+                          <a:ea typeface="Meiryo UI" pitchFamily="34" charset="-122"/>
+                          <a:cs typeface="Meiryo UI" pitchFamily="34" charset="-120"/>
+                        </a:rPr>
+                        <a:t>1.4</a:t>
+                      </a:r>
+                      <a:endParaRPr lang="en-US" sz="1000" dirty="0">
+                        <a:latin typeface="Meiryo UI" charset="0"/>
+                        <a:ea typeface="Meiryo UI" charset="0"/>
+                        <a:cs typeface="Meiryo UI" charset="0"/>
+                      </a:endParaRPr>
+                    </a:p>
+                  </a:txBody>
+                  <a:tcPr marL="36576" marR="36576" marT="0" marB="0" anchor="ctr">
+                    <a:lnL w="6350" cap="flat" cmpd="sng" algn="ctr">
+                      <a:solidFill>
+                        <a:srgbClr val="EEF2F7"/>
+                      </a:solidFill>
+                      <a:prstDash val="solid"/>
+                      <a:round/>
+                      <a:headEnd type="none" w="med" len="med"/>
+                      <a:tailEnd type="none" w="med" len="med"/>
+                    </a:lnL>
+                    <a:lnR w="6350" cap="flat" cmpd="sng" algn="ctr">
+                      <a:solidFill>
+                        <a:srgbClr val="EEF2F7"/>
+                      </a:solidFill>
+                      <a:prstDash val="solid"/>
+                      <a:round/>
+                      <a:headEnd type="none" w="med" len="med"/>
+                      <a:tailEnd type="none" w="med" len="med"/>
+                    </a:lnR>
+                    <a:lnT w="6350" cap="flat" cmpd="sng" algn="ctr">
+                      <a:solidFill>
+                        <a:srgbClr val="EEF2F7"/>
+                      </a:solidFill>
+                      <a:prstDash val="solid"/>
+                      <a:round/>
+                      <a:headEnd type="none" w="med" len="med"/>
+                      <a:tailEnd type="none" w="med" len="med"/>
+                    </a:lnT>
+                    <a:lnB w="6350" cap="flat" cmpd="sng" algn="ctr">
+                      <a:solidFill>
+                        <a:srgbClr val="EEF2F7"/>
+                      </a:solidFill>
+                      <a:prstDash val="solid"/>
+                      <a:round/>
+                      <a:headEnd type="none" w="med" len="med"/>
+                      <a:tailEnd type="none" w="med" len="med"/>
+                    </a:lnB>
+                    <a:solidFill>
+                      <a:schemeClr val="bg1"/>
+                    </a:solidFill>
+                  </a:tcPr>
+                </a:tc>
+              </a:tr>
+              <a:tr h="274320">
+                <a:tc>
+                  <a:txBody>
+                    <a:bodyPr/>
+                    <a:lstStyle/>
+                    <a:p>
+                      <a:pPr algn="l" indent="0" marL="0">
+                        <a:buNone/>
+                      </a:pPr>
+                      <a:r>
+                        <a:rPr lang="en-US" sz="1000" dirty="0">
+                          <a:solidFill>
+                            <a:schemeClr val="tx1"/>
+                          </a:solidFill>
+                          <a:latin typeface="Meiryo UI" pitchFamily="34" charset="0"/>
+                          <a:ea typeface="Meiryo UI" pitchFamily="34" charset="-122"/>
+                          <a:cs typeface="Meiryo UI" pitchFamily="34" charset="-120"/>
+                        </a:rPr>
+                        <a:t>バイオテック・ラボ</a:t>
+                      </a:r>
+                      <a:endParaRPr lang="en-US" sz="1000" dirty="0">
+                        <a:latin typeface="Meiryo UI" charset="0"/>
+                        <a:ea typeface="Meiryo UI" charset="0"/>
+                        <a:cs typeface="Meiryo UI" charset="0"/>
+                      </a:endParaRPr>
+                    </a:p>
+                  </a:txBody>
+                  <a:tcPr marL="36576" marR="36576" marT="0" marB="0" anchor="ctr">
+                    <a:lnL w="6350" cap="flat" cmpd="sng" algn="ctr">
+                      <a:solidFill>
+                        <a:srgbClr val="EEF2F7"/>
+                      </a:solidFill>
+                      <a:prstDash val="solid"/>
+                      <a:round/>
+                      <a:headEnd type="none" w="med" len="med"/>
+                      <a:tailEnd type="none" w="med" len="med"/>
+                    </a:lnL>
+                    <a:lnR w="6350" cap="flat" cmpd="sng" algn="ctr">
+                      <a:solidFill>
+                        <a:srgbClr val="EEF2F7"/>
+                      </a:solidFill>
+                      <a:prstDash val="solid"/>
+                      <a:round/>
+                      <a:headEnd type="none" w="med" len="med"/>
+                      <a:tailEnd type="none" w="med" len="med"/>
+                    </a:lnR>
+                    <a:lnT w="6350" cap="flat" cmpd="sng" algn="ctr">
+                      <a:solidFill>
+                        <a:srgbClr val="EEF2F7"/>
+                      </a:solidFill>
+                      <a:prstDash val="solid"/>
+                      <a:round/>
+                      <a:headEnd type="none" w="med" len="med"/>
+                      <a:tailEnd type="none" w="med" len="med"/>
+                    </a:lnT>
+                    <a:lnB w="6350" cap="flat" cmpd="sng" algn="ctr">
+                      <a:solidFill>
+                        <a:srgbClr val="EEF2F7"/>
+                      </a:solidFill>
+                      <a:prstDash val="solid"/>
+                      <a:round/>
+                      <a:headEnd type="none" w="med" len="med"/>
+                      <a:tailEnd type="none" w="med" len="med"/>
+                    </a:lnB>
+                    <a:solidFill>
+                      <a:schemeClr val="bg1"/>
+                    </a:solidFill>
+                  </a:tcPr>
+                </a:tc>
+                <a:tc>
+                  <a:txBody>
+                    <a:bodyPr/>
+                    <a:lstStyle/>
+                    <a:p>
+                      <a:pPr algn="ctr" indent="0" marL="0">
+                        <a:buNone/>
+                      </a:pPr>
+                      <a:r>
+                        <a:rPr lang="en-US" sz="1000" dirty="0">
+                          <a:solidFill>
+                            <a:schemeClr val="tx1"/>
+                          </a:solidFill>
+                          <a:latin typeface="Meiryo UI" pitchFamily="34" charset="0"/>
+                          <a:ea typeface="Meiryo UI" pitchFamily="34" charset="-122"/>
+                          <a:cs typeface="Meiryo UI" pitchFamily="34" charset="-120"/>
+                        </a:rPr>
+                        <a:t>1</a:t>
+                      </a:r>
+                      <a:endParaRPr lang="en-US" sz="1000" dirty="0">
+                        <a:latin typeface="Meiryo UI" charset="0"/>
+                        <a:ea typeface="Meiryo UI" charset="0"/>
+                        <a:cs typeface="Meiryo UI" charset="0"/>
+                      </a:endParaRPr>
+                    </a:p>
+                  </a:txBody>
+                  <a:tcPr marL="36576" marR="36576" marT="0" marB="0" anchor="ctr">
+                    <a:lnL w="6350" cap="flat" cmpd="sng" algn="ctr">
+                      <a:solidFill>
+                        <a:srgbClr val="EEF2F7"/>
+                      </a:solidFill>
+                      <a:prstDash val="solid"/>
+                      <a:round/>
+                      <a:headEnd type="none" w="med" len="med"/>
+                      <a:tailEnd type="none" w="med" len="med"/>
+                    </a:lnL>
+                    <a:lnR w="6350" cap="flat" cmpd="sng" algn="ctr">
+                      <a:solidFill>
+                        <a:srgbClr val="EEF2F7"/>
+                      </a:solidFill>
+                      <a:prstDash val="solid"/>
+                      <a:round/>
+                      <a:headEnd type="none" w="med" len="med"/>
+                      <a:tailEnd type="none" w="med" len="med"/>
+                    </a:lnR>
+                    <a:lnT w="6350" cap="flat" cmpd="sng" algn="ctr">
+                      <a:solidFill>
+                        <a:srgbClr val="EEF2F7"/>
+                      </a:solidFill>
+                      <a:prstDash val="solid"/>
+                      <a:round/>
+                      <a:headEnd type="none" w="med" len="med"/>
+                      <a:tailEnd type="none" w="med" len="med"/>
+                    </a:lnT>
+                    <a:lnB w="6350" cap="flat" cmpd="sng" algn="ctr">
+                      <a:solidFill>
+                        <a:srgbClr val="EEF2F7"/>
+                      </a:solidFill>
+                      <a:prstDash val="solid"/>
+                      <a:round/>
+                      <a:headEnd type="none" w="med" len="med"/>
+                      <a:tailEnd type="none" w="med" len="med"/>
+                    </a:lnB>
+                    <a:solidFill>
+                      <a:schemeClr val="bg1"/>
+                    </a:solidFill>
+                  </a:tcPr>
+                </a:tc>
+                <a:tc>
+                  <a:txBody>
+                    <a:bodyPr/>
+                    <a:lstStyle/>
+                    <a:p>
+                      <a:pPr algn="ctr" indent="0" marL="0">
+                        <a:buNone/>
+                      </a:pPr>
+                      <a:r>
+                        <a:rPr lang="en-US" sz="1000" dirty="0">
+                          <a:solidFill>
+                            <a:schemeClr val="tx1"/>
+                          </a:solidFill>
+                          <a:latin typeface="Meiryo UI" pitchFamily="34" charset="0"/>
+                          <a:ea typeface="Meiryo UI" pitchFamily="34" charset="-122"/>
+                          <a:cs typeface="Meiryo UI" pitchFamily="34" charset="-120"/>
+                        </a:rPr>
+                        <a:t>0</a:t>
+                      </a:r>
+                      <a:endParaRPr lang="en-US" sz="1000" dirty="0">
+                        <a:latin typeface="Meiryo UI" charset="0"/>
+                        <a:ea typeface="Meiryo UI" charset="0"/>
+                        <a:cs typeface="Meiryo UI" charset="0"/>
+                      </a:endParaRPr>
+                    </a:p>
+                  </a:txBody>
+                  <a:tcPr marL="36576" marR="36576" marT="0" marB="0" anchor="ctr">
+                    <a:lnL w="6350" cap="flat" cmpd="sng" algn="ctr">
+                      <a:solidFill>
+                        <a:srgbClr val="EEF2F7"/>
+                      </a:solidFill>
+                      <a:prstDash val="solid"/>
+                      <a:round/>
+                      <a:headEnd type="none" w="med" len="med"/>
+                      <a:tailEnd type="none" w="med" len="med"/>
+                    </a:lnL>
+                    <a:lnR w="6350" cap="flat" cmpd="sng" algn="ctr">
+                      <a:solidFill>
+                        <a:srgbClr val="EEF2F7"/>
+                      </a:solidFill>
+                      <a:prstDash val="solid"/>
+                      <a:round/>
+                      <a:headEnd type="none" w="med" len="med"/>
+                      <a:tailEnd type="none" w="med" len="med"/>
+                    </a:lnR>
+                    <a:lnT w="6350" cap="flat" cmpd="sng" algn="ctr">
+                      <a:solidFill>
+                        <a:srgbClr val="EEF2F7"/>
+                      </a:solidFill>
+                      <a:prstDash val="solid"/>
+                      <a:round/>
+                      <a:headEnd type="none" w="med" len="med"/>
+                      <a:tailEnd type="none" w="med" len="med"/>
+                    </a:lnT>
+                    <a:lnB w="6350" cap="flat" cmpd="sng" algn="ctr">
+                      <a:solidFill>
+                        <a:srgbClr val="EEF2F7"/>
+                      </a:solidFill>
+                      <a:prstDash val="solid"/>
+                      <a:round/>
+                      <a:headEnd type="none" w="med" len="med"/>
+                      <a:tailEnd type="none" w="med" len="med"/>
+                    </a:lnB>
+                    <a:solidFill>
+                      <a:schemeClr val="bg1"/>
+                    </a:solidFill>
+                  </a:tcPr>
+                </a:tc>
+                <a:tc>
+                  <a:txBody>
+                    <a:bodyPr/>
+                    <a:lstStyle/>
+                    <a:p>
+                      <a:pPr algn="ctr" indent="0" marL="0">
+                        <a:buNone/>
+                      </a:pPr>
+                      <a:r>
+                        <a:rPr lang="en-US" sz="1000" dirty="0">
+                          <a:solidFill>
+                            <a:schemeClr val="tx1"/>
+                          </a:solidFill>
+                          <a:latin typeface="Meiryo UI" pitchFamily="34" charset="0"/>
+                          <a:ea typeface="Meiryo UI" pitchFamily="34" charset="-122"/>
+                          <a:cs typeface="Meiryo UI" pitchFamily="34" charset="-120"/>
+                        </a:rPr>
+                        <a:t>1</a:t>
+                      </a:r>
+                      <a:endParaRPr lang="en-US" sz="1000" dirty="0">
+                        <a:latin typeface="Meiryo UI" charset="0"/>
+                        <a:ea typeface="Meiryo UI" charset="0"/>
+                        <a:cs typeface="Meiryo UI" charset="0"/>
+                      </a:endParaRPr>
+                    </a:p>
+                  </a:txBody>
+                  <a:tcPr marL="36576" marR="36576" marT="0" marB="0" anchor="ctr">
+                    <a:lnL w="6350" cap="flat" cmpd="sng" algn="ctr">
+                      <a:solidFill>
+                        <a:srgbClr val="EEF2F7"/>
+                      </a:solidFill>
+                      <a:prstDash val="solid"/>
+                      <a:round/>
+                      <a:headEnd type="none" w="med" len="med"/>
+                      <a:tailEnd type="none" w="med" len="med"/>
+                    </a:lnL>
+                    <a:lnR w="6350" cap="flat" cmpd="sng" algn="ctr">
+                      <a:solidFill>
+                        <a:srgbClr val="EEF2F7"/>
+                      </a:solidFill>
+                      <a:prstDash val="solid"/>
+                      <a:round/>
+                      <a:headEnd type="none" w="med" len="med"/>
+                      <a:tailEnd type="none" w="med" len="med"/>
+                    </a:lnR>
+                    <a:lnT w="6350" cap="flat" cmpd="sng" algn="ctr">
+                      <a:solidFill>
+                        <a:srgbClr val="EEF2F7"/>
+                      </a:solidFill>
+                      <a:prstDash val="solid"/>
+                      <a:round/>
+                      <a:headEnd type="none" w="med" len="med"/>
+                      <a:tailEnd type="none" w="med" len="med"/>
+                    </a:lnT>
+                    <a:lnB w="6350" cap="flat" cmpd="sng" algn="ctr">
+                      <a:solidFill>
+                        <a:srgbClr val="EEF2F7"/>
+                      </a:solidFill>
+                      <a:prstDash val="solid"/>
+                      <a:round/>
+                      <a:headEnd type="none" w="med" len="med"/>
+                      <a:tailEnd type="none" w="med" len="med"/>
+                    </a:lnB>
+                    <a:solidFill>
+                      <a:schemeClr val="bg1"/>
+                    </a:solidFill>
+                  </a:tcPr>
+                </a:tc>
+                <a:tc>
+                  <a:txBody>
+                    <a:bodyPr/>
+                    <a:lstStyle/>
+                    <a:p>
+                      <a:pPr algn="ctr" indent="0" marL="0">
+                        <a:buNone/>
+                      </a:pPr>
+                      <a:r>
+                        <a:rPr lang="en-US" sz="1000" dirty="0">
+                          <a:solidFill>
+                            <a:schemeClr val="tx1"/>
+                          </a:solidFill>
+                          <a:latin typeface="Meiryo UI" pitchFamily="34" charset="0"/>
+                          <a:ea typeface="Meiryo UI" pitchFamily="34" charset="-122"/>
+                          <a:cs typeface="Meiryo UI" pitchFamily="34" charset="-120"/>
+                        </a:rPr>
+                        <a:t>0.7</a:t>
+                      </a:r>
+                      <a:endParaRPr lang="en-US" sz="1000" dirty="0">
+                        <a:latin typeface="Meiryo UI" charset="0"/>
+                        <a:ea typeface="Meiryo UI" charset="0"/>
+                        <a:cs typeface="Meiryo UI" charset="0"/>
+                      </a:endParaRPr>
+                    </a:p>
+                  </a:txBody>
+                  <a:tcPr marL="36576" marR="36576" marT="0" marB="0" anchor="ctr">
+                    <a:lnL w="6350" cap="flat" cmpd="sng" algn="ctr">
+                      <a:solidFill>
+                        <a:srgbClr val="EEF2F7"/>
+                      </a:solidFill>
+                      <a:prstDash val="solid"/>
+                      <a:round/>
+                      <a:headEnd type="none" w="med" len="med"/>
+                      <a:tailEnd type="none" w="med" len="med"/>
+                    </a:lnL>
+                    <a:lnR w="6350" cap="flat" cmpd="sng" algn="ctr">
+                      <a:solidFill>
+                        <a:srgbClr val="EEF2F7"/>
+                      </a:solidFill>
+                      <a:prstDash val="solid"/>
+                      <a:round/>
+                      <a:headEnd type="none" w="med" len="med"/>
+                      <a:tailEnd type="none" w="med" len="med"/>
+                    </a:lnR>
+                    <a:lnT w="6350" cap="flat" cmpd="sng" algn="ctr">
+                      <a:solidFill>
+                        <a:srgbClr val="EEF2F7"/>
+                      </a:solidFill>
+                      <a:prstDash val="solid"/>
+                      <a:round/>
+                      <a:headEnd type="none" w="med" len="med"/>
+                      <a:tailEnd type="none" w="med" len="med"/>
+                    </a:lnT>
+                    <a:lnB w="6350" cap="flat" cmpd="sng" algn="ctr">
+                      <a:solidFill>
+                        <a:srgbClr val="EEF2F7"/>
+                      </a:solidFill>
+                      <a:prstDash val="solid"/>
+                      <a:round/>
+                      <a:headEnd type="none" w="med" len="med"/>
+                      <a:tailEnd type="none" w="med" len="med"/>
+                    </a:lnB>
+                    <a:solidFill>
+                      <a:schemeClr val="bg1"/>
+                    </a:solidFill>
+                  </a:tcPr>
+                </a:tc>
+              </a:tr>
+              <a:tr h="274320">
+                <a:tc>
+                  <a:txBody>
+                    <a:bodyPr/>
+                    <a:lstStyle/>
+                    <a:p>
+                      <a:pPr algn="l" indent="0" marL="0">
+                        <a:buNone/>
+                      </a:pPr>
+                      <a:r>
+                        <a:rPr lang="en-US" sz="1000" dirty="0">
+                          <a:solidFill>
+                            <a:schemeClr val="tx1"/>
+                          </a:solidFill>
+                          <a:latin typeface="Meiryo UI" pitchFamily="34" charset="0"/>
+                          <a:ea typeface="Meiryo UI" pitchFamily="34" charset="-122"/>
+                          <a:cs typeface="Meiryo UI" pitchFamily="34" charset="-120"/>
+                        </a:rPr>
+                        <a:t>その他・未記入</a:t>
+                      </a:r>
+                      <a:endParaRPr lang="en-US" sz="1000" dirty="0">
+                        <a:latin typeface="Meiryo UI" charset="0"/>
+                        <a:ea typeface="Meiryo UI" charset="0"/>
+                        <a:cs typeface="Meiryo UI" charset="0"/>
+                      </a:endParaRPr>
+                    </a:p>
+                  </a:txBody>
+                  <a:tcPr marL="36576" marR="36576" marT="0" marB="0" anchor="ctr">
+                    <a:lnL w="6350" cap="flat" cmpd="sng" algn="ctr">
+                      <a:solidFill>
+                        <a:srgbClr val="EEF2F7"/>
+                      </a:solidFill>
+                      <a:prstDash val="solid"/>
+                      <a:round/>
+                      <a:headEnd type="none" w="med" len="med"/>
+                      <a:tailEnd type="none" w="med" len="med"/>
+                    </a:lnL>
+                    <a:lnR w="6350" cap="flat" cmpd="sng" algn="ctr">
+                      <a:solidFill>
+                        <a:srgbClr val="EEF2F7"/>
+                      </a:solidFill>
+                      <a:prstDash val="solid"/>
+                      <a:round/>
+                      <a:headEnd type="none" w="med" len="med"/>
+                      <a:tailEnd type="none" w="med" len="med"/>
+                    </a:lnR>
+                    <a:lnT w="6350" cap="flat" cmpd="sng" algn="ctr">
+                      <a:solidFill>
+                        <a:srgbClr val="EEF2F7"/>
+                      </a:solidFill>
+                      <a:prstDash val="solid"/>
+                      <a:round/>
+                      <a:headEnd type="none" w="med" len="med"/>
+                      <a:tailEnd type="none" w="med" len="med"/>
+                    </a:lnT>
+                    <a:lnB w="6350" cap="flat" cmpd="sng" algn="ctr">
+                      <a:solidFill>
+                        <a:srgbClr val="EEF2F7"/>
+                      </a:solidFill>
+                      <a:prstDash val="solid"/>
+                      <a:round/>
+                      <a:headEnd type="none" w="med" len="med"/>
+                      <a:tailEnd type="none" w="med" len="med"/>
+                    </a:lnB>
+                    <a:solidFill>
+                      <a:schemeClr val="bg1"/>
+                    </a:solidFill>
+                  </a:tcPr>
+                </a:tc>
+                <a:tc>
+                  <a:txBody>
+                    <a:bodyPr/>
+                    <a:lstStyle/>
+                    <a:p>
+                      <a:pPr algn="ctr" indent="0" marL="0">
+                        <a:buNone/>
+                      </a:pPr>
+                      <a:r>
+                        <a:rPr lang="en-US" sz="1000" dirty="0">
+                          <a:solidFill>
+                            <a:schemeClr val="tx1"/>
+                          </a:solidFill>
+                          <a:latin typeface="Meiryo UI" pitchFamily="34" charset="0"/>
+                          <a:ea typeface="Meiryo UI" pitchFamily="34" charset="-122"/>
+                          <a:cs typeface="Meiryo UI" pitchFamily="34" charset="-120"/>
+                        </a:rPr>
+                        <a:t>3</a:t>
+                      </a:r>
+                      <a:endParaRPr lang="en-US" sz="1000" dirty="0">
+                        <a:latin typeface="Meiryo UI" charset="0"/>
+                        <a:ea typeface="Meiryo UI" charset="0"/>
+                        <a:cs typeface="Meiryo UI" charset="0"/>
+                      </a:endParaRPr>
+                    </a:p>
+                  </a:txBody>
+                  <a:tcPr marL="36576" marR="36576" marT="0" marB="0" anchor="ctr">
+                    <a:lnL w="6350" cap="flat" cmpd="sng" algn="ctr">
+                      <a:solidFill>
+                        <a:srgbClr val="EEF2F7"/>
+                      </a:solidFill>
+                      <a:prstDash val="solid"/>
+                      <a:round/>
+                      <a:headEnd type="none" w="med" len="med"/>
+                      <a:tailEnd type="none" w="med" len="med"/>
+                    </a:lnL>
+                    <a:lnR w="6350" cap="flat" cmpd="sng" algn="ctr">
+                      <a:solidFill>
+                        <a:srgbClr val="EEF2F7"/>
+                      </a:solidFill>
+                      <a:prstDash val="solid"/>
+                      <a:round/>
+                      <a:headEnd type="none" w="med" len="med"/>
+                      <a:tailEnd type="none" w="med" len="med"/>
+                    </a:lnR>
+                    <a:lnT w="6350" cap="flat" cmpd="sng" algn="ctr">
+                      <a:solidFill>
+                        <a:srgbClr val="EEF2F7"/>
+                      </a:solidFill>
+                      <a:prstDash val="solid"/>
+                      <a:round/>
+                      <a:headEnd type="none" w="med" len="med"/>
+                      <a:tailEnd type="none" w="med" len="med"/>
+                    </a:lnT>
+                    <a:lnB w="6350" cap="flat" cmpd="sng" algn="ctr">
+                      <a:solidFill>
+                        <a:srgbClr val="EEF2F7"/>
+                      </a:solidFill>
+                      <a:prstDash val="solid"/>
+                      <a:round/>
+                      <a:headEnd type="none" w="med" len="med"/>
+                      <a:tailEnd type="none" w="med" len="med"/>
+                    </a:lnB>
+                    <a:solidFill>
+                      <a:schemeClr val="bg1"/>
+                    </a:solidFill>
+                  </a:tcPr>
+                </a:tc>
+                <a:tc>
+                  <a:txBody>
+                    <a:bodyPr/>
+                    <a:lstStyle/>
+                    <a:p>
+                      <a:pPr algn="ctr" indent="0" marL="0">
+                        <a:buNone/>
+                      </a:pPr>
+                      <a:r>
+                        <a:rPr lang="en-US" sz="1000" dirty="0">
+                          <a:solidFill>
+                            <a:schemeClr val="tx1"/>
+                          </a:solidFill>
+                          <a:latin typeface="Meiryo UI" pitchFamily="34" charset="0"/>
+                          <a:ea typeface="Meiryo UI" pitchFamily="34" charset="-122"/>
+                          <a:cs typeface="Meiryo UI" pitchFamily="34" charset="-120"/>
+                        </a:rPr>
+                        <a:t>0</a:t>
+                      </a:r>
+                      <a:endParaRPr lang="en-US" sz="1000" dirty="0">
+                        <a:latin typeface="Meiryo UI" charset="0"/>
+                        <a:ea typeface="Meiryo UI" charset="0"/>
+                        <a:cs typeface="Meiryo UI" charset="0"/>
+                      </a:endParaRPr>
+                    </a:p>
+                  </a:txBody>
+                  <a:tcPr marL="36576" marR="36576" marT="0" marB="0" anchor="ctr">
+                    <a:lnL w="6350" cap="flat" cmpd="sng" algn="ctr">
+                      <a:solidFill>
+                        <a:srgbClr val="EEF2F7"/>
+                      </a:solidFill>
+                      <a:prstDash val="solid"/>
+                      <a:round/>
+                      <a:headEnd type="none" w="med" len="med"/>
+                      <a:tailEnd type="none" w="med" len="med"/>
+                    </a:lnL>
+                    <a:lnR w="6350" cap="flat" cmpd="sng" algn="ctr">
+                      <a:solidFill>
+                        <a:srgbClr val="EEF2F7"/>
+                      </a:solidFill>
+                      <a:prstDash val="solid"/>
+                      <a:round/>
+                      <a:headEnd type="none" w="med" len="med"/>
+                      <a:tailEnd type="none" w="med" len="med"/>
+                    </a:lnR>
+                    <a:lnT w="6350" cap="flat" cmpd="sng" algn="ctr">
+                      <a:solidFill>
+                        <a:srgbClr val="EEF2F7"/>
+                      </a:solidFill>
+                      <a:prstDash val="solid"/>
+                      <a:round/>
+                      <a:headEnd type="none" w="med" len="med"/>
+                      <a:tailEnd type="none" w="med" len="med"/>
+                    </a:lnT>
+                    <a:lnB w="6350" cap="flat" cmpd="sng" algn="ctr">
+                      <a:solidFill>
+                        <a:srgbClr val="EEF2F7"/>
+                      </a:solidFill>
+                      <a:prstDash val="solid"/>
+                      <a:round/>
+                      <a:headEnd type="none" w="med" len="med"/>
+                      <a:tailEnd type="none" w="med" len="med"/>
+                    </a:lnB>
+                    <a:solidFill>
+                      <a:schemeClr val="bg1"/>
+                    </a:solidFill>
+                  </a:tcPr>
+                </a:tc>
+                <a:tc>
+                  <a:txBody>
+                    <a:bodyPr/>
+                    <a:lstStyle/>
+                    <a:p>
+                      <a:pPr algn="ctr" indent="0" marL="0">
+                        <a:buNone/>
+                      </a:pPr>
+                      <a:r>
+                        <a:rPr lang="en-US" sz="1000" dirty="0">
+                          <a:solidFill>
+                            <a:schemeClr val="accent4"/>
+                          </a:solidFill>
+                          <a:latin typeface="Meiryo UI" pitchFamily="34" charset="0"/>
+                          <a:ea typeface="Meiryo UI" pitchFamily="34" charset="-122"/>
+                          <a:cs typeface="Meiryo UI" pitchFamily="34" charset="-120"/>
+                        </a:rPr>
+                        <a:t>3</a:t>
+                      </a:r>
+                      <a:endParaRPr lang="en-US" sz="1000" dirty="0">
+                        <a:latin typeface="Meiryo UI" charset="0"/>
+                        <a:ea typeface="Meiryo UI" charset="0"/>
+                        <a:cs typeface="Meiryo UI" charset="0"/>
+                      </a:endParaRPr>
+                    </a:p>
+                  </a:txBody>
+                  <a:tcPr marL="36576" marR="36576" marT="0" marB="0" anchor="ctr">
+                    <a:lnL w="6350" cap="flat" cmpd="sng" algn="ctr">
+                      <a:solidFill>
+                        <a:srgbClr val="EEF2F7"/>
+                      </a:solidFill>
+                      <a:prstDash val="solid"/>
+                      <a:round/>
+                      <a:headEnd type="none" w="med" len="med"/>
+                      <a:tailEnd type="none" w="med" len="med"/>
+                    </a:lnL>
+                    <a:lnR w="6350" cap="flat" cmpd="sng" algn="ctr">
+                      <a:solidFill>
+                        <a:srgbClr val="EEF2F7"/>
+                      </a:solidFill>
+                      <a:prstDash val="solid"/>
+                      <a:round/>
+                      <a:headEnd type="none" w="med" len="med"/>
+                      <a:tailEnd type="none" w="med" len="med"/>
+                    </a:lnR>
+                    <a:lnT w="6350" cap="flat" cmpd="sng" algn="ctr">
+                      <a:solidFill>
+                        <a:srgbClr val="EEF2F7"/>
+                      </a:solidFill>
+                      <a:prstDash val="solid"/>
+                      <a:round/>
+                      <a:headEnd type="none" w="med" len="med"/>
+                      <a:tailEnd type="none" w="med" len="med"/>
+                    </a:lnT>
+                    <a:lnB w="6350" cap="flat" cmpd="sng" algn="ctr">
+                      <a:solidFill>
+                        <a:srgbClr val="EEF2F7"/>
+                      </a:solidFill>
+                      <a:prstDash val="solid"/>
+                      <a:round/>
+                      <a:headEnd type="none" w="med" len="med"/>
+                      <a:tailEnd type="none" w="med" len="med"/>
+                    </a:lnB>
+                    <a:solidFill>
+                      <a:schemeClr val="bg1"/>
+                    </a:solidFill>
+                  </a:tcPr>
+                </a:tc>
+                <a:tc>
+                  <a:txBody>
+                    <a:bodyPr/>
+                    <a:lstStyle/>
+                    <a:p>
+                      <a:pPr algn="ctr" indent="0" marL="0">
+                        <a:buNone/>
+                      </a:pPr>
+                      <a:r>
+                        <a:rPr lang="en-US" sz="1000" dirty="0">
+                          <a:solidFill>
+                            <a:schemeClr val="tx1"/>
+                          </a:solidFill>
+                          <a:latin typeface="Meiryo UI" pitchFamily="34" charset="0"/>
+                          <a:ea typeface="Meiryo UI" pitchFamily="34" charset="-122"/>
+                          <a:cs typeface="Meiryo UI" pitchFamily="34" charset="-120"/>
+                        </a:rPr>
+                        <a:t>1.8</a:t>
+                      </a:r>
+                      <a:endParaRPr lang="en-US" sz="1000" dirty="0">
+                        <a:latin typeface="Meiryo UI" charset="0"/>
+                        <a:ea typeface="Meiryo UI" charset="0"/>
+                        <a:cs typeface="Meiryo UI" charset="0"/>
+                      </a:endParaRPr>
+                    </a:p>
+                  </a:txBody>
+                  <a:tcPr marL="36576" marR="36576" marT="0" marB="0" anchor="ctr">
+                    <a:lnL w="6350" cap="flat" cmpd="sng" algn="ctr">
+                      <a:solidFill>
+                        <a:srgbClr val="EEF2F7"/>
+                      </a:solidFill>
+                      <a:prstDash val="solid"/>
+                      <a:round/>
+                      <a:headEnd type="none" w="med" len="med"/>
+                      <a:tailEnd type="none" w="med" len="med"/>
+                    </a:lnL>
+                    <a:lnR w="6350" cap="flat" cmpd="sng" algn="ctr">
+                      <a:solidFill>
+                        <a:srgbClr val="EEF2F7"/>
+                      </a:solidFill>
+                      <a:prstDash val="solid"/>
+                      <a:round/>
+                      <a:headEnd type="none" w="med" len="med"/>
+                      <a:tailEnd type="none" w="med" len="med"/>
+                    </a:lnR>
+                    <a:lnT w="6350" cap="flat" cmpd="sng" algn="ctr">
+                      <a:solidFill>
+                        <a:srgbClr val="EEF2F7"/>
+                      </a:solidFill>
+                      <a:prstDash val="solid"/>
+                      <a:round/>
+                      <a:headEnd type="none" w="med" len="med"/>
+                      <a:tailEnd type="none" w="med" len="med"/>
+                    </a:lnT>
+                    <a:lnB w="6350" cap="flat" cmpd="sng" algn="ctr">
+                      <a:solidFill>
+                        <a:srgbClr val="EEF2F7"/>
+                      </a:solidFill>
+                      <a:prstDash val="solid"/>
+                      <a:round/>
+                      <a:headEnd type="none" w="med" len="med"/>
+                      <a:tailEnd type="none" w="med" len="med"/>
+                    </a:lnB>
+                    <a:solidFill>
+                      <a:schemeClr val="bg1"/>
+                    </a:solidFill>
+                  </a:tcPr>
+                </a:tc>
+              </a:tr>
+              <a:tr h="274320">
+                <a:tc>
+                  <a:txBody>
+                    <a:bodyPr/>
+                    <a:lstStyle/>
+                    <a:p>
+                      <a:pPr algn="l" indent="0" marL="0">
+                        <a:buNone/>
+                      </a:pPr>
+                      <a:r>
+                        <a:rPr lang="en-US" sz="1000" b="1" dirty="0">
+                          <a:solidFill>
+                            <a:schemeClr val="tx1"/>
+                          </a:solidFill>
+                          <a:latin typeface="Meiryo UI" pitchFamily="34" charset="0"/>
+                          <a:ea typeface="Meiryo UI" pitchFamily="34" charset="-122"/>
+                          <a:cs typeface="Meiryo UI" pitchFamily="34" charset="-120"/>
+                        </a:rPr>
+                        <a:t>計</a:t>
+                      </a:r>
+                      <a:endParaRPr lang="en-US" sz="1000" dirty="0">
+                        <a:latin typeface="Meiryo UI" charset="0"/>
+                        <a:ea typeface="Meiryo UI" charset="0"/>
+                        <a:cs typeface="Meiryo UI" charset="0"/>
+                      </a:endParaRPr>
+                    </a:p>
+                  </a:txBody>
+                  <a:tcPr marL="36576" marR="36576" marT="0" marB="0" anchor="ctr">
+                    <a:lnL w="6350" cap="flat" cmpd="sng" algn="ctr">
+                      <a:solidFill>
+                        <a:srgbClr val="EEF2F7"/>
+                      </a:solidFill>
+                      <a:prstDash val="solid"/>
+                      <a:round/>
+                      <a:headEnd type="none" w="med" len="med"/>
+                      <a:tailEnd type="none" w="med" len="med"/>
+                    </a:lnL>
+                    <a:lnR w="6350" cap="flat" cmpd="sng" algn="ctr">
+                      <a:solidFill>
+                        <a:srgbClr val="EEF2F7"/>
+                      </a:solidFill>
+                      <a:prstDash val="solid"/>
+                      <a:round/>
+                      <a:headEnd type="none" w="med" len="med"/>
+                      <a:tailEnd type="none" w="med" len="med"/>
+                    </a:lnR>
+                    <a:lnT w="6350" cap="flat" cmpd="sng" algn="ctr">
+                      <a:solidFill>
+                        <a:srgbClr val="EEF2F7"/>
+                      </a:solidFill>
+                      <a:prstDash val="solid"/>
+                      <a:round/>
+                      <a:headEnd type="none" w="med" len="med"/>
+                      <a:tailEnd type="none" w="med" len="med"/>
+                    </a:lnT>
+                    <a:lnB w="6350" cap="flat" cmpd="sng" algn="ctr">
+                      <a:solidFill>
+                        <a:srgbClr val="EEF2F7"/>
+                      </a:solidFill>
+                      <a:prstDash val="solid"/>
+                      <a:round/>
+                      <a:headEnd type="none" w="med" len="med"/>
+                      <a:tailEnd type="none" w="med" len="med"/>
+                    </a:lnB>
+                    <a:solidFill>
+                      <a:schemeClr val="bg2"/>
+                    </a:solidFill>
+                  </a:tcPr>
+                </a:tc>
+                <a:tc>
+                  <a:txBody>
+                    <a:bodyPr/>
+                    <a:lstStyle/>
+                    <a:p>
+                      <a:pPr algn="ctr" indent="0" marL="0">
+                        <a:buNone/>
+                      </a:pPr>
+                      <a:r>
+                        <a:rPr lang="en-US" sz="1000" b="1" dirty="0">
+                          <a:solidFill>
+                            <a:schemeClr val="tx1"/>
+                          </a:solidFill>
+                          <a:latin typeface="Meiryo UI" pitchFamily="34" charset="0"/>
+                          <a:ea typeface="Meiryo UI" pitchFamily="34" charset="-122"/>
+                          <a:cs typeface="Meiryo UI" pitchFamily="34" charset="-120"/>
+                        </a:rPr>
+                        <a:t>16</a:t>
+                      </a:r>
+                      <a:endParaRPr lang="en-US" sz="1000" dirty="0">
+                        <a:latin typeface="Meiryo UI" charset="0"/>
+                        <a:ea typeface="Meiryo UI" charset="0"/>
+                        <a:cs typeface="Meiryo UI" charset="0"/>
+                      </a:endParaRPr>
+                    </a:p>
+                  </a:txBody>
+                  <a:tcPr marL="36576" marR="36576" marT="0" marB="0" anchor="ctr">
+                    <a:lnL w="6350" cap="flat" cmpd="sng" algn="ctr">
+                      <a:solidFill>
+                        <a:srgbClr val="EEF2F7"/>
+                      </a:solidFill>
+                      <a:prstDash val="solid"/>
+                      <a:round/>
+                      <a:headEnd type="none" w="med" len="med"/>
+                      <a:tailEnd type="none" w="med" len="med"/>
+                    </a:lnL>
+                    <a:lnR w="6350" cap="flat" cmpd="sng" algn="ctr">
+                      <a:solidFill>
+                        <a:srgbClr val="EEF2F7"/>
+                      </a:solidFill>
+                      <a:prstDash val="solid"/>
+                      <a:round/>
+                      <a:headEnd type="none" w="med" len="med"/>
+                      <a:tailEnd type="none" w="med" len="med"/>
+                    </a:lnR>
+                    <a:lnT w="6350" cap="flat" cmpd="sng" algn="ctr">
+                      <a:solidFill>
+                        <a:srgbClr val="EEF2F7"/>
+                      </a:solidFill>
+                      <a:prstDash val="solid"/>
+                      <a:round/>
+                      <a:headEnd type="none" w="med" len="med"/>
+                      <a:tailEnd type="none" w="med" len="med"/>
+                    </a:lnT>
+                    <a:lnB w="6350" cap="flat" cmpd="sng" algn="ctr">
+                      <a:solidFill>
+                        <a:srgbClr val="EEF2F7"/>
+                      </a:solidFill>
+                      <a:prstDash val="solid"/>
+                      <a:round/>
+                      <a:headEnd type="none" w="med" len="med"/>
+                      <a:tailEnd type="none" w="med" len="med"/>
+                    </a:lnB>
+                    <a:solidFill>
+                      <a:schemeClr val="bg2"/>
+                    </a:solidFill>
+                  </a:tcPr>
+                </a:tc>
+                <a:tc>
+                  <a:txBody>
+                    <a:bodyPr/>
+                    <a:lstStyle/>
+                    <a:p>
+                      <a:pPr algn="ctr" indent="0" marL="0">
+                        <a:buNone/>
+                      </a:pPr>
+                      <a:r>
+                        <a:rPr lang="en-US" sz="1000" b="1" dirty="0">
+                          <a:solidFill>
+                            <a:schemeClr val="tx1"/>
+                          </a:solidFill>
+                          <a:latin typeface="Meiryo UI" pitchFamily="34" charset="0"/>
+                          <a:ea typeface="Meiryo UI" pitchFamily="34" charset="-122"/>
+                          <a:cs typeface="Meiryo UI" pitchFamily="34" charset="-120"/>
+                        </a:rPr>
+                        <a:t>3</a:t>
+                      </a:r>
+                      <a:endParaRPr lang="en-US" sz="1000" dirty="0">
+                        <a:latin typeface="Meiryo UI" charset="0"/>
+                        <a:ea typeface="Meiryo UI" charset="0"/>
+                        <a:cs typeface="Meiryo UI" charset="0"/>
+                      </a:endParaRPr>
+                    </a:p>
+                  </a:txBody>
+                  <a:tcPr marL="36576" marR="36576" marT="0" marB="0" anchor="ctr">
+                    <a:lnL w="6350" cap="flat" cmpd="sng" algn="ctr">
+                      <a:solidFill>
+                        <a:srgbClr val="EEF2F7"/>
+                      </a:solidFill>
+                      <a:prstDash val="solid"/>
+                      <a:round/>
+                      <a:headEnd type="none" w="med" len="med"/>
+                      <a:tailEnd type="none" w="med" len="med"/>
+                    </a:lnL>
+                    <a:lnR w="6350" cap="flat" cmpd="sng" algn="ctr">
+                      <a:solidFill>
+                        <a:srgbClr val="EEF2F7"/>
+                      </a:solidFill>
+                      <a:prstDash val="solid"/>
+                      <a:round/>
+                      <a:headEnd type="none" w="med" len="med"/>
+                      <a:tailEnd type="none" w="med" len="med"/>
+                    </a:lnR>
+                    <a:lnT w="6350" cap="flat" cmpd="sng" algn="ctr">
+                      <a:solidFill>
+                        <a:srgbClr val="EEF2F7"/>
+                      </a:solidFill>
+                      <a:prstDash val="solid"/>
+                      <a:round/>
+                      <a:headEnd type="none" w="med" len="med"/>
+                      <a:tailEnd type="none" w="med" len="med"/>
+                    </a:lnT>
+                    <a:lnB w="6350" cap="flat" cmpd="sng" algn="ctr">
+                      <a:solidFill>
+                        <a:srgbClr val="EEF2F7"/>
+                      </a:solidFill>
+                      <a:prstDash val="solid"/>
+                      <a:round/>
+                      <a:headEnd type="none" w="med" len="med"/>
+                      <a:tailEnd type="none" w="med" len="med"/>
+                    </a:lnB>
+                    <a:solidFill>
+                      <a:schemeClr val="bg2"/>
+                    </a:solidFill>
+                  </a:tcPr>
+                </a:tc>
+                <a:tc>
+                  <a:txBody>
+                    <a:bodyPr/>
+                    <a:lstStyle/>
+                    <a:p>
+                      <a:pPr algn="ctr" indent="0" marL="0">
+                        <a:buNone/>
+                      </a:pPr>
+                      <a:r>
+                        <a:rPr lang="en-US" sz="1000" b="1" dirty="0">
+                          <a:solidFill>
+                            <a:schemeClr val="tx1"/>
+                          </a:solidFill>
+                          <a:latin typeface="Meiryo UI" pitchFamily="34" charset="0"/>
+                          <a:ea typeface="Meiryo UI" pitchFamily="34" charset="-122"/>
+                          <a:cs typeface="Meiryo UI" pitchFamily="34" charset="-120"/>
+                        </a:rPr>
+                        <a:t>13</a:t>
+                      </a:r>
+                      <a:endParaRPr lang="en-US" sz="1000" dirty="0">
+                        <a:latin typeface="Meiryo UI" charset="0"/>
+                        <a:ea typeface="Meiryo UI" charset="0"/>
+                        <a:cs typeface="Meiryo UI" charset="0"/>
+                      </a:endParaRPr>
+                    </a:p>
+                  </a:txBody>
+                  <a:tcPr marL="36576" marR="36576" marT="0" marB="0" anchor="ctr">
+                    <a:lnL w="6350" cap="flat" cmpd="sng" algn="ctr">
+                      <a:solidFill>
+                        <a:srgbClr val="EEF2F7"/>
+                      </a:solidFill>
+                      <a:prstDash val="solid"/>
+                      <a:round/>
+                      <a:headEnd type="none" w="med" len="med"/>
+                      <a:tailEnd type="none" w="med" len="med"/>
+                    </a:lnL>
+                    <a:lnR w="6350" cap="flat" cmpd="sng" algn="ctr">
+                      <a:solidFill>
+                        <a:srgbClr val="EEF2F7"/>
+                      </a:solidFill>
+                      <a:prstDash val="solid"/>
+                      <a:round/>
+                      <a:headEnd type="none" w="med" len="med"/>
+                      <a:tailEnd type="none" w="med" len="med"/>
+                    </a:lnR>
+                    <a:lnT w="6350" cap="flat" cmpd="sng" algn="ctr">
+                      <a:solidFill>
+                        <a:srgbClr val="EEF2F7"/>
+                      </a:solidFill>
+                      <a:prstDash val="solid"/>
+                      <a:round/>
+                      <a:headEnd type="none" w="med" len="med"/>
+                      <a:tailEnd type="none" w="med" len="med"/>
+                    </a:lnT>
+                    <a:lnB w="6350" cap="flat" cmpd="sng" algn="ctr">
+                      <a:solidFill>
+                        <a:srgbClr val="EEF2F7"/>
+                      </a:solidFill>
+                      <a:prstDash val="solid"/>
+                      <a:round/>
+                      <a:headEnd type="none" w="med" len="med"/>
+                      <a:tailEnd type="none" w="med" len="med"/>
+                    </a:lnB>
+                    <a:solidFill>
+                      <a:schemeClr val="bg2"/>
+                    </a:solidFill>
+                  </a:tcPr>
+                </a:tc>
+                <a:tc>
+                  <a:txBody>
+                    <a:bodyPr/>
+                    <a:lstStyle/>
+                    <a:p>
+                      <a:pPr algn="ctr" indent="0" marL="0">
+                        <a:buNone/>
+                      </a:pPr>
+                      <a:r>
+                        <a:rPr lang="en-US" sz="1000" b="1" dirty="0">
+                          <a:solidFill>
+                            <a:schemeClr val="tx1"/>
+                          </a:solidFill>
+                          <a:latin typeface="Meiryo UI" pitchFamily="34" charset="0"/>
+                          <a:ea typeface="Meiryo UI" pitchFamily="34" charset="-122"/>
+                          <a:cs typeface="Meiryo UI" pitchFamily="34" charset="-120"/>
+                        </a:rPr>
+                        <a:t>10.0</a:t>
+                      </a:r>
+                      <a:endParaRPr lang="en-US" sz="1000" dirty="0">
+                        <a:latin typeface="Meiryo UI" charset="0"/>
+                        <a:ea typeface="Meiryo UI" charset="0"/>
+                        <a:cs typeface="Meiryo UI" charset="0"/>
+                      </a:endParaRPr>
+                    </a:p>
+                  </a:txBody>
+                  <a:tcPr marL="36576" marR="36576" marT="0" marB="0" anchor="ctr">
+                    <a:lnL w="6350" cap="flat" cmpd="sng" algn="ctr">
+                      <a:solidFill>
+                        <a:srgbClr val="EEF2F7"/>
+                      </a:solidFill>
+                      <a:prstDash val="solid"/>
+                      <a:round/>
+                      <a:headEnd type="none" w="med" len="med"/>
+                      <a:tailEnd type="none" w="med" len="med"/>
+                    </a:lnL>
+                    <a:lnR w="6350" cap="flat" cmpd="sng" algn="ctr">
+                      <a:solidFill>
+                        <a:srgbClr val="EEF2F7"/>
+                      </a:solidFill>
+                      <a:prstDash val="solid"/>
+                      <a:round/>
+                      <a:headEnd type="none" w="med" len="med"/>
+                      <a:tailEnd type="none" w="med" len="med"/>
+                    </a:lnR>
+                    <a:lnT w="6350" cap="flat" cmpd="sng" algn="ctr">
+                      <a:solidFill>
+                        <a:srgbClr val="EEF2F7"/>
+                      </a:solidFill>
+                      <a:prstDash val="solid"/>
+                      <a:round/>
+                      <a:headEnd type="none" w="med" len="med"/>
+                      <a:tailEnd type="none" w="med" len="med"/>
+                    </a:lnT>
+                    <a:lnB w="6350" cap="flat" cmpd="sng" algn="ctr">
+                      <a:solidFill>
+                        <a:srgbClr val="EEF2F7"/>
+                      </a:solidFill>
+                      <a:prstDash val="solid"/>
+                      <a:round/>
+                      <a:headEnd type="none" w="med" len="med"/>
+                      <a:tailEnd type="none" w="med" len="med"/>
+                    </a:lnB>
+                    <a:solidFill>
+                      <a:schemeClr val="bg2"/>
+                    </a:solidFill>
+                  </a:tcPr>
+                </a:tc>
+              </a:tr>
+            </a:tbl>
+          </a:graphicData>
+        </a:graphic>
+      </p:graphicFrame>
+      <p:sp>
+        <p:nvSpPr>
+          <p:cNvPr id="27" name="q3-agent-note"/>
+          <p:cNvSpPr txBox="1"/>
+          <p:nvPr/>
+        </p:nvSpPr>
+        <p:spPr>
+          <a:xfrm>
+            <a:off x="4206240" y="5257800"/>
+            <a:ext cx="3474720" cy="1005840"/>
+          </a:xfrm>
+          <a:prstGeom prst="rect">
+            <a:avLst/>
+          </a:prstGeom>
+          <a:noFill/>
+          <a:ln/>
+        </p:spPr>
+        <p:txBody>
+          <a:bodyPr wrap="square" lIns="0" tIns="0" rIns="0" bIns="0" rtlCol="0" anchor="t"/>
+          <a:lstStyle/>
+          <a:p>
+            <a:pPr indent="0" marL="0">
+              <a:spcAft>
+                <a:spcPts val="300"/>
+              </a:spcAft>
+              <a:buNone/>
+            </a:pPr>
+            <a:r>
+              <a:rPr lang="en-US" sz="1100" b="1" dirty="0">
+                <a:solidFill>
+                  <a:schemeClr val="tx1"/>
+                </a:solidFill>
+              </a:rPr>
+              <a:t>和光・池田でQ3 FCTの6割(10件)</a:t>
+            </a:r>
+            <a:endParaRPr lang="en-US" sz="1100" dirty="0"/>
+          </a:p>
+          <a:p>
+            <a:pPr indent="0" marL="0">
+              <a:spcAft>
+                <a:spcPts val="300"/>
+              </a:spcAft>
+              <a:buNone/>
+            </a:pPr>
+            <a:r>
+              <a:rPr lang="en-US" sz="1100" dirty="0">
+                <a:solidFill>
+                  <a:schemeClr val="tx1"/>
+                </a:solidFill>
+              </a:rPr>
+              <a:t>納期を月決(A)・Q決(B)に固められるかが勝負</a:t>
+            </a:r>
+            <a:endParaRPr lang="en-US" sz="1100" dirty="0"/>
+          </a:p>
+          <a:p>
+            <a:pPr indent="0" marL="0">
+              <a:spcAft>
+                <a:spcPts val="300"/>
+              </a:spcAft>
+              <a:buNone/>
+            </a:pPr>
+            <a:r>
+              <a:rPr lang="en-US" sz="900" dirty="0">
+                <a:solidFill>
+                  <a:schemeClr val="accent5"/>
+                </a:solidFill>
+              </a:rPr>
+              <a:t>見込み = FCT×モデル勝率 + Backup×10%</a:t>
+            </a:r>
+            <a:endParaRPr lang="en-US" sz="1100" dirty="0"/>
+          </a:p>
+        </p:txBody>
+      </p:sp>
+      <p:sp>
+        <p:nvSpPr>
+          <p:cNvPr id="28" name="q3-path"/>
+          <p:cNvSpPr/>
+          <p:nvPr/>
+        </p:nvSpPr>
+        <p:spPr>
+          <a:xfrm>
+            <a:off x="8046720" y="2834640"/>
+            <a:ext cx="3685032" cy="3520440"/>
+          </a:xfrm>
+          <a:prstGeom prst="roundRect">
+            <a:avLst>
+              <a:gd name="adj" fmla="val 2078"/>
+            </a:avLst>
+          </a:prstGeom>
+          <a:solidFill>
+            <a:schemeClr val="bg1"/>
+          </a:solidFill>
+          <a:ln w="12700">
+            <a:solidFill>
+              <a:schemeClr val="bg1"/>
+            </a:solidFill>
+            <a:prstDash val="solid"/>
+          </a:ln>
+        </p:spPr>
+      </p:sp>
+      <p:sp>
+        <p:nvSpPr>
+          <p:cNvPr id="29" name="q3-path-h"/>
+          <p:cNvSpPr txBox="1"/>
+          <p:nvPr/>
+        </p:nvSpPr>
+        <p:spPr>
+          <a:xfrm>
+            <a:off x="8046720" y="2834640"/>
+            <a:ext cx="3685032" cy="292608"/>
+          </a:xfrm>
+          <a:prstGeom prst="rect">
+            <a:avLst/>
+          </a:prstGeom>
+          <a:noFill/>
+          <a:ln/>
+        </p:spPr>
+        <p:txBody>
+          <a:bodyPr wrap="square" lIns="0" tIns="0" rIns="0" bIns="0" rtlCol="0" anchor="ctr"/>
+          <a:lstStyle/>
+          <a:p>
+            <a:pPr algn="l" indent="0" marL="0">
+              <a:buNone/>
+            </a:pPr>
+            <a:r>
+              <a:rPr lang="en-US" sz="1400" b="1" dirty="0">
+                <a:solidFill>
+                  <a:schemeClr val="tx2"/>
+                </a:solidFill>
+              </a:rPr>
+              <a:t>18台への道筋(必要水準)</a:t>
+            </a:r>
+            <a:endParaRPr lang="en-US" sz="1400" dirty="0"/>
+          </a:p>
+        </p:txBody>
+      </p:sp>
+      <p:graphicFrame>
+        <p:nvGraphicFramePr>
+          <p:cNvPr id="30" name="q3-path-chart" descr=""/>
+          <p:cNvGraphicFramePr/>
+          <p:nvPr/>
+        </p:nvGraphicFramePr>
+        <p:xfrm>
+          <a:off x="8046720" y="3154680"/>
+          <a:ext cx="1783080" cy="2743200"/>
+        </p:xfrm>
+        <a:graphic xmlns:a="http://schemas.openxmlformats.org/drawingml/2006/main">
+          <a:graphicData uri="http://schemas.openxmlformats.org/drawingml/2006/chart">
+            <c:chart xmlns:c="http://schemas.openxmlformats.org/drawingml/2006/chart" r:id="rId2"/>
+          </a:graphicData>
+        </a:graphic>
+      </p:graphicFrame>
+      <p:sp>
+        <p:nvSpPr>
+          <p:cNvPr id="31" name="q3-lg-0"/>
+          <p:cNvSpPr/>
+          <p:nvPr/>
+        </p:nvSpPr>
+        <p:spPr>
+          <a:xfrm>
+            <a:off x="9857232" y="3383280"/>
+            <a:ext cx="164592" cy="164592"/>
+          </a:xfrm>
+          <a:prstGeom prst="roundRect">
+            <a:avLst>
+              <a:gd name="adj" fmla="val 16667"/>
+            </a:avLst>
+          </a:prstGeom>
+          <a:solidFill>
+            <a:schemeClr val="accent1"/>
+          </a:solidFill>
+          <a:ln w="12700">
+            <a:solidFill>
+              <a:schemeClr val="accent1"/>
+            </a:solidFill>
+            <a:prstDash val="solid"/>
+          </a:ln>
+        </p:spPr>
+      </p:sp>
+      <p:sp>
+        <p:nvSpPr>
+          <p:cNvPr id="32" name="q3-lg-t-0"/>
+          <p:cNvSpPr txBox="1"/>
+          <p:nvPr/>
+        </p:nvSpPr>
+        <p:spPr>
+          <a:xfrm>
+            <a:off x="10076688" y="3337560"/>
+            <a:ext cx="1609344" cy="777240"/>
+          </a:xfrm>
+          <a:prstGeom prst="rect">
+            <a:avLst/>
+          </a:prstGeom>
+          <a:noFill/>
+          <a:ln/>
+        </p:spPr>
+        <p:txBody>
+          <a:bodyPr wrap="square" lIns="0" tIns="0" rIns="0" bIns="0" rtlCol="0" anchor="t"/>
+          <a:lstStyle/>
+          <a:p>
+            <a:pPr indent="0" marL="0">
+              <a:buNone/>
+            </a:pPr>
+            <a:r>
+              <a:rPr lang="en-US" sz="1000" b="1" dirty="0">
+                <a:solidFill>
+                  <a:schemeClr val="tx2"/>
+                </a:solidFill>
+              </a:rPr>
+              <a:t>Q3 FCT決め切り 13台</a:t>
+            </a:r>
+            <a:endParaRPr lang="en-US" sz="1000" dirty="0"/>
+          </a:p>
+          <a:p>
+            <a:pPr indent="0" marL="0">
+              <a:buNone/>
+            </a:pPr>
+            <a:r>
+              <a:rPr lang="en-US" sz="900" dirty="0">
+                <a:solidFill>
+                  <a:schemeClr val="tx1"/>
+                </a:solidFill>
+              </a:rPr>
+              <a:t>16件中13件(81%)。モデル勝率なら約10件</a:t>
+            </a:r>
+            <a:endParaRPr lang="en-US" sz="1000" dirty="0"/>
+          </a:p>
+        </p:txBody>
+      </p:sp>
+      <p:sp>
+        <p:nvSpPr>
+          <p:cNvPr id="33" name="q3-lg-1"/>
+          <p:cNvSpPr/>
+          <p:nvPr/>
+        </p:nvSpPr>
+        <p:spPr>
+          <a:xfrm>
+            <a:off x="9857232" y="4251960"/>
+            <a:ext cx="164592" cy="164592"/>
+          </a:xfrm>
+          <a:prstGeom prst="roundRect">
+            <a:avLst>
+              <a:gd name="adj" fmla="val 16667"/>
+            </a:avLst>
+          </a:prstGeom>
+          <a:solidFill>
+            <a:schemeClr val="accent3"/>
+          </a:solidFill>
+          <a:ln w="12700">
+            <a:solidFill>
+              <a:schemeClr val="accent3"/>
+            </a:solidFill>
+            <a:prstDash val="solid"/>
+          </a:ln>
+        </p:spPr>
+      </p:sp>
+      <p:sp>
+        <p:nvSpPr>
+          <p:cNvPr id="34" name="q3-lg-t-1"/>
+          <p:cNvSpPr txBox="1"/>
+          <p:nvPr/>
+        </p:nvSpPr>
+        <p:spPr>
+          <a:xfrm>
+            <a:off x="10076688" y="4206240"/>
+            <a:ext cx="1609344" cy="777240"/>
+          </a:xfrm>
+          <a:prstGeom prst="rect">
+            <a:avLst/>
+          </a:prstGeom>
+          <a:noFill/>
+          <a:ln/>
+        </p:spPr>
+        <p:txBody>
+          <a:bodyPr wrap="square" lIns="0" tIns="0" rIns="0" bIns="0" rtlCol="0" anchor="t"/>
+          <a:lstStyle/>
+          <a:p>
+            <a:pPr indent="0" marL="0">
+              <a:buNone/>
+            </a:pPr>
+            <a:r>
+              <a:rPr lang="en-US" sz="1000" b="1" dirty="0">
+                <a:solidFill>
+                  <a:schemeClr val="tx2"/>
+                </a:solidFill>
+              </a:rPr>
+              <a:t>Backup昇格 1台</a:t>
+            </a:r>
+            <a:endParaRPr lang="en-US" sz="1000" dirty="0"/>
+          </a:p>
+          <a:p>
+            <a:pPr indent="0" marL="0">
+              <a:buNone/>
+            </a:pPr>
+            <a:r>
+              <a:rPr lang="en-US" sz="900" dirty="0">
+                <a:solidFill>
+                  <a:schemeClr val="tx1"/>
+                </a:solidFill>
+              </a:rPr>
+              <a:t>Q3 Backup 3件から1件</a:t>
+            </a:r>
+            <a:endParaRPr lang="en-US" sz="1000" dirty="0"/>
+          </a:p>
+        </p:txBody>
+      </p:sp>
+      <p:sp>
+        <p:nvSpPr>
+          <p:cNvPr id="35" name="q3-lg-2"/>
+          <p:cNvSpPr/>
+          <p:nvPr/>
+        </p:nvSpPr>
+        <p:spPr>
+          <a:xfrm>
+            <a:off x="9857232" y="5120640"/>
+            <a:ext cx="164592" cy="164592"/>
+          </a:xfrm>
+          <a:prstGeom prst="roundRect">
+            <a:avLst>
+              <a:gd name="adj" fmla="val 16667"/>
+            </a:avLst>
+          </a:prstGeom>
+          <a:solidFill>
+            <a:schemeClr val="accent2"/>
+          </a:solidFill>
+          <a:ln w="12700">
+            <a:solidFill>
+              <a:schemeClr val="accent2"/>
+            </a:solidFill>
+            <a:prstDash val="solid"/>
+          </a:ln>
+        </p:spPr>
+      </p:sp>
+      <p:sp>
+        <p:nvSpPr>
+          <p:cNvPr id="36" name="q3-lg-t-2"/>
+          <p:cNvSpPr txBox="1"/>
+          <p:nvPr/>
+        </p:nvSpPr>
+        <p:spPr>
+          <a:xfrm>
+            <a:off x="10076688" y="5074920"/>
+            <a:ext cx="1609344" cy="777240"/>
+          </a:xfrm>
+          <a:prstGeom prst="rect">
+            <a:avLst/>
+          </a:prstGeom>
+          <a:noFill/>
+          <a:ln/>
+        </p:spPr>
+        <p:txBody>
+          <a:bodyPr wrap="square" lIns="0" tIns="0" rIns="0" bIns="0" rtlCol="0" anchor="t"/>
+          <a:lstStyle/>
+          <a:p>
+            <a:pPr indent="0" marL="0">
+              <a:buNone/>
+            </a:pPr>
+            <a:r>
+              <a:rPr lang="en-US" sz="1000" b="1" dirty="0">
+                <a:solidFill>
+                  <a:schemeClr val="tx2"/>
+                </a:solidFill>
+              </a:rPr>
+              <a:t>Q4から前倒し 4台</a:t>
+            </a:r>
+            <a:endParaRPr lang="en-US" sz="1000" dirty="0"/>
+          </a:p>
+          <a:p>
+            <a:pPr indent="0" marL="0">
+              <a:buNone/>
+            </a:pPr>
+            <a:r>
+              <a:rPr lang="en-US" sz="900" dirty="0">
+                <a:solidFill>
+                  <a:schemeClr val="tx1"/>
+                </a:solidFill>
+              </a:rPr>
+              <a:t>Q4 FCTのうち確度60%以上・納期A/Bの8件から半分</a:t>
+            </a:r>
+            <a:endParaRPr lang="en-US" sz="1000" dirty="0"/>
+          </a:p>
+        </p:txBody>
+      </p:sp>
+      <p:sp>
+        <p:nvSpPr>
+          <p:cNvPr id="37" name="q3-path-note"/>
+          <p:cNvSpPr txBox="1"/>
+          <p:nvPr/>
+        </p:nvSpPr>
+        <p:spPr>
+          <a:xfrm>
+            <a:off x="8183880" y="5943600"/>
+            <a:ext cx="3474720" cy="292608"/>
+          </a:xfrm>
+          <a:prstGeom prst="rect">
+            <a:avLst/>
+          </a:prstGeom>
+          <a:noFill/>
+          <a:ln/>
+        </p:spPr>
+        <p:txBody>
+          <a:bodyPr wrap="square" lIns="0" tIns="0" rIns="0" bIns="0" rtlCol="0" anchor="ctr"/>
+          <a:lstStyle/>
+          <a:p>
+            <a:pPr algn="l" indent="0" marL="0">
+              <a:buNone/>
+            </a:pPr>
+            <a:r>
+              <a:rPr lang="en-US" sz="1000" dirty="0">
+                <a:solidFill>
+                  <a:schemeClr val="accent5"/>
+                </a:solidFill>
+              </a:rPr>
+              <a:t>前倒し分は年間の台数を増やさない点に注意</a:t>
+            </a:r>
+            <a:endParaRPr lang="en-US" sz="1000" dirty="0"/>
+          </a:p>
+        </p:txBody>
+      </p:sp>
+      <p:sp>
+        <p:nvSpPr>
+          <p:cNvPr id="25" name="Slide Number Placeholder 0"/>
+          <p:cNvSpPr>
+            <a:spLocks noGrp="1"/>
+          </p:cNvSpPr>
+          <p:nvPr>
+            <p:ph type="sldNum" sz="quarter" idx="4294967295"/>
+          </p:nvPr>
+        </p:nvSpPr>
+        <p:spPr>
+          <a:xfrm>
+            <a:off x="11338560" y="6473952"/>
+            <a:ext cx="411480" cy="274320"/>
+          </a:xfrm>
+          <a:prstGeom prst="rect">
+            <a:avLst/>
+          </a:prstGeom>
+          <a:extLst>
+            <a:ext uri="{C572A759-6A51-4108-AA02-DFA0A04FC94B}">
+              <ma14:wrappingTextBoxFlag xmlns:ma14="http://schemas.microsoft.com/office/mac/drawingml/2011/main" val="0"/>
+            </a:ext>
+          </a:extLst>
+        </p:spPr>
+        <p:txBody>
+          <a:bodyPr/>
+          <a:lstStyle>
+            <a:lvl1pPr>
+              <a:defRPr sz="900">
+                <a:solidFill>
+                  <a:schemeClr val="accent5"/>
+                </a:solidFill>
+              </a:defRPr>
+            </a:lvl1pPr>
+          </a:lstStyle>
+          <a:p>
+            <a:pPr algn="r"/>
+            <a:fld id="{F7021451-1387-4CA6-816F-3879F97B5CBC}" type="slidenum">
+              <a:rPr b="0" lang="en-US"/>
+              <a:t>2</a:t>
+            </a:fld>
+            <a:endParaRPr lang="en-US"/>
+          </a:p>
+        </p:txBody>
+      </p:sp>
+    </p:spTree>
+  </p:cSld>
+  <p:clrMapOvr>
+    <a:masterClrMapping/>
+  </p:clrMapOvr>
+</p:sld>
+</file>
+
+<file path=ppt/slides/slide3.xml><?xml version="1.0" encoding="utf-8"?>
+<p:sld xmlns:a="http://schemas.openxmlformats.org/drawingml/2006/main" xmlns:r="http://schemas.openxmlformats.org/officeDocument/2006/relationships" xmlns:p="http://schemas.openxmlformats.org/presentationml/2006/main">
+  <p:cSld name="Slide 3">
+    <p:spTree>
+      <p:nvGrpSpPr>
+        <p:cNvPr id="1" name=""/>
+        <p:cNvGrpSpPr/>
+        <p:nvPr/>
+      </p:nvGrpSpPr>
+      <p:grpSpPr>
+        <a:xfrm>
+          <a:off x="0" y="0"/>
+          <a:ext cx="0" cy="0"/>
+          <a:chOff x="0" y="0"/>
+          <a:chExt cx="0" cy="0"/>
+        </a:xfrm>
+      </p:grpSpPr>
+      <p:sp>
+        <p:nvSpPr>
+          <p:cNvPr id="2" name="Text 0"/>
+          <p:cNvSpPr/>
+          <p:nvPr>
+            <p:ph idx="100" type="title" hasCustomPrompt="1"/>
+          </p:nvPr>
+        </p:nvSpPr>
+        <p:spPr>
+          <a:xfrm>
+            <a:off x="457200" y="274320"/>
+            <a:ext cx="11274552" cy="685800"/>
+          </a:xfrm>
+          <a:prstGeom prst="rect">
+            <a:avLst/>
+          </a:prstGeom>
+          <a:noFill/>
+          <a:ln/>
+        </p:spPr>
+        <p:txBody>
+          <a:bodyPr wrap="square" lIns="0" tIns="0" rIns="0" bIns="0" rtlCol="0" anchor="ctr"/>
+          <a:lstStyle/>
+          <a:p>
+            <a:pPr algn="l" indent="0" marL="0">
+              <a:buNone/>
+            </a:pPr>
+            <a:r>
+              <a:rPr lang="en-US" sz="2400" b="1" dirty="0">
+                <a:solidFill>
+                  <a:schemeClr val="tx2"/>
+                </a:solidFill>
+              </a:rPr>
+              <a:t>11/7までにQ3受注を確定し年間8.7台を挽回、9F達成には棚卸の倍増が必要</a:t>
+            </a:r>
+            <a:endParaRPr lang="en-US" sz="2400" dirty="0"/>
+          </a:p>
+        </p:txBody>
+      </p:sp>
+      <p:sp>
+        <p:nvSpPr>
+          <p:cNvPr id="3" name="Text 0"/>
+          <p:cNvSpPr/>
+          <p:nvPr>
+            <p:ph idx="101" type="body" hasCustomPrompt="1"/>
+          </p:nvPr>
+        </p:nvSpPr>
+        <p:spPr>
+          <a:xfrm>
+            <a:off x="457200" y="914400"/>
+            <a:ext cx="11274552" cy="365760"/>
+          </a:xfrm>
+          <a:prstGeom prst="rect">
+            <a:avLst/>
+          </a:prstGeom>
+          <a:noFill/>
+          <a:ln/>
+        </p:spPr>
+        <p:txBody>
+          <a:bodyPr wrap="square" lIns="0" tIns="0" rIns="0" bIns="0" rtlCol="0" anchor="t"/>
+          <a:lstStyle/>
+          <a:p>
+            <a:pPr indent="0" marL="0">
+              <a:buNone/>
+            </a:pPr>
+            <a:r>
+              <a:rPr lang="en-US" sz="1300" dirty="0">
+                <a:solidFill>
+                  <a:schemeClr val="accent5"/>
+                </a:solidFill>
+              </a:rPr>
+              <a:t>Q3は11/7までに受注確定(12月納品のリミット)。年間は厳しめの率(昇格15%・引き戻し10%・商談化2%)で試算し、11/7に判定</a:t>
             </a:r>
             <a:endParaRPr lang="en-US" sz="1300" dirty="0"/>
           </a:p>
@@ -6352,7 +10967,7 @@
         <p:spPr>
           <a:xfrm>
             <a:off x="5879592" y="2194560"/>
-            <a:ext cx="5779008" cy="877824"/>
+            <a:ext cx="5779008" cy="466344"/>
           </a:xfrm>
           <a:prstGeom prst="rect">
             <a:avLst/>
@@ -6377,6 +10992,256 @@
         <p:spPr>
           <a:xfrm>
             <a:off x="5916168" y="2194560"/>
+            <a:ext cx="758952" cy="466344"/>
+          </a:xfrm>
+          <a:prstGeom prst="rect">
+            <a:avLst/>
+          </a:prstGeom>
+          <a:noFill/>
+          <a:ln/>
+        </p:spPr>
+        <p:txBody>
+          <a:bodyPr wrap="square" lIns="0" tIns="0" rIns="0" bIns="0" rtlCol="0" anchor="ctr"/>
+          <a:lstStyle/>
+          <a:p>
+            <a:pPr indent="0" marL="0">
+              <a:buNone/>
+            </a:pPr>
+            <a:r>
+              <a:rPr lang="en-US" sz="1000" b="1" dirty="0">
+                <a:solidFill>
+                  <a:schemeClr val="tx2"/>
+                </a:solidFill>
+              </a:rPr>
+              <a:t>Q3刈り取り</a:t>
+            </a:r>
+            <a:endParaRPr lang="en-US" sz="1000" dirty="0"/>
+          </a:p>
+        </p:txBody>
+      </p:sp>
+      <p:sp>
+        <p:nvSpPr>
+          <p:cNvPr id="42" name="bar-0-0"/>
+          <p:cNvSpPr/>
+          <p:nvPr/>
+        </p:nvSpPr>
+        <p:spPr>
+          <a:xfrm>
+            <a:off x="6702552" y="2240280"/>
+            <a:ext cx="919886" cy="365760"/>
+          </a:xfrm>
+          <a:prstGeom prst="roundRect">
+            <a:avLst>
+              <a:gd name="adj" fmla="val 15000"/>
+            </a:avLst>
+          </a:prstGeom>
+          <a:solidFill>
+            <a:schemeClr val="accent4"/>
+          </a:solidFill>
+          <a:ln w="12700">
+            <a:solidFill>
+              <a:schemeClr val="accent4"/>
+            </a:solidFill>
+            <a:prstDash val="solid"/>
+          </a:ln>
+        </p:spPr>
+      </p:sp>
+      <p:sp>
+        <p:nvSpPr>
+          <p:cNvPr id="43" name="bar-t-0-0"/>
+          <p:cNvSpPr txBox="1"/>
+          <p:nvPr/>
+        </p:nvSpPr>
+        <p:spPr>
+          <a:xfrm>
+            <a:off x="6748272" y="2240280"/>
+            <a:ext cx="828446" cy="365760"/>
+          </a:xfrm>
+          <a:prstGeom prst="rect">
+            <a:avLst/>
+          </a:prstGeom>
+          <a:noFill/>
+          <a:ln/>
+        </p:spPr>
+        <p:txBody>
+          <a:bodyPr wrap="square" lIns="0" tIns="0" rIns="0" bIns="0" rtlCol="0" anchor="ctr"/>
+          <a:lstStyle/>
+          <a:p>
+            <a:pPr indent="0" marL="0">
+              <a:buNone/>
+            </a:pPr>
+            <a:r>
+              <a:rPr lang="en-US" sz="1000" b="1" dirty="0">
+                <a:solidFill>
+                  <a:schemeClr val="bg1"/>
+                </a:solidFill>
+              </a:rPr>
+              <a:t>Q3 FCT16件 納期確定</a:t>
+            </a:r>
+            <a:endParaRPr lang="en-US" sz="1000" dirty="0"/>
+          </a:p>
+        </p:txBody>
+      </p:sp>
+      <p:sp>
+        <p:nvSpPr>
+          <p:cNvPr id="44" name="bar-0-1"/>
+          <p:cNvSpPr/>
+          <p:nvPr/>
+        </p:nvSpPr>
+        <p:spPr>
+          <a:xfrm>
+            <a:off x="7713878" y="2240280"/>
+            <a:ext cx="1931213" cy="365760"/>
+          </a:xfrm>
+          <a:prstGeom prst="roundRect">
+            <a:avLst>
+              <a:gd name="adj" fmla="val 15000"/>
+            </a:avLst>
+          </a:prstGeom>
+          <a:solidFill>
+            <a:schemeClr val="accent4"/>
+          </a:solidFill>
+          <a:ln w="12700">
+            <a:solidFill>
+              <a:schemeClr val="accent4"/>
+            </a:solidFill>
+            <a:prstDash val="solid"/>
+          </a:ln>
+        </p:spPr>
+      </p:sp>
+      <p:sp>
+        <p:nvSpPr>
+          <p:cNvPr id="45" name="bar-t-0-1"/>
+          <p:cNvSpPr txBox="1"/>
+          <p:nvPr/>
+        </p:nvSpPr>
+        <p:spPr>
+          <a:xfrm>
+            <a:off x="7759598" y="2240280"/>
+            <a:ext cx="1839773" cy="365760"/>
+          </a:xfrm>
+          <a:prstGeom prst="rect">
+            <a:avLst/>
+          </a:prstGeom>
+          <a:noFill/>
+          <a:ln/>
+        </p:spPr>
+        <p:txBody>
+          <a:bodyPr wrap="square" lIns="0" tIns="0" rIns="0" bIns="0" rtlCol="0" anchor="ctr"/>
+          <a:lstStyle/>
+          <a:p>
+            <a:pPr indent="0" marL="0">
+              <a:buNone/>
+            </a:pPr>
+            <a:r>
+              <a:rPr lang="en-US" sz="1000" b="1" dirty="0">
+                <a:solidFill>
+                  <a:schemeClr val="bg1"/>
+                </a:solidFill>
+              </a:rPr>
+              <a:t>Q4前倒し8件 年内受注交渉</a:t>
+            </a:r>
+            <a:endParaRPr lang="en-US" sz="1000" dirty="0"/>
+          </a:p>
+        </p:txBody>
+      </p:sp>
+      <p:sp>
+        <p:nvSpPr>
+          <p:cNvPr id="46" name="bar-0-2"/>
+          <p:cNvSpPr/>
+          <p:nvPr/>
+        </p:nvSpPr>
+        <p:spPr>
+          <a:xfrm>
+            <a:off x="9736531" y="2240280"/>
+            <a:ext cx="1931213" cy="365760"/>
+          </a:xfrm>
+          <a:prstGeom prst="roundRect">
+            <a:avLst>
+              <a:gd name="adj" fmla="val 15000"/>
+            </a:avLst>
+          </a:prstGeom>
+          <a:solidFill>
+            <a:schemeClr val="accent4"/>
+          </a:solidFill>
+          <a:ln w="12700">
+            <a:solidFill>
+              <a:schemeClr val="accent4"/>
+            </a:solidFill>
+            <a:prstDash val="solid"/>
+          </a:ln>
+        </p:spPr>
+      </p:sp>
+      <p:sp>
+        <p:nvSpPr>
+          <p:cNvPr id="47" name="bar-t-0-2"/>
+          <p:cNvSpPr txBox="1"/>
+          <p:nvPr/>
+        </p:nvSpPr>
+        <p:spPr>
+          <a:xfrm>
+            <a:off x="9782251" y="2240280"/>
+            <a:ext cx="1839773" cy="365760"/>
+          </a:xfrm>
+          <a:prstGeom prst="rect">
+            <a:avLst/>
+          </a:prstGeom>
+          <a:noFill/>
+          <a:ln/>
+        </p:spPr>
+        <p:txBody>
+          <a:bodyPr wrap="square" lIns="0" tIns="0" rIns="0" bIns="0" rtlCol="0" anchor="ctr"/>
+          <a:lstStyle/>
+          <a:p>
+            <a:pPr indent="0" marL="0">
+              <a:buNone/>
+            </a:pPr>
+            <a:r>
+              <a:rPr lang="en-US" sz="1000" b="1" dirty="0">
+                <a:solidFill>
+                  <a:schemeClr val="bg1"/>
+                </a:solidFill>
+              </a:rPr>
+              <a:t>PO回収・12月納品確定</a:t>
+            </a:r>
+            <a:endParaRPr lang="en-US" sz="1000" dirty="0"/>
+          </a:p>
+        </p:txBody>
+      </p:sp>
+      <p:sp>
+        <p:nvSpPr>
+          <p:cNvPr id="48" name="lane-1"/>
+          <p:cNvSpPr/>
+          <p:nvPr/>
+        </p:nvSpPr>
+        <p:spPr>
+          <a:xfrm>
+            <a:off x="5879592" y="2697480"/>
+            <a:ext cx="5779008" cy="877824"/>
+          </a:xfrm>
+          <a:prstGeom prst="rect">
+            <a:avLst/>
+          </a:prstGeom>
+          <a:solidFill>
+            <a:schemeClr val="bg1"/>
+          </a:solidFill>
+          <a:ln w="12700">
+            <a:solidFill>
+              <a:schemeClr val="bg1"/>
+            </a:solidFill>
+            <a:prstDash val="solid"/>
+          </a:ln>
+        </p:spPr>
+      </p:sp>
+      <p:sp>
+        <p:nvSpPr>
+          <p:cNvPr id="49" name="lane-t-1"/>
+          <p:cNvSpPr txBox="1"/>
+          <p:nvPr/>
+        </p:nvSpPr>
+        <p:spPr>
+          <a:xfrm>
+            <a:off x="5916168" y="2697480"/>
             <a:ext cx="758952" cy="877824"/>
           </a:xfrm>
           <a:prstGeom prst="rect">
@@ -6406,13 +11271,13 @@
       </p:sp>
       <p:sp>
         <p:nvSpPr>
-          <p:cNvPr id="42" name="bar-0-0"/>
+          <p:cNvPr id="50" name="bar-1-0"/>
           <p:cNvSpPr/>
           <p:nvPr/>
         </p:nvSpPr>
         <p:spPr>
           <a:xfrm>
-            <a:off x="6702552" y="2240280"/>
+            <a:off x="6702552" y="2743200"/>
             <a:ext cx="919886" cy="365760"/>
           </a:xfrm>
           <a:prstGeom prst="roundRect">
@@ -6433,13 +11298,13 @@
       </p:sp>
       <p:sp>
         <p:nvSpPr>
-          <p:cNvPr id="43" name="bar-t-0-0"/>
+          <p:cNvPr id="51" name="bar-t-1-0"/>
           <p:cNvSpPr txBox="1"/>
           <p:nvPr/>
         </p:nvSpPr>
         <p:spPr>
           <a:xfrm>
-            <a:off x="6748272" y="2240280"/>
+            <a:off x="6748272" y="2743200"/>
             <a:ext cx="828446" cy="365760"/>
           </a:xfrm>
           <a:prstGeom prst="rect">
@@ -6469,13 +11334,13 @@
       </p:sp>
       <p:sp>
         <p:nvSpPr>
-          <p:cNvPr id="44" name="bar-0-1"/>
+          <p:cNvPr id="52" name="bar-1-1"/>
           <p:cNvSpPr/>
           <p:nvPr/>
         </p:nvSpPr>
         <p:spPr>
           <a:xfrm>
-            <a:off x="7713878" y="2240280"/>
+            <a:off x="7713878" y="2743200"/>
             <a:ext cx="919886" cy="365760"/>
           </a:xfrm>
           <a:prstGeom prst="roundRect">
@@ -6496,13 +11361,13 @@
       </p:sp>
       <p:sp>
         <p:nvSpPr>
-          <p:cNvPr id="45" name="bar-t-0-1"/>
+          <p:cNvPr id="53" name="bar-t-1-1"/>
           <p:cNvSpPr txBox="1"/>
           <p:nvPr/>
         </p:nvSpPr>
         <p:spPr>
           <a:xfrm>
-            <a:off x="7759598" y="2240280"/>
+            <a:off x="7759598" y="2743200"/>
             <a:ext cx="828446" cy="365760"/>
           </a:xfrm>
           <a:prstGeom prst="rect">
@@ -6532,13 +11397,13 @@
       </p:sp>
       <p:sp>
         <p:nvSpPr>
-          <p:cNvPr id="46" name="bar-0-2"/>
+          <p:cNvPr id="54" name="bar-1-2"/>
           <p:cNvSpPr/>
           <p:nvPr/>
         </p:nvSpPr>
         <p:spPr>
           <a:xfrm>
-            <a:off x="7713878" y="2651760"/>
+            <a:off x="8725205" y="2743200"/>
             <a:ext cx="1931213" cy="365760"/>
           </a:xfrm>
           <a:prstGeom prst="roundRect">
@@ -6559,13 +11424,76 @@
       </p:sp>
       <p:sp>
         <p:nvSpPr>
-          <p:cNvPr id="47" name="bar-t-0-2"/>
+          <p:cNvPr id="55" name="bar-t-1-2"/>
           <p:cNvSpPr txBox="1"/>
           <p:nvPr/>
         </p:nvSpPr>
         <p:spPr>
           <a:xfrm>
-            <a:off x="7759598" y="2651760"/>
+            <a:off x="8770925" y="2743200"/>
+            <a:ext cx="1839773" cy="365760"/>
+          </a:xfrm>
+          <a:prstGeom prst="rect">
+            <a:avLst/>
+          </a:prstGeom>
+          <a:noFill/>
+          <a:ln/>
+        </p:spPr>
+        <p:txBody>
+          <a:bodyPr wrap="square" lIns="0" tIns="0" rIns="0" bIns="0" rtlCol="0" anchor="ctr"/>
+          <a:lstStyle/>
+          <a:p>
+            <a:pPr indent="0" marL="0">
+              <a:buNone/>
+            </a:pPr>
+            <a:r>
+              <a:rPr lang="en-US" sz="1000" b="1" dirty="0">
+                <a:solidFill>
+                  <a:schemeClr val="bg1"/>
+                </a:solidFill>
+              </a:rPr>
+              <a:t>ID/FP デモ・見積(11月期限)</a:t>
+            </a:r>
+            <a:endParaRPr lang="en-US" sz="1000" dirty="0"/>
+          </a:p>
+        </p:txBody>
+      </p:sp>
+      <p:sp>
+        <p:nvSpPr>
+          <p:cNvPr id="56" name="bar-1-3"/>
+          <p:cNvSpPr/>
+          <p:nvPr/>
+        </p:nvSpPr>
+        <p:spPr>
+          <a:xfrm>
+            <a:off x="7713878" y="3154680"/>
+            <a:ext cx="1931213" cy="365760"/>
+          </a:xfrm>
+          <a:prstGeom prst="roundRect">
+            <a:avLst>
+              <a:gd name="adj" fmla="val 15000"/>
+            </a:avLst>
+          </a:prstGeom>
+          <a:solidFill>
+            <a:schemeClr val="accent1"/>
+          </a:solidFill>
+          <a:ln w="12700">
+            <a:solidFill>
+              <a:schemeClr val="accent1"/>
+            </a:solidFill>
+            <a:prstDash val="solid"/>
+          </a:ln>
+        </p:spPr>
+      </p:sp>
+      <p:sp>
+        <p:nvSpPr>
+          <p:cNvPr id="57" name="bar-t-1-3"/>
+          <p:cNvSpPr txBox="1"/>
+          <p:nvPr/>
+        </p:nvSpPr>
+        <p:spPr>
+          <a:xfrm>
+            <a:off x="7759598" y="3154680"/>
             <a:ext cx="1839773" cy="365760"/>
           </a:xfrm>
           <a:prstGeom prst="rect">
@@ -6595,194 +11523,7 @@
       </p:sp>
       <p:sp>
         <p:nvSpPr>
-          <p:cNvPr id="48" name="lane-1"/>
-          <p:cNvSpPr/>
-          <p:nvPr/>
-        </p:nvSpPr>
-        <p:spPr>
-          <a:xfrm>
-            <a:off x="5879592" y="3108960"/>
-            <a:ext cx="5779008" cy="466344"/>
-          </a:xfrm>
-          <a:prstGeom prst="rect">
-            <a:avLst/>
-          </a:prstGeom>
-          <a:solidFill>
-            <a:schemeClr val="bg1"/>
-          </a:solidFill>
-          <a:ln w="12700">
-            <a:solidFill>
-              <a:schemeClr val="bg1"/>
-            </a:solidFill>
-            <a:prstDash val="solid"/>
-          </a:ln>
-        </p:spPr>
-      </p:sp>
-      <p:sp>
-        <p:nvSpPr>
-          <p:cNvPr id="49" name="lane-t-1"/>
-          <p:cNvSpPr txBox="1"/>
-          <p:nvPr/>
-        </p:nvSpPr>
-        <p:spPr>
-          <a:xfrm>
-            <a:off x="5916168" y="3108960"/>
-            <a:ext cx="758952" cy="466344"/>
-          </a:xfrm>
-          <a:prstGeom prst="rect">
-            <a:avLst/>
-          </a:prstGeom>
-          <a:noFill/>
-          <a:ln/>
-        </p:spPr>
-        <p:txBody>
-          <a:bodyPr wrap="square" lIns="0" tIns="0" rIns="0" bIns="0" rtlCol="0" anchor="ctr"/>
-          <a:lstStyle/>
-          <a:p>
-            <a:pPr indent="0" marL="0">
-              <a:buNone/>
-            </a:pPr>
-            <a:r>
-              <a:rPr lang="en-US" sz="1000" b="1" dirty="0">
-                <a:solidFill>
-                  <a:schemeClr val="tx2"/>
-                </a:solidFill>
-              </a:rPr>
-              <a:t>案件</a:t>
-            </a:r>
-            <a:endParaRPr lang="en-US" sz="1000" dirty="0"/>
-          </a:p>
-        </p:txBody>
-      </p:sp>
-      <p:sp>
-        <p:nvSpPr>
-          <p:cNvPr id="50" name="bar-1-0"/>
-          <p:cNvSpPr/>
-          <p:nvPr/>
-        </p:nvSpPr>
-        <p:spPr>
-          <a:xfrm>
-            <a:off x="6702552" y="3154680"/>
-            <a:ext cx="919886" cy="365760"/>
-          </a:xfrm>
-          <a:prstGeom prst="roundRect">
-            <a:avLst>
-              <a:gd name="adj" fmla="val 15000"/>
-            </a:avLst>
-          </a:prstGeom>
-          <a:solidFill>
-            <a:schemeClr val="accent1"/>
-          </a:solidFill>
-          <a:ln w="12700">
-            <a:solidFill>
-              <a:schemeClr val="accent1"/>
-            </a:solidFill>
-            <a:prstDash val="solid"/>
-          </a:ln>
-        </p:spPr>
-      </p:sp>
-      <p:sp>
-        <p:nvSpPr>
-          <p:cNvPr id="51" name="bar-t-1-0"/>
-          <p:cNvSpPr txBox="1"/>
-          <p:nvPr/>
-        </p:nvSpPr>
-        <p:spPr>
-          <a:xfrm>
-            <a:off x="6748272" y="3154680"/>
-            <a:ext cx="828446" cy="365760"/>
-          </a:xfrm>
-          <a:prstGeom prst="rect">
-            <a:avLst/>
-          </a:prstGeom>
-          <a:noFill/>
-          <a:ln/>
-        </p:spPr>
-        <p:txBody>
-          <a:bodyPr wrap="square" lIns="0" tIns="0" rIns="0" bIns="0" rtlCol="0" anchor="ctr"/>
-          <a:lstStyle/>
-          <a:p>
-            <a:pPr indent="0" marL="0">
-              <a:buNone/>
-            </a:pPr>
-            <a:r>
-              <a:rPr lang="en-US" sz="1000" b="1" dirty="0">
-                <a:solidFill>
-                  <a:schemeClr val="bg1"/>
-                </a:solidFill>
-              </a:rPr>
-              <a:t>A案件43件 期日確定</a:t>
-            </a:r>
-            <a:endParaRPr lang="en-US" sz="1000" dirty="0"/>
-          </a:p>
-        </p:txBody>
-      </p:sp>
-      <p:sp>
-        <p:nvSpPr>
-          <p:cNvPr id="52" name="bar-1-1"/>
-          <p:cNvSpPr/>
-          <p:nvPr/>
-        </p:nvSpPr>
-        <p:spPr>
-          <a:xfrm>
-            <a:off x="7713878" y="3154680"/>
-            <a:ext cx="1931213" cy="365760"/>
-          </a:xfrm>
-          <a:prstGeom prst="roundRect">
-            <a:avLst>
-              <a:gd name="adj" fmla="val 15000"/>
-            </a:avLst>
-          </a:prstGeom>
-          <a:solidFill>
-            <a:schemeClr val="accent1"/>
-          </a:solidFill>
-          <a:ln w="12700">
-            <a:solidFill>
-              <a:schemeClr val="accent1"/>
-            </a:solidFill>
-            <a:prstDash val="solid"/>
-          </a:ln>
-        </p:spPr>
-      </p:sp>
-      <p:sp>
-        <p:nvSpPr>
-          <p:cNvPr id="53" name="bar-t-1-1"/>
-          <p:cNvSpPr txBox="1"/>
-          <p:nvPr/>
-        </p:nvSpPr>
-        <p:spPr>
-          <a:xfrm>
-            <a:off x="7759598" y="3154680"/>
-            <a:ext cx="1839773" cy="365760"/>
-          </a:xfrm>
-          <a:prstGeom prst="rect">
-            <a:avLst/>
-          </a:prstGeom>
-          <a:noFill/>
-          <a:ln/>
-        </p:spPr>
-        <p:txBody>
-          <a:bodyPr wrap="square" lIns="0" tIns="0" rIns="0" bIns="0" rtlCol="0" anchor="ctr"/>
-          <a:lstStyle/>
-          <a:p>
-            <a:pPr indent="0" marL="0">
-              <a:buNone/>
-            </a:pPr>
-            <a:r>
-              <a:rPr lang="en-US" sz="1000" b="1" dirty="0">
-                <a:solidFill>
-                  <a:schemeClr val="bg1"/>
-                </a:solidFill>
-              </a:rPr>
-              <a:t>ID/FP デモ・見積(11月期限)</a:t>
-            </a:r>
-            <a:endParaRPr lang="en-US" sz="1000" dirty="0"/>
-          </a:p>
-        </p:txBody>
-      </p:sp>
-      <p:sp>
-        <p:nvSpPr>
-          <p:cNvPr id="54" name="lane-2"/>
+          <p:cNvPr id="58" name="lane-2"/>
           <p:cNvSpPr/>
           <p:nvPr/>
         </p:nvSpPr>
@@ -6807,7 +11548,7 @@
       </p:sp>
       <p:sp>
         <p:nvSpPr>
-          <p:cNvPr id="55" name="lane-t-2"/>
+          <p:cNvPr id="59" name="lane-t-2"/>
           <p:cNvSpPr txBox="1"/>
           <p:nvPr/>
         </p:nvSpPr>
@@ -6843,7 +11584,7 @@
       </p:sp>
       <p:sp>
         <p:nvSpPr>
-          <p:cNvPr id="56" name="bar-2-0"/>
+          <p:cNvPr id="60" name="bar-2-0"/>
           <p:cNvSpPr/>
           <p:nvPr/>
         </p:nvSpPr>
@@ -6870,7 +11611,7 @@
       </p:sp>
       <p:sp>
         <p:nvSpPr>
-          <p:cNvPr id="57" name="bar-t-2-0"/>
+          <p:cNvPr id="61" name="bar-t-2-0"/>
           <p:cNvSpPr txBox="1"/>
           <p:nvPr/>
         </p:nvSpPr>
@@ -6906,7 +11647,7 @@
       </p:sp>
       <p:sp>
         <p:nvSpPr>
-          <p:cNvPr id="58" name="bar-2-1"/>
+          <p:cNvPr id="62" name="bar-2-1"/>
           <p:cNvSpPr/>
           <p:nvPr/>
         </p:nvSpPr>
@@ -6933,7 +11674,7 @@
       </p:sp>
       <p:sp>
         <p:nvSpPr>
-          <p:cNvPr id="59" name="bar-t-2-1"/>
+          <p:cNvPr id="63" name="bar-t-2-1"/>
           <p:cNvSpPr txBox="1"/>
           <p:nvPr/>
         </p:nvSpPr>
@@ -6969,7 +11710,7 @@
       </p:sp>
       <p:sp>
         <p:nvSpPr>
-          <p:cNvPr id="60" name="bar-2-2"/>
+          <p:cNvPr id="64" name="bar-2-2"/>
           <p:cNvSpPr/>
           <p:nvPr/>
         </p:nvSpPr>
@@ -6996,7 +11737,7 @@
       </p:sp>
       <p:sp>
         <p:nvSpPr>
-          <p:cNvPr id="61" name="bar-t-2-2"/>
+          <p:cNvPr id="65" name="bar-t-2-2"/>
           <p:cNvSpPr txBox="1"/>
           <p:nvPr/>
         </p:nvSpPr>
@@ -7032,7 +11773,7 @@
       </p:sp>
       <p:sp>
         <p:nvSpPr>
-          <p:cNvPr id="62" name="lane-3"/>
+          <p:cNvPr id="66" name="lane-3"/>
           <p:cNvSpPr/>
           <p:nvPr/>
         </p:nvSpPr>
@@ -7057,7 +11798,7 @@
       </p:sp>
       <p:sp>
         <p:nvSpPr>
-          <p:cNvPr id="63" name="lane-t-3"/>
+          <p:cNvPr id="67" name="lane-t-3"/>
           <p:cNvSpPr txBox="1"/>
           <p:nvPr/>
         </p:nvSpPr>
@@ -7093,7 +11834,7 @@
       </p:sp>
       <p:sp>
         <p:nvSpPr>
-          <p:cNvPr id="64" name="bar-3-0"/>
+          <p:cNvPr id="68" name="bar-3-0"/>
           <p:cNvSpPr/>
           <p:nvPr/>
         </p:nvSpPr>
@@ -7120,7 +11861,7 @@
       </p:sp>
       <p:sp>
         <p:nvSpPr>
-          <p:cNvPr id="65" name="bar-t-3-0"/>
+          <p:cNvPr id="69" name="bar-t-3-0"/>
           <p:cNvSpPr txBox="1"/>
           <p:nvPr/>
         </p:nvSpPr>
@@ -7156,7 +11897,7 @@
       </p:sp>
       <p:sp>
         <p:nvSpPr>
-          <p:cNvPr id="66" name="bar-3-1"/>
+          <p:cNvPr id="70" name="bar-3-1"/>
           <p:cNvSpPr/>
           <p:nvPr/>
         </p:nvSpPr>
@@ -7183,7 +11924,7 @@
       </p:sp>
       <p:sp>
         <p:nvSpPr>
-          <p:cNvPr id="67" name="bar-t-3-1"/>
+          <p:cNvPr id="71" name="bar-t-3-1"/>
           <p:cNvSpPr txBox="1"/>
           <p:nvPr/>
         </p:nvSpPr>
@@ -7211,7 +11952,7 @@
                   <a:schemeClr val="bg1"/>
                 </a:solidFill>
               </a:rPr>
-              <a:t>9F達成判定</a:t>
+              <a:t>Q3・9F判定</a:t>
             </a:r>
             <a:endParaRPr lang="en-US" sz="1000" dirty="0"/>
           </a:p>
@@ -7219,7 +11960,7 @@
       </p:sp>
       <p:sp>
         <p:nvSpPr>
-          <p:cNvPr id="68" name="ask"/>
+          <p:cNvPr id="72" name="ask"/>
           <p:cNvSpPr/>
           <p:nvPr/>
         </p:nvSpPr>
@@ -7246,7 +11987,7 @@
       </p:sp>
       <p:sp>
         <p:nvSpPr>
-          <p:cNvPr id="69" name="ask-text"/>
+          <p:cNvPr id="73" name="ask-text"/>
           <p:cNvSpPr txBox="1"/>
           <p:nvPr/>
         </p:nvSpPr>
@@ -7295,7 +12036,7 @@
                   <a:schemeClr val="tx1"/>
                 </a:solidFill>
               </a:rPr>
-              <a:t>主力代理店(和光・池田・レスター・ナカライ)の幹部へ、年度内前倒しの要請(10月中)</a:t>
+              <a:t>主力代理店(和光・池田・レスター・ナカライ)の幹部へ、Q3案件の年内受注と年度内前倒しの要請(10月中)</a:t>
             </a:r>
             <a:endParaRPr lang="en-US" sz="1100" dirty="0"/>
           </a:p>
@@ -7358,7 +12099,7 @@
             <a:pPr algn="r"/>
             <a:fld id="{F7021451-1387-4CA6-816F-3879F97B5CBC}" type="slidenum">
               <a:rPr b="0" lang="en-US"/>
-              <a:t>2</a:t>
+              <a:t>3</a:t>
             </a:fld>
             <a:endParaRPr lang="en-US"/>
           </a:p>
